--- a/site/content/en/resources/learn/assessing_the_stone_stability_of_norman_sicilys_monuments/Architecture_and_Stone_Stability_in_Norman_Sicily.pptx
+++ b/site/content/en/resources/learn/assessing_the_stone_stability_of_norman_sicilys_monuments/Architecture_and_Stone_Stability_in_Norman_Sicily.pptx
@@ -1,25 +1,25 @@
 
 <file path=ppt/presentation.xml><?xml version="1.0" encoding="utf-8"?>
-<p:presentation xmlns:a="http://schemas.openxmlformats.org/drawingml/2006/main" xmlns:r="http://schemas.openxmlformats.org/officeDocument/2006/relationships" xmlns:mc="http://schemas.openxmlformats.org/markup-compatibility/2006" xmlns:mv="urn:schemas-microsoft-com:mac:vml" xmlns:p="http://schemas.openxmlformats.org/presentationml/2006/main" xmlns:c="http://schemas.openxmlformats.org/drawingml/2006/chart" xmlns:dgm="http://schemas.openxmlformats.org/drawingml/2006/diagram" xmlns:o="urn:schemas-microsoft-com:office:office" xmlns:v="urn:schemas-microsoft-com:vml" xmlns:pvml="urn:schemas-microsoft-com:office:powerpoint" xmlns:com="http://schemas.openxmlformats.org/drawingml/2006/compatibility" xmlns:p14="http://schemas.microsoft.com/office/powerpoint/2010/main" xmlns:p15="http://schemas.microsoft.com/office/powerpoint/2012/main" xmlns:ahyp="http://schemas.microsoft.com/office/drawing/2018/hyperlinkcolor" autoCompressPictures="0" strictFirstAndLastChars="0" saveSubsetFonts="1">
+<p:presentation xmlns:a="http://schemas.openxmlformats.org/drawingml/2006/main" xmlns:r="http://schemas.openxmlformats.org/officeDocument/2006/relationships" xmlns:p="http://schemas.openxmlformats.org/presentationml/2006/main" strictFirstAndLastChars="0" saveSubsetFonts="1" autoCompressPictures="0">
   <p:sldMasterIdLst>
-    <p:sldMasterId id="2147483659" r:id="rId4"/>
+    <p:sldMasterId id="2147483659" r:id="rId1"/>
   </p:sldMasterIdLst>
   <p:notesMasterIdLst>
-    <p:notesMasterId r:id="rId5"/>
+    <p:notesMasterId r:id="rId9"/>
   </p:notesMasterIdLst>
   <p:sldIdLst>
-    <p:sldId id="256" r:id="rId6"/>
-    <p:sldId id="257" r:id="rId7"/>
-    <p:sldId id="258" r:id="rId8"/>
-    <p:sldId id="259" r:id="rId9"/>
-    <p:sldId id="260" r:id="rId10"/>
-    <p:sldId id="261" r:id="rId11"/>
-    <p:sldId id="262" r:id="rId12"/>
+    <p:sldId id="256" r:id="rId2"/>
+    <p:sldId id="257" r:id="rId3"/>
+    <p:sldId id="258" r:id="rId4"/>
+    <p:sldId id="259" r:id="rId5"/>
+    <p:sldId id="260" r:id="rId6"/>
+    <p:sldId id="261" r:id="rId7"/>
+    <p:sldId id="262" r:id="rId8"/>
   </p:sldIdLst>
-  <p:sldSz cy="5143500" cx="9144000"/>
+  <p:sldSz cx="9144000" cy="5143500" type="screen16x9"/>
   <p:notesSz cx="6858000" cy="9144000"/>
   <p:defaultTextStyle>
-    <a:defPPr lvl="0" marR="0" rtl="0" algn="l">
+    <a:defPPr marR="0" lvl="0" algn="l" rtl="0">
       <a:lnSpc>
         <a:spcPct val="100000"/>
       </a:lnSpc>
@@ -30,7 +30,7 @@
         <a:spcPts val="0"/>
       </a:spcAft>
     </a:defPPr>
-    <a:lvl1pPr lvl="0" marR="0" rtl="0" algn="l">
+    <a:lvl1pPr marR="0" lvl="0" algn="l" rtl="0">
       <a:lnSpc>
         <a:spcPct val="100000"/>
       </a:lnSpc>
@@ -44,7 +44,7 @@
         <a:srgbClr val="000000"/>
       </a:buClr>
       <a:buFont typeface="Arial"/>
-      <a:defRPr b="0" i="0" sz="1400" u="none" cap="none" strike="noStrike">
+      <a:defRPr sz="1400" b="0" i="0" u="none" strike="noStrike" cap="none">
         <a:solidFill>
           <a:srgbClr val="000000"/>
         </a:solidFill>
@@ -54,7 +54,7 @@
         <a:sym typeface="Arial"/>
       </a:defRPr>
     </a:lvl1pPr>
-    <a:lvl2pPr lvl="1" marR="0" rtl="0" algn="l">
+    <a:lvl2pPr marR="0" lvl="1" algn="l" rtl="0">
       <a:lnSpc>
         <a:spcPct val="100000"/>
       </a:lnSpc>
@@ -68,7 +68,7 @@
         <a:srgbClr val="000000"/>
       </a:buClr>
       <a:buFont typeface="Arial"/>
-      <a:defRPr b="0" i="0" sz="1400" u="none" cap="none" strike="noStrike">
+      <a:defRPr sz="1400" b="0" i="0" u="none" strike="noStrike" cap="none">
         <a:solidFill>
           <a:srgbClr val="000000"/>
         </a:solidFill>
@@ -78,7 +78,7 @@
         <a:sym typeface="Arial"/>
       </a:defRPr>
     </a:lvl2pPr>
-    <a:lvl3pPr lvl="2" marR="0" rtl="0" algn="l">
+    <a:lvl3pPr marR="0" lvl="2" algn="l" rtl="0">
       <a:lnSpc>
         <a:spcPct val="100000"/>
       </a:lnSpc>
@@ -92,7 +92,7 @@
         <a:srgbClr val="000000"/>
       </a:buClr>
       <a:buFont typeface="Arial"/>
-      <a:defRPr b="0" i="0" sz="1400" u="none" cap="none" strike="noStrike">
+      <a:defRPr sz="1400" b="0" i="0" u="none" strike="noStrike" cap="none">
         <a:solidFill>
           <a:srgbClr val="000000"/>
         </a:solidFill>
@@ -102,7 +102,7 @@
         <a:sym typeface="Arial"/>
       </a:defRPr>
     </a:lvl3pPr>
-    <a:lvl4pPr lvl="3" marR="0" rtl="0" algn="l">
+    <a:lvl4pPr marR="0" lvl="3" algn="l" rtl="0">
       <a:lnSpc>
         <a:spcPct val="100000"/>
       </a:lnSpc>
@@ -116,7 +116,7 @@
         <a:srgbClr val="000000"/>
       </a:buClr>
       <a:buFont typeface="Arial"/>
-      <a:defRPr b="0" i="0" sz="1400" u="none" cap="none" strike="noStrike">
+      <a:defRPr sz="1400" b="0" i="0" u="none" strike="noStrike" cap="none">
         <a:solidFill>
           <a:srgbClr val="000000"/>
         </a:solidFill>
@@ -126,7 +126,7 @@
         <a:sym typeface="Arial"/>
       </a:defRPr>
     </a:lvl4pPr>
-    <a:lvl5pPr lvl="4" marR="0" rtl="0" algn="l">
+    <a:lvl5pPr marR="0" lvl="4" algn="l" rtl="0">
       <a:lnSpc>
         <a:spcPct val="100000"/>
       </a:lnSpc>
@@ -140,7 +140,7 @@
         <a:srgbClr val="000000"/>
       </a:buClr>
       <a:buFont typeface="Arial"/>
-      <a:defRPr b="0" i="0" sz="1400" u="none" cap="none" strike="noStrike">
+      <a:defRPr sz="1400" b="0" i="0" u="none" strike="noStrike" cap="none">
         <a:solidFill>
           <a:srgbClr val="000000"/>
         </a:solidFill>
@@ -150,7 +150,7 @@
         <a:sym typeface="Arial"/>
       </a:defRPr>
     </a:lvl5pPr>
-    <a:lvl6pPr lvl="5" marR="0" rtl="0" algn="l">
+    <a:lvl6pPr marR="0" lvl="5" algn="l" rtl="0">
       <a:lnSpc>
         <a:spcPct val="100000"/>
       </a:lnSpc>
@@ -164,7 +164,7 @@
         <a:srgbClr val="000000"/>
       </a:buClr>
       <a:buFont typeface="Arial"/>
-      <a:defRPr b="0" i="0" sz="1400" u="none" cap="none" strike="noStrike">
+      <a:defRPr sz="1400" b="0" i="0" u="none" strike="noStrike" cap="none">
         <a:solidFill>
           <a:srgbClr val="000000"/>
         </a:solidFill>
@@ -174,7 +174,7 @@
         <a:sym typeface="Arial"/>
       </a:defRPr>
     </a:lvl6pPr>
-    <a:lvl7pPr lvl="6" marR="0" rtl="0" algn="l">
+    <a:lvl7pPr marR="0" lvl="6" algn="l" rtl="0">
       <a:lnSpc>
         <a:spcPct val="100000"/>
       </a:lnSpc>
@@ -188,7 +188,7 @@
         <a:srgbClr val="000000"/>
       </a:buClr>
       <a:buFont typeface="Arial"/>
-      <a:defRPr b="0" i="0" sz="1400" u="none" cap="none" strike="noStrike">
+      <a:defRPr sz="1400" b="0" i="0" u="none" strike="noStrike" cap="none">
         <a:solidFill>
           <a:srgbClr val="000000"/>
         </a:solidFill>
@@ -198,7 +198,7 @@
         <a:sym typeface="Arial"/>
       </a:defRPr>
     </a:lvl7pPr>
-    <a:lvl8pPr lvl="7" marR="0" rtl="0" algn="l">
+    <a:lvl8pPr marR="0" lvl="7" algn="l" rtl="0">
       <a:lnSpc>
         <a:spcPct val="100000"/>
       </a:lnSpc>
@@ -212,7 +212,7 @@
         <a:srgbClr val="000000"/>
       </a:buClr>
       <a:buFont typeface="Arial"/>
-      <a:defRPr b="0" i="0" sz="1400" u="none" cap="none" strike="noStrike">
+      <a:defRPr sz="1400" b="0" i="0" u="none" strike="noStrike" cap="none">
         <a:solidFill>
           <a:srgbClr val="000000"/>
         </a:solidFill>
@@ -222,7 +222,7 @@
         <a:sym typeface="Arial"/>
       </a:defRPr>
     </a:lvl8pPr>
-    <a:lvl9pPr lvl="8" marR="0" rtl="0" algn="l">
+    <a:lvl9pPr marR="0" lvl="8" algn="l" rtl="0">
       <a:lnSpc>
         <a:spcPct val="100000"/>
       </a:lnSpc>
@@ -236,7 +236,7 @@
         <a:srgbClr val="000000"/>
       </a:buClr>
       <a:buFont typeface="Arial"/>
-      <a:defRPr b="0" i="0" sz="1400" u="none" cap="none" strike="noStrike">
+      <a:defRPr sz="1400" b="0" i="0" u="none" strike="noStrike" cap="none">
         <a:solidFill>
           <a:srgbClr val="000000"/>
         </a:solidFill>
@@ -249,7 +249,7 @@
   </p:defaultTextStyle>
   <p:extLst>
     <p:ext uri="{EFAFB233-063F-42B5-8137-9DF3F51BA10A}">
-      <p15:sldGuideLst>
+      <p15:sldGuideLst xmlns:p15="http://schemas.microsoft.com/office/powerpoint/2012/main">
         <p15:guide id="1" orient="horz" pos="1620">
           <p15:clr>
             <a:srgbClr val="A4A3A4"/>
@@ -267,11 +267,16 @@
 </file>
 
 <file path=ppt/notesMasters/notesMaster1.xml><?xml version="1.0" encoding="utf-8"?>
-<p:notesMaster xmlns:a="http://schemas.openxmlformats.org/drawingml/2006/main" xmlns:r="http://schemas.openxmlformats.org/officeDocument/2006/relationships" xmlns:mc="http://schemas.openxmlformats.org/markup-compatibility/2006" xmlns:mv="urn:schemas-microsoft-com:mac:vml" xmlns:p="http://schemas.openxmlformats.org/presentationml/2006/main" xmlns:c="http://schemas.openxmlformats.org/drawingml/2006/chart" xmlns:dgm="http://schemas.openxmlformats.org/drawingml/2006/diagram" xmlns:o="urn:schemas-microsoft-com:office:office" xmlns:v="urn:schemas-microsoft-com:vml" xmlns:pvml="urn:schemas-microsoft-com:office:powerpoint" xmlns:com="http://schemas.openxmlformats.org/drawingml/2006/compatibility" xmlns:p14="http://schemas.microsoft.com/office/powerpoint/2010/main" xmlns:p15="http://schemas.microsoft.com/office/powerpoint/2012/main" xmlns:ahyp="http://schemas.microsoft.com/office/drawing/2018/hyperlinkcolor">
+<p:notesMaster xmlns:a="http://schemas.openxmlformats.org/drawingml/2006/main" xmlns:r="http://schemas.openxmlformats.org/officeDocument/2006/relationships" xmlns:p="http://schemas.openxmlformats.org/presentationml/2006/main">
   <p:cSld>
+    <p:bg>
+      <p:bgRef idx="1001">
+        <a:schemeClr val="bg1"/>
+      </p:bgRef>
+    </p:bg>
     <p:spTree>
       <p:nvGrpSpPr>
-        <p:cNvPr id="2" name="Shape 2"/>
+        <p:cNvPr id="1" name="Shape 2"/>
         <p:cNvGrpSpPr/>
         <p:nvPr/>
       </p:nvGrpSpPr>
@@ -286,9 +291,11 @@
       <p:sp>
         <p:nvSpPr>
           <p:cNvPr id="3" name="Google Shape;3;n"/>
-          <p:cNvSpPr/>
+          <p:cNvSpPr>
+            <a:spLocks noGrp="1" noRot="1" noChangeAspect="1"/>
+          </p:cNvSpPr>
           <p:nvPr>
-            <p:ph idx="2" type="sldImg"/>
+            <p:ph type="sldImg" idx="2"/>
           </p:nvPr>
         </p:nvSpPr>
         <p:spPr>
@@ -297,9 +304,13 @@
             <a:ext cx="6096075" cy="3429000"/>
           </a:xfrm>
           <a:custGeom>
-            <a:rect b="b" l="l" r="r" t="t"/>
+            <a:avLst/>
+            <a:gdLst/>
+            <a:ahLst/>
+            <a:cxnLst/>
+            <a:rect l="l" t="t" r="r" b="b"/>
             <a:pathLst>
-              <a:path extrusionOk="0" h="120000" w="120000">
+              <a:path w="120000" h="120000" extrusionOk="0">
                 <a:moveTo>
                   <a:pt x="0" y="0"/>
                 </a:moveTo>
@@ -317,23 +328,25 @@
             </a:pathLst>
           </a:custGeom>
           <a:noFill/>
-          <a:ln cap="flat" cmpd="sng" w="9525">
+          <a:ln w="9525" cap="flat" cmpd="sng">
             <a:solidFill>
               <a:srgbClr val="000000"/>
             </a:solidFill>
             <a:prstDash val="solid"/>
             <a:round/>
-            <a:headEnd len="sm" w="sm" type="none"/>
-            <a:tailEnd len="sm" w="sm" type="none"/>
+            <a:headEnd type="none" w="sm" len="sm"/>
+            <a:tailEnd type="none" w="sm" len="sm"/>
           </a:ln>
         </p:spPr>
       </p:sp>
       <p:sp>
         <p:nvSpPr>
           <p:cNvPr id="4" name="Google Shape;4;n"/>
-          <p:cNvSpPr txBox="1"/>
+          <p:cNvSpPr txBox="1">
+            <a:spLocks noGrp="1"/>
+          </p:cNvSpPr>
           <p:nvPr>
-            <p:ph idx="1" type="body"/>
+            <p:ph type="body" idx="1"/>
           </p:nvPr>
         </p:nvSpPr>
         <p:spPr>
@@ -350,11 +363,11 @@
           </a:ln>
         </p:spPr>
         <p:txBody>
-          <a:bodyPr anchorCtr="0" anchor="t" bIns="91425" lIns="91425" spcFirstLastPara="1" rIns="91425" wrap="square" tIns="91425">
+          <a:bodyPr spcFirstLastPara="1" wrap="square" lIns="91425" tIns="91425" rIns="91425" bIns="91425" anchor="t" anchorCtr="0">
             <a:noAutofit/>
           </a:bodyPr>
           <a:lstStyle>
-            <a:lvl1pPr indent="-298450" lvl="0" marL="457200">
+            <a:lvl1pPr marL="457200" lvl="0" indent="-298450">
               <a:spcBef>
                 <a:spcPts val="0"/>
               </a:spcBef>
@@ -365,7 +378,7 @@
               <a:buChar char="●"/>
               <a:defRPr sz="1100"/>
             </a:lvl1pPr>
-            <a:lvl2pPr indent="-298450" lvl="1" marL="914400">
+            <a:lvl2pPr marL="914400" lvl="1" indent="-298450">
               <a:spcBef>
                 <a:spcPts val="0"/>
               </a:spcBef>
@@ -376,7 +389,7 @@
               <a:buChar char="○"/>
               <a:defRPr sz="1100"/>
             </a:lvl2pPr>
-            <a:lvl3pPr indent="-298450" lvl="2" marL="1371600">
+            <a:lvl3pPr marL="1371600" lvl="2" indent="-298450">
               <a:spcBef>
                 <a:spcPts val="0"/>
               </a:spcBef>
@@ -387,7 +400,7 @@
               <a:buChar char="■"/>
               <a:defRPr sz="1100"/>
             </a:lvl3pPr>
-            <a:lvl4pPr indent="-298450" lvl="3" marL="1828800">
+            <a:lvl4pPr marL="1828800" lvl="3" indent="-298450">
               <a:spcBef>
                 <a:spcPts val="0"/>
               </a:spcBef>
@@ -398,7 +411,7 @@
               <a:buChar char="●"/>
               <a:defRPr sz="1100"/>
             </a:lvl4pPr>
-            <a:lvl5pPr indent="-298450" lvl="4" marL="2286000">
+            <a:lvl5pPr marL="2286000" lvl="4" indent="-298450">
               <a:spcBef>
                 <a:spcPts val="0"/>
               </a:spcBef>
@@ -409,7 +422,7 @@
               <a:buChar char="○"/>
               <a:defRPr sz="1100"/>
             </a:lvl5pPr>
-            <a:lvl6pPr indent="-298450" lvl="5" marL="2743200">
+            <a:lvl6pPr marL="2743200" lvl="5" indent="-298450">
               <a:spcBef>
                 <a:spcPts val="0"/>
               </a:spcBef>
@@ -420,7 +433,7 @@
               <a:buChar char="■"/>
               <a:defRPr sz="1100"/>
             </a:lvl6pPr>
-            <a:lvl7pPr indent="-298450" lvl="6" marL="3200400">
+            <a:lvl7pPr marL="3200400" lvl="6" indent="-298450">
               <a:spcBef>
                 <a:spcPts val="0"/>
               </a:spcBef>
@@ -431,7 +444,7 @@
               <a:buChar char="●"/>
               <a:defRPr sz="1100"/>
             </a:lvl7pPr>
-            <a:lvl8pPr indent="-298450" lvl="7" marL="3657600">
+            <a:lvl8pPr marL="3657600" lvl="7" indent="-298450">
               <a:spcBef>
                 <a:spcPts val="0"/>
               </a:spcBef>
@@ -442,7 +455,7 @@
               <a:buChar char="○"/>
               <a:defRPr sz="1100"/>
             </a:lvl8pPr>
-            <a:lvl9pPr indent="-298450" lvl="8" marL="4114800">
+            <a:lvl9pPr marL="4114800" lvl="8" indent="-298450">
               <a:spcBef>
                 <a:spcPts val="0"/>
               </a:spcBef>
@@ -454,14 +467,16 @@
               <a:defRPr sz="1100"/>
             </a:lvl9pPr>
           </a:lstStyle>
-          <a:p/>
+          <a:p>
+            <a:endParaRPr/>
+          </a:p>
         </p:txBody>
       </p:sp>
     </p:spTree>
   </p:cSld>
-  <p:clrMap accent1="accent1" accent2="accent2" accent3="accent3" accent4="accent4" accent5="accent5" accent6="accent6" bg1="lt1" bg2="dk2" tx1="dk1" tx2="lt2" folHlink="folHlink" hlink="hlink"/>
+  <p:clrMap bg1="lt1" tx1="dk1" bg2="dk2" tx2="lt2" accent1="accent1" accent2="accent2" accent3="accent3" accent4="accent4" accent5="accent5" accent6="accent6" hlink="hlink" folHlink="folHlink"/>
   <p:notesStyle>
-    <a:defPPr lvl="0" marR="0" rtl="0" algn="l">
+    <a:defPPr marR="0" lvl="0" algn="l" rtl="0">
       <a:lnSpc>
         <a:spcPct val="100000"/>
       </a:lnSpc>
@@ -472,7 +487,7 @@
         <a:spcPts val="0"/>
       </a:spcAft>
     </a:defPPr>
-    <a:lvl1pPr lvl="0" marR="0" rtl="0" algn="l">
+    <a:lvl1pPr marR="0" lvl="0" algn="l" rtl="0">
       <a:lnSpc>
         <a:spcPct val="100000"/>
       </a:lnSpc>
@@ -486,7 +501,7 @@
         <a:srgbClr val="000000"/>
       </a:buClr>
       <a:buFont typeface="Arial"/>
-      <a:defRPr b="0" i="0" sz="1400" u="none" cap="none" strike="noStrike">
+      <a:defRPr sz="1400" b="0" i="0" u="none" strike="noStrike" cap="none">
         <a:solidFill>
           <a:srgbClr val="000000"/>
         </a:solidFill>
@@ -496,7 +511,7 @@
         <a:sym typeface="Arial"/>
       </a:defRPr>
     </a:lvl1pPr>
-    <a:lvl2pPr lvl="1" marR="0" rtl="0" algn="l">
+    <a:lvl2pPr marR="0" lvl="1" algn="l" rtl="0">
       <a:lnSpc>
         <a:spcPct val="100000"/>
       </a:lnSpc>
@@ -510,7 +525,7 @@
         <a:srgbClr val="000000"/>
       </a:buClr>
       <a:buFont typeface="Arial"/>
-      <a:defRPr b="0" i="0" sz="1400" u="none" cap="none" strike="noStrike">
+      <a:defRPr sz="1400" b="0" i="0" u="none" strike="noStrike" cap="none">
         <a:solidFill>
           <a:srgbClr val="000000"/>
         </a:solidFill>
@@ -520,7 +535,7 @@
         <a:sym typeface="Arial"/>
       </a:defRPr>
     </a:lvl2pPr>
-    <a:lvl3pPr lvl="2" marR="0" rtl="0" algn="l">
+    <a:lvl3pPr marR="0" lvl="2" algn="l" rtl="0">
       <a:lnSpc>
         <a:spcPct val="100000"/>
       </a:lnSpc>
@@ -534,7 +549,7 @@
         <a:srgbClr val="000000"/>
       </a:buClr>
       <a:buFont typeface="Arial"/>
-      <a:defRPr b="0" i="0" sz="1400" u="none" cap="none" strike="noStrike">
+      <a:defRPr sz="1400" b="0" i="0" u="none" strike="noStrike" cap="none">
         <a:solidFill>
           <a:srgbClr val="000000"/>
         </a:solidFill>
@@ -544,7 +559,7 @@
         <a:sym typeface="Arial"/>
       </a:defRPr>
     </a:lvl3pPr>
-    <a:lvl4pPr lvl="3" marR="0" rtl="0" algn="l">
+    <a:lvl4pPr marR="0" lvl="3" algn="l" rtl="0">
       <a:lnSpc>
         <a:spcPct val="100000"/>
       </a:lnSpc>
@@ -558,7 +573,7 @@
         <a:srgbClr val="000000"/>
       </a:buClr>
       <a:buFont typeface="Arial"/>
-      <a:defRPr b="0" i="0" sz="1400" u="none" cap="none" strike="noStrike">
+      <a:defRPr sz="1400" b="0" i="0" u="none" strike="noStrike" cap="none">
         <a:solidFill>
           <a:srgbClr val="000000"/>
         </a:solidFill>
@@ -568,7 +583,7 @@
         <a:sym typeface="Arial"/>
       </a:defRPr>
     </a:lvl4pPr>
-    <a:lvl5pPr lvl="4" marR="0" rtl="0" algn="l">
+    <a:lvl5pPr marR="0" lvl="4" algn="l" rtl="0">
       <a:lnSpc>
         <a:spcPct val="100000"/>
       </a:lnSpc>
@@ -582,7 +597,7 @@
         <a:srgbClr val="000000"/>
       </a:buClr>
       <a:buFont typeface="Arial"/>
-      <a:defRPr b="0" i="0" sz="1400" u="none" cap="none" strike="noStrike">
+      <a:defRPr sz="1400" b="0" i="0" u="none" strike="noStrike" cap="none">
         <a:solidFill>
           <a:srgbClr val="000000"/>
         </a:solidFill>
@@ -592,7 +607,7 @@
         <a:sym typeface="Arial"/>
       </a:defRPr>
     </a:lvl5pPr>
-    <a:lvl6pPr lvl="5" marR="0" rtl="0" algn="l">
+    <a:lvl6pPr marR="0" lvl="5" algn="l" rtl="0">
       <a:lnSpc>
         <a:spcPct val="100000"/>
       </a:lnSpc>
@@ -606,7 +621,7 @@
         <a:srgbClr val="000000"/>
       </a:buClr>
       <a:buFont typeface="Arial"/>
-      <a:defRPr b="0" i="0" sz="1400" u="none" cap="none" strike="noStrike">
+      <a:defRPr sz="1400" b="0" i="0" u="none" strike="noStrike" cap="none">
         <a:solidFill>
           <a:srgbClr val="000000"/>
         </a:solidFill>
@@ -616,7 +631,7 @@
         <a:sym typeface="Arial"/>
       </a:defRPr>
     </a:lvl6pPr>
-    <a:lvl7pPr lvl="6" marR="0" rtl="0" algn="l">
+    <a:lvl7pPr marR="0" lvl="6" algn="l" rtl="0">
       <a:lnSpc>
         <a:spcPct val="100000"/>
       </a:lnSpc>
@@ -630,7 +645,7 @@
         <a:srgbClr val="000000"/>
       </a:buClr>
       <a:buFont typeface="Arial"/>
-      <a:defRPr b="0" i="0" sz="1400" u="none" cap="none" strike="noStrike">
+      <a:defRPr sz="1400" b="0" i="0" u="none" strike="noStrike" cap="none">
         <a:solidFill>
           <a:srgbClr val="000000"/>
         </a:solidFill>
@@ -640,7 +655,7 @@
         <a:sym typeface="Arial"/>
       </a:defRPr>
     </a:lvl7pPr>
-    <a:lvl8pPr lvl="7" marR="0" rtl="0" algn="l">
+    <a:lvl8pPr marR="0" lvl="7" algn="l" rtl="0">
       <a:lnSpc>
         <a:spcPct val="100000"/>
       </a:lnSpc>
@@ -654,7 +669,7 @@
         <a:srgbClr val="000000"/>
       </a:buClr>
       <a:buFont typeface="Arial"/>
-      <a:defRPr b="0" i="0" sz="1400" u="none" cap="none" strike="noStrike">
+      <a:defRPr sz="1400" b="0" i="0" u="none" strike="noStrike" cap="none">
         <a:solidFill>
           <a:srgbClr val="000000"/>
         </a:solidFill>
@@ -664,7 +679,7 @@
         <a:sym typeface="Arial"/>
       </a:defRPr>
     </a:lvl8pPr>
-    <a:lvl9pPr lvl="8" marR="0" rtl="0" algn="l">
+    <a:lvl9pPr marR="0" lvl="8" algn="l" rtl="0">
       <a:lnSpc>
         <a:spcPct val="100000"/>
       </a:lnSpc>
@@ -678,7 +693,7 @@
         <a:srgbClr val="000000"/>
       </a:buClr>
       <a:buFont typeface="Arial"/>
-      <a:defRPr b="0" i="0" sz="1400" u="none" cap="none" strike="noStrike">
+      <a:defRPr sz="1400" b="0" i="0" u="none" strike="noStrike" cap="none">
         <a:solidFill>
           <a:srgbClr val="000000"/>
         </a:solidFill>
@@ -693,11 +708,11 @@
 </file>
 
 <file path=ppt/notesSlides/notesSlide1.xml><?xml version="1.0" encoding="utf-8"?>
-<p:notes xmlns:a="http://schemas.openxmlformats.org/drawingml/2006/main" xmlns:r="http://schemas.openxmlformats.org/officeDocument/2006/relationships" xmlns:mc="http://schemas.openxmlformats.org/markup-compatibility/2006" xmlns:mv="urn:schemas-microsoft-com:mac:vml" xmlns:p="http://schemas.openxmlformats.org/presentationml/2006/main" xmlns:c="http://schemas.openxmlformats.org/drawingml/2006/chart" xmlns:dgm="http://schemas.openxmlformats.org/drawingml/2006/diagram" xmlns:o="urn:schemas-microsoft-com:office:office" xmlns:v="urn:schemas-microsoft-com:vml" xmlns:pvml="urn:schemas-microsoft-com:office:powerpoint" xmlns:com="http://schemas.openxmlformats.org/drawingml/2006/compatibility" xmlns:p14="http://schemas.microsoft.com/office/powerpoint/2010/main" xmlns:p15="http://schemas.microsoft.com/office/powerpoint/2012/main" xmlns:ahyp="http://schemas.microsoft.com/office/drawing/2018/hyperlinkcolor" showMasterPhAnim="0" showMasterSp="0">
+<p:notes xmlns:a="http://schemas.openxmlformats.org/drawingml/2006/main" xmlns:r="http://schemas.openxmlformats.org/officeDocument/2006/relationships" xmlns:p="http://schemas.openxmlformats.org/presentationml/2006/main" showMasterSp="0" showMasterPhAnim="0">
   <p:cSld>
     <p:spTree>
       <p:nvGrpSpPr>
-        <p:cNvPr id="50" name="Shape 50"/>
+        <p:cNvPr id="1" name="Shape 50"/>
         <p:cNvGrpSpPr/>
         <p:nvPr/>
       </p:nvGrpSpPr>
@@ -712,20 +727,26 @@
       <p:sp>
         <p:nvSpPr>
           <p:cNvPr id="51" name="Google Shape;51;p:notes"/>
-          <p:cNvSpPr/>
+          <p:cNvSpPr>
+            <a:spLocks noGrp="1" noRot="1" noChangeAspect="1"/>
+          </p:cNvSpPr>
           <p:nvPr>
-            <p:ph idx="2" type="sldImg"/>
+            <p:ph type="sldImg" idx="2"/>
           </p:nvPr>
         </p:nvSpPr>
         <p:spPr>
           <a:xfrm>
-            <a:off x="381300" y="685800"/>
-            <a:ext cx="6096075" cy="3429000"/>
+            <a:off x="381000" y="685800"/>
+            <a:ext cx="6096000" cy="3429000"/>
           </a:xfrm>
           <a:custGeom>
-            <a:rect b="b" l="l" r="r" t="t"/>
+            <a:avLst/>
+            <a:gdLst/>
+            <a:ahLst/>
+            <a:cxnLst/>
+            <a:rect l="l" t="t" r="r" b="b"/>
             <a:pathLst>
-              <a:path extrusionOk="0" h="120000" w="120000">
+              <a:path w="120000" h="120000" extrusionOk="0">
                 <a:moveTo>
                   <a:pt x="0" y="0"/>
                 </a:moveTo>
@@ -747,9 +768,11 @@
       <p:sp>
         <p:nvSpPr>
           <p:cNvPr id="52" name="Google Shape;52;p:notes"/>
-          <p:cNvSpPr txBox="1"/>
+          <p:cNvSpPr txBox="1">
+            <a:spLocks noGrp="1"/>
+          </p:cNvSpPr>
           <p:nvPr>
-            <p:ph idx="1" type="body"/>
+            <p:ph type="body" idx="1"/>
           </p:nvPr>
         </p:nvSpPr>
         <p:spPr>
@@ -762,12 +785,12 @@
           </a:prstGeom>
         </p:spPr>
         <p:txBody>
-          <a:bodyPr anchorCtr="0" anchor="t" bIns="91425" lIns="91425" spcFirstLastPara="1" rIns="91425" wrap="square" tIns="91425">
+          <a:bodyPr spcFirstLastPara="1" wrap="square" lIns="91425" tIns="91425" rIns="91425" bIns="91425" anchor="t" anchorCtr="0">
             <a:noAutofit/>
           </a:bodyPr>
           <a:lstStyle/>
           <a:p>
-            <a:pPr indent="0" lvl="0" marL="0" rtl="0" algn="l">
+            <a:pPr marL="0" lvl="0" indent="0" algn="l" rtl="0">
               <a:spcBef>
                 <a:spcPts val="0"/>
               </a:spcBef>
@@ -776,9 +799,6 @@
               </a:spcAft>
               <a:buNone/>
             </a:pPr>
-            <a:r>
-              <a:t/>
-            </a:r>
             <a:endParaRPr/>
           </a:p>
         </p:txBody>
@@ -792,11 +812,11 @@
 </file>
 
 <file path=ppt/notesSlides/notesSlide2.xml><?xml version="1.0" encoding="utf-8"?>
-<p:notes xmlns:a="http://schemas.openxmlformats.org/drawingml/2006/main" xmlns:r="http://schemas.openxmlformats.org/officeDocument/2006/relationships" xmlns:mc="http://schemas.openxmlformats.org/markup-compatibility/2006" xmlns:mv="urn:schemas-microsoft-com:mac:vml" xmlns:p="http://schemas.openxmlformats.org/presentationml/2006/main" xmlns:c="http://schemas.openxmlformats.org/drawingml/2006/chart" xmlns:dgm="http://schemas.openxmlformats.org/drawingml/2006/diagram" xmlns:o="urn:schemas-microsoft-com:office:office" xmlns:v="urn:schemas-microsoft-com:vml" xmlns:pvml="urn:schemas-microsoft-com:office:powerpoint" xmlns:com="http://schemas.openxmlformats.org/drawingml/2006/compatibility" xmlns:p14="http://schemas.microsoft.com/office/powerpoint/2010/main" xmlns:p15="http://schemas.microsoft.com/office/powerpoint/2012/main" xmlns:ahyp="http://schemas.microsoft.com/office/drawing/2018/hyperlinkcolor" showMasterPhAnim="0" showMasterSp="0">
+<p:notes xmlns:a="http://schemas.openxmlformats.org/drawingml/2006/main" xmlns:r="http://schemas.openxmlformats.org/officeDocument/2006/relationships" xmlns:p="http://schemas.openxmlformats.org/presentationml/2006/main" showMasterSp="0" showMasterPhAnim="0">
   <p:cSld>
     <p:spTree>
       <p:nvGrpSpPr>
-        <p:cNvPr id="56" name="Shape 56"/>
+        <p:cNvPr id="1" name="Shape 56"/>
         <p:cNvGrpSpPr/>
         <p:nvPr/>
       </p:nvGrpSpPr>
@@ -811,20 +831,26 @@
       <p:sp>
         <p:nvSpPr>
           <p:cNvPr id="57" name="Google Shape;57;g1338a4bfd9d_0_0:notes"/>
-          <p:cNvSpPr/>
+          <p:cNvSpPr>
+            <a:spLocks noGrp="1" noRot="1" noChangeAspect="1"/>
+          </p:cNvSpPr>
           <p:nvPr>
-            <p:ph idx="2" type="sldImg"/>
+            <p:ph type="sldImg" idx="2"/>
           </p:nvPr>
         </p:nvSpPr>
         <p:spPr>
           <a:xfrm>
-            <a:off x="381300" y="685800"/>
+            <a:off x="381000" y="685800"/>
             <a:ext cx="6096000" cy="3429000"/>
           </a:xfrm>
           <a:custGeom>
-            <a:rect b="b" l="l" r="r" t="t"/>
+            <a:avLst/>
+            <a:gdLst/>
+            <a:ahLst/>
+            <a:cxnLst/>
+            <a:rect l="l" t="t" r="r" b="b"/>
             <a:pathLst>
-              <a:path extrusionOk="0" h="120000" w="120000">
+              <a:path w="120000" h="120000" extrusionOk="0">
                 <a:moveTo>
                   <a:pt x="0" y="0"/>
                 </a:moveTo>
@@ -846,9 +872,11 @@
       <p:sp>
         <p:nvSpPr>
           <p:cNvPr id="58" name="Google Shape;58;g1338a4bfd9d_0_0:notes"/>
-          <p:cNvSpPr txBox="1"/>
+          <p:cNvSpPr txBox="1">
+            <a:spLocks noGrp="1"/>
+          </p:cNvSpPr>
           <p:nvPr>
-            <p:ph idx="1" type="body"/>
+            <p:ph type="body" idx="1"/>
           </p:nvPr>
         </p:nvSpPr>
         <p:spPr>
@@ -861,12 +889,12 @@
           </a:prstGeom>
         </p:spPr>
         <p:txBody>
-          <a:bodyPr anchorCtr="0" anchor="t" bIns="91425" lIns="91425" spcFirstLastPara="1" rIns="91425" wrap="square" tIns="91425">
+          <a:bodyPr spcFirstLastPara="1" wrap="square" lIns="91425" tIns="91425" rIns="91425" bIns="91425" anchor="t" anchorCtr="0">
             <a:noAutofit/>
           </a:bodyPr>
           <a:lstStyle/>
           <a:p>
-            <a:pPr indent="0" lvl="0" marL="0" rtl="0" algn="l">
+            <a:pPr marL="0" lvl="0" indent="0" algn="l" rtl="0">
               <a:spcBef>
                 <a:spcPts val="0"/>
               </a:spcBef>
@@ -875,9 +903,6 @@
               </a:spcAft>
               <a:buNone/>
             </a:pPr>
-            <a:r>
-              <a:t/>
-            </a:r>
             <a:endParaRPr/>
           </a:p>
         </p:txBody>
@@ -891,11 +916,11 @@
 </file>
 
 <file path=ppt/notesSlides/notesSlide3.xml><?xml version="1.0" encoding="utf-8"?>
-<p:notes xmlns:a="http://schemas.openxmlformats.org/drawingml/2006/main" xmlns:r="http://schemas.openxmlformats.org/officeDocument/2006/relationships" xmlns:mc="http://schemas.openxmlformats.org/markup-compatibility/2006" xmlns:mv="urn:schemas-microsoft-com:mac:vml" xmlns:p="http://schemas.openxmlformats.org/presentationml/2006/main" xmlns:c="http://schemas.openxmlformats.org/drawingml/2006/chart" xmlns:dgm="http://schemas.openxmlformats.org/drawingml/2006/diagram" xmlns:o="urn:schemas-microsoft-com:office:office" xmlns:v="urn:schemas-microsoft-com:vml" xmlns:pvml="urn:schemas-microsoft-com:office:powerpoint" xmlns:com="http://schemas.openxmlformats.org/drawingml/2006/compatibility" xmlns:p14="http://schemas.microsoft.com/office/powerpoint/2010/main" xmlns:p15="http://schemas.microsoft.com/office/powerpoint/2012/main" xmlns:ahyp="http://schemas.microsoft.com/office/drawing/2018/hyperlinkcolor" showMasterPhAnim="0" showMasterSp="0">
+<p:notes xmlns:a="http://schemas.openxmlformats.org/drawingml/2006/main" xmlns:r="http://schemas.openxmlformats.org/officeDocument/2006/relationships" xmlns:p="http://schemas.openxmlformats.org/presentationml/2006/main" showMasterSp="0" showMasterPhAnim="0">
   <p:cSld>
     <p:spTree>
       <p:nvGrpSpPr>
-        <p:cNvPr id="64" name="Shape 64"/>
+        <p:cNvPr id="1" name="Shape 64"/>
         <p:cNvGrpSpPr/>
         <p:nvPr/>
       </p:nvGrpSpPr>
@@ -910,20 +935,26 @@
       <p:sp>
         <p:nvSpPr>
           <p:cNvPr id="65" name="Google Shape;65;g1338a4bfd9d_0_5:notes"/>
-          <p:cNvSpPr/>
+          <p:cNvSpPr>
+            <a:spLocks noGrp="1" noRot="1" noChangeAspect="1"/>
+          </p:cNvSpPr>
           <p:nvPr>
-            <p:ph idx="2" type="sldImg"/>
+            <p:ph type="sldImg" idx="2"/>
           </p:nvPr>
         </p:nvSpPr>
         <p:spPr>
           <a:xfrm>
-            <a:off x="381300" y="685800"/>
+            <a:off x="381000" y="685800"/>
             <a:ext cx="6096000" cy="3429000"/>
           </a:xfrm>
           <a:custGeom>
-            <a:rect b="b" l="l" r="r" t="t"/>
+            <a:avLst/>
+            <a:gdLst/>
+            <a:ahLst/>
+            <a:cxnLst/>
+            <a:rect l="l" t="t" r="r" b="b"/>
             <a:pathLst>
-              <a:path extrusionOk="0" h="120000" w="120000">
+              <a:path w="120000" h="120000" extrusionOk="0">
                 <a:moveTo>
                   <a:pt x="0" y="0"/>
                 </a:moveTo>
@@ -945,9 +976,11 @@
       <p:sp>
         <p:nvSpPr>
           <p:cNvPr id="66" name="Google Shape;66;g1338a4bfd9d_0_5:notes"/>
-          <p:cNvSpPr txBox="1"/>
+          <p:cNvSpPr txBox="1">
+            <a:spLocks noGrp="1"/>
+          </p:cNvSpPr>
           <p:nvPr>
-            <p:ph idx="1" type="body"/>
+            <p:ph type="body" idx="1"/>
           </p:nvPr>
         </p:nvSpPr>
         <p:spPr>
@@ -960,12 +993,12 @@
           </a:prstGeom>
         </p:spPr>
         <p:txBody>
-          <a:bodyPr anchorCtr="0" anchor="t" bIns="91425" lIns="91425" spcFirstLastPara="1" rIns="91425" wrap="square" tIns="91425">
+          <a:bodyPr spcFirstLastPara="1" wrap="square" lIns="91425" tIns="91425" rIns="91425" bIns="91425" anchor="t" anchorCtr="0">
             <a:noAutofit/>
           </a:bodyPr>
           <a:lstStyle/>
           <a:p>
-            <a:pPr indent="0" lvl="0" marL="0" rtl="0" algn="l">
+            <a:pPr marL="0" lvl="0" indent="0" algn="l" rtl="0">
               <a:spcBef>
                 <a:spcPts val="0"/>
               </a:spcBef>
@@ -974,9 +1007,6 @@
               </a:spcAft>
               <a:buNone/>
             </a:pPr>
-            <a:r>
-              <a:t/>
-            </a:r>
             <a:endParaRPr/>
           </a:p>
         </p:txBody>
@@ -990,11 +1020,11 @@
 </file>
 
 <file path=ppt/notesSlides/notesSlide4.xml><?xml version="1.0" encoding="utf-8"?>
-<p:notes xmlns:a="http://schemas.openxmlformats.org/drawingml/2006/main" xmlns:r="http://schemas.openxmlformats.org/officeDocument/2006/relationships" xmlns:mc="http://schemas.openxmlformats.org/markup-compatibility/2006" xmlns:mv="urn:schemas-microsoft-com:mac:vml" xmlns:p="http://schemas.openxmlformats.org/presentationml/2006/main" xmlns:c="http://schemas.openxmlformats.org/drawingml/2006/chart" xmlns:dgm="http://schemas.openxmlformats.org/drawingml/2006/diagram" xmlns:o="urn:schemas-microsoft-com:office:office" xmlns:v="urn:schemas-microsoft-com:vml" xmlns:pvml="urn:schemas-microsoft-com:office:powerpoint" xmlns:com="http://schemas.openxmlformats.org/drawingml/2006/compatibility" xmlns:p14="http://schemas.microsoft.com/office/powerpoint/2010/main" xmlns:p15="http://schemas.microsoft.com/office/powerpoint/2012/main" xmlns:ahyp="http://schemas.microsoft.com/office/drawing/2018/hyperlinkcolor" showMasterPhAnim="0" showMasterSp="0">
+<p:notes xmlns:a="http://schemas.openxmlformats.org/drawingml/2006/main" xmlns:r="http://schemas.openxmlformats.org/officeDocument/2006/relationships" xmlns:p="http://schemas.openxmlformats.org/presentationml/2006/main" showMasterSp="0" showMasterPhAnim="0">
   <p:cSld>
     <p:spTree>
       <p:nvGrpSpPr>
-        <p:cNvPr id="71" name="Shape 71"/>
+        <p:cNvPr id="1" name="Shape 71"/>
         <p:cNvGrpSpPr/>
         <p:nvPr/>
       </p:nvGrpSpPr>
@@ -1009,20 +1039,26 @@
       <p:sp>
         <p:nvSpPr>
           <p:cNvPr id="72" name="Google Shape;72;g1338a4bfd9d_0_10:notes"/>
-          <p:cNvSpPr/>
+          <p:cNvSpPr>
+            <a:spLocks noGrp="1" noRot="1" noChangeAspect="1"/>
+          </p:cNvSpPr>
           <p:nvPr>
-            <p:ph idx="2" type="sldImg"/>
+            <p:ph type="sldImg" idx="2"/>
           </p:nvPr>
         </p:nvSpPr>
         <p:spPr>
           <a:xfrm>
-            <a:off x="381300" y="685800"/>
+            <a:off x="381000" y="685800"/>
             <a:ext cx="6096000" cy="3429000"/>
           </a:xfrm>
           <a:custGeom>
-            <a:rect b="b" l="l" r="r" t="t"/>
+            <a:avLst/>
+            <a:gdLst/>
+            <a:ahLst/>
+            <a:cxnLst/>
+            <a:rect l="l" t="t" r="r" b="b"/>
             <a:pathLst>
-              <a:path extrusionOk="0" h="120000" w="120000">
+              <a:path w="120000" h="120000" extrusionOk="0">
                 <a:moveTo>
                   <a:pt x="0" y="0"/>
                 </a:moveTo>
@@ -1044,9 +1080,11 @@
       <p:sp>
         <p:nvSpPr>
           <p:cNvPr id="73" name="Google Shape;73;g1338a4bfd9d_0_10:notes"/>
-          <p:cNvSpPr txBox="1"/>
+          <p:cNvSpPr txBox="1">
+            <a:spLocks noGrp="1"/>
+          </p:cNvSpPr>
           <p:nvPr>
-            <p:ph idx="1" type="body"/>
+            <p:ph type="body" idx="1"/>
           </p:nvPr>
         </p:nvSpPr>
         <p:spPr>
@@ -1059,12 +1097,12 @@
           </a:prstGeom>
         </p:spPr>
         <p:txBody>
-          <a:bodyPr anchorCtr="0" anchor="t" bIns="91425" lIns="91425" spcFirstLastPara="1" rIns="91425" wrap="square" tIns="91425">
+          <a:bodyPr spcFirstLastPara="1" wrap="square" lIns="91425" tIns="91425" rIns="91425" bIns="91425" anchor="t" anchorCtr="0">
             <a:noAutofit/>
           </a:bodyPr>
           <a:lstStyle/>
           <a:p>
-            <a:pPr indent="0" lvl="0" marL="0" rtl="0" algn="l">
+            <a:pPr marL="0" lvl="0" indent="0" algn="l" rtl="0">
               <a:spcBef>
                 <a:spcPts val="0"/>
               </a:spcBef>
@@ -1073,9 +1111,6 @@
               </a:spcAft>
               <a:buNone/>
             </a:pPr>
-            <a:r>
-              <a:t/>
-            </a:r>
             <a:endParaRPr/>
           </a:p>
         </p:txBody>
@@ -1089,11 +1124,11 @@
 </file>
 
 <file path=ppt/notesSlides/notesSlide5.xml><?xml version="1.0" encoding="utf-8"?>
-<p:notes xmlns:a="http://schemas.openxmlformats.org/drawingml/2006/main" xmlns:r="http://schemas.openxmlformats.org/officeDocument/2006/relationships" xmlns:mc="http://schemas.openxmlformats.org/markup-compatibility/2006" xmlns:mv="urn:schemas-microsoft-com:mac:vml" xmlns:p="http://schemas.openxmlformats.org/presentationml/2006/main" xmlns:c="http://schemas.openxmlformats.org/drawingml/2006/chart" xmlns:dgm="http://schemas.openxmlformats.org/drawingml/2006/diagram" xmlns:o="urn:schemas-microsoft-com:office:office" xmlns:v="urn:schemas-microsoft-com:vml" xmlns:pvml="urn:schemas-microsoft-com:office:powerpoint" xmlns:com="http://schemas.openxmlformats.org/drawingml/2006/compatibility" xmlns:p14="http://schemas.microsoft.com/office/powerpoint/2010/main" xmlns:p15="http://schemas.microsoft.com/office/powerpoint/2012/main" xmlns:ahyp="http://schemas.microsoft.com/office/drawing/2018/hyperlinkcolor" showMasterPhAnim="0" showMasterSp="0">
+<p:notes xmlns:a="http://schemas.openxmlformats.org/drawingml/2006/main" xmlns:r="http://schemas.openxmlformats.org/officeDocument/2006/relationships" xmlns:p="http://schemas.openxmlformats.org/presentationml/2006/main" showMasterSp="0" showMasterPhAnim="0">
   <p:cSld>
     <p:spTree>
       <p:nvGrpSpPr>
-        <p:cNvPr id="77" name="Shape 77"/>
+        <p:cNvPr id="1" name="Shape 77"/>
         <p:cNvGrpSpPr/>
         <p:nvPr/>
       </p:nvGrpSpPr>
@@ -1108,20 +1143,26 @@
       <p:sp>
         <p:nvSpPr>
           <p:cNvPr id="78" name="Google Shape;78;g1338a4bfd9d_0_17:notes"/>
-          <p:cNvSpPr/>
+          <p:cNvSpPr>
+            <a:spLocks noGrp="1" noRot="1" noChangeAspect="1"/>
+          </p:cNvSpPr>
           <p:nvPr>
-            <p:ph idx="2" type="sldImg"/>
+            <p:ph type="sldImg" idx="2"/>
           </p:nvPr>
         </p:nvSpPr>
         <p:spPr>
           <a:xfrm>
-            <a:off x="381300" y="685800"/>
+            <a:off x="381000" y="685800"/>
             <a:ext cx="6096000" cy="3429000"/>
           </a:xfrm>
           <a:custGeom>
-            <a:rect b="b" l="l" r="r" t="t"/>
+            <a:avLst/>
+            <a:gdLst/>
+            <a:ahLst/>
+            <a:cxnLst/>
+            <a:rect l="l" t="t" r="r" b="b"/>
             <a:pathLst>
-              <a:path extrusionOk="0" h="120000" w="120000">
+              <a:path w="120000" h="120000" extrusionOk="0">
                 <a:moveTo>
                   <a:pt x="0" y="0"/>
                 </a:moveTo>
@@ -1143,9 +1184,11 @@
       <p:sp>
         <p:nvSpPr>
           <p:cNvPr id="79" name="Google Shape;79;g1338a4bfd9d_0_17:notes"/>
-          <p:cNvSpPr txBox="1"/>
+          <p:cNvSpPr txBox="1">
+            <a:spLocks noGrp="1"/>
+          </p:cNvSpPr>
           <p:nvPr>
-            <p:ph idx="1" type="body"/>
+            <p:ph type="body" idx="1"/>
           </p:nvPr>
         </p:nvSpPr>
         <p:spPr>
@@ -1158,12 +1201,12 @@
           </a:prstGeom>
         </p:spPr>
         <p:txBody>
-          <a:bodyPr anchorCtr="0" anchor="t" bIns="91425" lIns="91425" spcFirstLastPara="1" rIns="91425" wrap="square" tIns="91425">
+          <a:bodyPr spcFirstLastPara="1" wrap="square" lIns="91425" tIns="91425" rIns="91425" bIns="91425" anchor="t" anchorCtr="0">
             <a:noAutofit/>
           </a:bodyPr>
           <a:lstStyle/>
           <a:p>
-            <a:pPr indent="0" lvl="0" marL="0" rtl="0" algn="l">
+            <a:pPr marL="0" lvl="0" indent="0" algn="l" rtl="0">
               <a:spcBef>
                 <a:spcPts val="0"/>
               </a:spcBef>
@@ -1172,9 +1215,6 @@
               </a:spcAft>
               <a:buNone/>
             </a:pPr>
-            <a:r>
-              <a:t/>
-            </a:r>
             <a:endParaRPr/>
           </a:p>
         </p:txBody>
@@ -1188,11 +1228,11 @@
 </file>
 
 <file path=ppt/notesSlides/notesSlide6.xml><?xml version="1.0" encoding="utf-8"?>
-<p:notes xmlns:a="http://schemas.openxmlformats.org/drawingml/2006/main" xmlns:r="http://schemas.openxmlformats.org/officeDocument/2006/relationships" xmlns:mc="http://schemas.openxmlformats.org/markup-compatibility/2006" xmlns:mv="urn:schemas-microsoft-com:mac:vml" xmlns:p="http://schemas.openxmlformats.org/presentationml/2006/main" xmlns:c="http://schemas.openxmlformats.org/drawingml/2006/chart" xmlns:dgm="http://schemas.openxmlformats.org/drawingml/2006/diagram" xmlns:o="urn:schemas-microsoft-com:office:office" xmlns:v="urn:schemas-microsoft-com:vml" xmlns:pvml="urn:schemas-microsoft-com:office:powerpoint" xmlns:com="http://schemas.openxmlformats.org/drawingml/2006/compatibility" xmlns:p14="http://schemas.microsoft.com/office/powerpoint/2010/main" xmlns:p15="http://schemas.microsoft.com/office/powerpoint/2012/main" xmlns:ahyp="http://schemas.microsoft.com/office/drawing/2018/hyperlinkcolor" showMasterPhAnim="0" showMasterSp="0">
+<p:notes xmlns:a="http://schemas.openxmlformats.org/drawingml/2006/main" xmlns:r="http://schemas.openxmlformats.org/officeDocument/2006/relationships" xmlns:p="http://schemas.openxmlformats.org/presentationml/2006/main" showMasterSp="0" showMasterPhAnim="0">
   <p:cSld>
     <p:spTree>
       <p:nvGrpSpPr>
-        <p:cNvPr id="83" name="Shape 83"/>
+        <p:cNvPr id="1" name="Shape 83"/>
         <p:cNvGrpSpPr/>
         <p:nvPr/>
       </p:nvGrpSpPr>
@@ -1207,20 +1247,26 @@
       <p:sp>
         <p:nvSpPr>
           <p:cNvPr id="84" name="Google Shape;84;g1338a4bfd9d_0_23:notes"/>
-          <p:cNvSpPr/>
+          <p:cNvSpPr>
+            <a:spLocks noGrp="1" noRot="1" noChangeAspect="1"/>
+          </p:cNvSpPr>
           <p:nvPr>
-            <p:ph idx="2" type="sldImg"/>
+            <p:ph type="sldImg" idx="2"/>
           </p:nvPr>
         </p:nvSpPr>
         <p:spPr>
           <a:xfrm>
-            <a:off x="381300" y="685800"/>
+            <a:off x="381000" y="685800"/>
             <a:ext cx="6096000" cy="3429000"/>
           </a:xfrm>
           <a:custGeom>
-            <a:rect b="b" l="l" r="r" t="t"/>
+            <a:avLst/>
+            <a:gdLst/>
+            <a:ahLst/>
+            <a:cxnLst/>
+            <a:rect l="l" t="t" r="r" b="b"/>
             <a:pathLst>
-              <a:path extrusionOk="0" h="120000" w="120000">
+              <a:path w="120000" h="120000" extrusionOk="0">
                 <a:moveTo>
                   <a:pt x="0" y="0"/>
                 </a:moveTo>
@@ -1242,9 +1288,11 @@
       <p:sp>
         <p:nvSpPr>
           <p:cNvPr id="85" name="Google Shape;85;g1338a4bfd9d_0_23:notes"/>
-          <p:cNvSpPr txBox="1"/>
+          <p:cNvSpPr txBox="1">
+            <a:spLocks noGrp="1"/>
+          </p:cNvSpPr>
           <p:nvPr>
-            <p:ph idx="1" type="body"/>
+            <p:ph type="body" idx="1"/>
           </p:nvPr>
         </p:nvSpPr>
         <p:spPr>
@@ -1257,12 +1305,12 @@
           </a:prstGeom>
         </p:spPr>
         <p:txBody>
-          <a:bodyPr anchorCtr="0" anchor="t" bIns="91425" lIns="91425" spcFirstLastPara="1" rIns="91425" wrap="square" tIns="91425">
+          <a:bodyPr spcFirstLastPara="1" wrap="square" lIns="91425" tIns="91425" rIns="91425" bIns="91425" anchor="t" anchorCtr="0">
             <a:noAutofit/>
           </a:bodyPr>
           <a:lstStyle/>
           <a:p>
-            <a:pPr indent="0" lvl="0" marL="0" rtl="0" algn="l">
+            <a:pPr marL="0" lvl="0" indent="0" algn="l" rtl="0">
               <a:spcBef>
                 <a:spcPts val="0"/>
               </a:spcBef>
@@ -1271,9 +1319,6 @@
               </a:spcAft>
               <a:buNone/>
             </a:pPr>
-            <a:r>
-              <a:t/>
-            </a:r>
             <a:endParaRPr/>
           </a:p>
         </p:txBody>
@@ -1287,11 +1332,11 @@
 </file>
 
 <file path=ppt/notesSlides/notesSlide7.xml><?xml version="1.0" encoding="utf-8"?>
-<p:notes xmlns:a="http://schemas.openxmlformats.org/drawingml/2006/main" xmlns:r="http://schemas.openxmlformats.org/officeDocument/2006/relationships" xmlns:mc="http://schemas.openxmlformats.org/markup-compatibility/2006" xmlns:mv="urn:schemas-microsoft-com:mac:vml" xmlns:p="http://schemas.openxmlformats.org/presentationml/2006/main" xmlns:c="http://schemas.openxmlformats.org/drawingml/2006/chart" xmlns:dgm="http://schemas.openxmlformats.org/drawingml/2006/diagram" xmlns:o="urn:schemas-microsoft-com:office:office" xmlns:v="urn:schemas-microsoft-com:vml" xmlns:pvml="urn:schemas-microsoft-com:office:powerpoint" xmlns:com="http://schemas.openxmlformats.org/drawingml/2006/compatibility" xmlns:p14="http://schemas.microsoft.com/office/powerpoint/2010/main" xmlns:p15="http://schemas.microsoft.com/office/powerpoint/2012/main" xmlns:ahyp="http://schemas.microsoft.com/office/drawing/2018/hyperlinkcolor" showMasterPhAnim="0" showMasterSp="0">
+<p:notes xmlns:a="http://schemas.openxmlformats.org/drawingml/2006/main" xmlns:r="http://schemas.openxmlformats.org/officeDocument/2006/relationships" xmlns:p="http://schemas.openxmlformats.org/presentationml/2006/main" showMasterSp="0" showMasterPhAnim="0">
   <p:cSld>
     <p:spTree>
       <p:nvGrpSpPr>
-        <p:cNvPr id="89" name="Shape 89"/>
+        <p:cNvPr id="1" name="Shape 89"/>
         <p:cNvGrpSpPr/>
         <p:nvPr/>
       </p:nvGrpSpPr>
@@ -1306,20 +1351,26 @@
       <p:sp>
         <p:nvSpPr>
           <p:cNvPr id="90" name="Google Shape;90;g1338a4bfd9d_0_36:notes"/>
-          <p:cNvSpPr/>
+          <p:cNvSpPr>
+            <a:spLocks noGrp="1" noRot="1" noChangeAspect="1"/>
+          </p:cNvSpPr>
           <p:nvPr>
-            <p:ph idx="2" type="sldImg"/>
+            <p:ph type="sldImg" idx="2"/>
           </p:nvPr>
         </p:nvSpPr>
         <p:spPr>
           <a:xfrm>
-            <a:off x="381300" y="685800"/>
+            <a:off x="381000" y="685800"/>
             <a:ext cx="6096000" cy="3429000"/>
           </a:xfrm>
           <a:custGeom>
-            <a:rect b="b" l="l" r="r" t="t"/>
+            <a:avLst/>
+            <a:gdLst/>
+            <a:ahLst/>
+            <a:cxnLst/>
+            <a:rect l="l" t="t" r="r" b="b"/>
             <a:pathLst>
-              <a:path extrusionOk="0" h="120000" w="120000">
+              <a:path w="120000" h="120000" extrusionOk="0">
                 <a:moveTo>
                   <a:pt x="0" y="0"/>
                 </a:moveTo>
@@ -1341,9 +1392,11 @@
       <p:sp>
         <p:nvSpPr>
           <p:cNvPr id="91" name="Google Shape;91;g1338a4bfd9d_0_36:notes"/>
-          <p:cNvSpPr txBox="1"/>
+          <p:cNvSpPr txBox="1">
+            <a:spLocks noGrp="1"/>
+          </p:cNvSpPr>
           <p:nvPr>
-            <p:ph idx="1" type="body"/>
+            <p:ph type="body" idx="1"/>
           </p:nvPr>
         </p:nvSpPr>
         <p:spPr>
@@ -1356,12 +1409,12 @@
           </a:prstGeom>
         </p:spPr>
         <p:txBody>
-          <a:bodyPr anchorCtr="0" anchor="t" bIns="91425" lIns="91425" spcFirstLastPara="1" rIns="91425" wrap="square" tIns="91425">
+          <a:bodyPr spcFirstLastPara="1" wrap="square" lIns="91425" tIns="91425" rIns="91425" bIns="91425" anchor="t" anchorCtr="0">
             <a:noAutofit/>
           </a:bodyPr>
           <a:lstStyle/>
           <a:p>
-            <a:pPr indent="0" lvl="0" marL="0" rtl="0" algn="l">
+            <a:pPr marL="0" lvl="0" indent="0" algn="l" rtl="0">
               <a:spcBef>
                 <a:spcPts val="0"/>
               </a:spcBef>
@@ -1370,9 +1423,6 @@
               </a:spcAft>
               <a:buNone/>
             </a:pPr>
-            <a:r>
-              <a:t/>
-            </a:r>
             <a:endParaRPr/>
           </a:p>
         </p:txBody>
@@ -1386,11 +1436,11 @@
 </file>
 
 <file path=ppt/slideLayouts/slideLayout1.xml><?xml version="1.0" encoding="utf-8"?>
-<p:sldLayout xmlns:a="http://schemas.openxmlformats.org/drawingml/2006/main" xmlns:r="http://schemas.openxmlformats.org/officeDocument/2006/relationships" xmlns:mc="http://schemas.openxmlformats.org/markup-compatibility/2006" xmlns:mv="urn:schemas-microsoft-com:mac:vml" xmlns:p="http://schemas.openxmlformats.org/presentationml/2006/main" xmlns:c="http://schemas.openxmlformats.org/drawingml/2006/chart" xmlns:dgm="http://schemas.openxmlformats.org/drawingml/2006/diagram" xmlns:o="urn:schemas-microsoft-com:office:office" xmlns:v="urn:schemas-microsoft-com:vml" xmlns:pvml="urn:schemas-microsoft-com:office:powerpoint" xmlns:com="http://schemas.openxmlformats.org/drawingml/2006/compatibility" xmlns:p14="http://schemas.microsoft.com/office/powerpoint/2010/main" xmlns:p15="http://schemas.microsoft.com/office/powerpoint/2012/main" xmlns:ahyp="http://schemas.microsoft.com/office/drawing/2018/hyperlinkcolor" matchingName="Title slide" type="title">
+<p:sldLayout xmlns:a="http://schemas.openxmlformats.org/drawingml/2006/main" xmlns:r="http://schemas.openxmlformats.org/officeDocument/2006/relationships" xmlns:p="http://schemas.openxmlformats.org/presentationml/2006/main" matchingName="Title slide" type="title">
   <p:cSld name="TITLE">
     <p:spTree>
       <p:nvGrpSpPr>
-        <p:cNvPr id="9" name="Shape 9"/>
+        <p:cNvPr id="1" name="Shape 9"/>
         <p:cNvGrpSpPr/>
         <p:nvPr/>
       </p:nvGrpSpPr>
@@ -1405,7 +1455,9 @@
       <p:sp>
         <p:nvSpPr>
           <p:cNvPr id="10" name="Google Shape;10;p2"/>
-          <p:cNvSpPr txBox="1"/>
+          <p:cNvSpPr txBox="1">
+            <a:spLocks noGrp="1"/>
+          </p:cNvSpPr>
           <p:nvPr>
             <p:ph type="ctrTitle"/>
           </p:nvPr>
@@ -1420,7 +1472,7 @@
           </a:prstGeom>
         </p:spPr>
         <p:txBody>
-          <a:bodyPr anchorCtr="0" anchor="b" bIns="91425" lIns="91425" spcFirstLastPara="1" rIns="91425" wrap="square" tIns="91425">
+          <a:bodyPr spcFirstLastPara="1" wrap="square" lIns="91425" tIns="91425" rIns="91425" bIns="91425" anchor="b" anchorCtr="0">
             <a:normAutofit/>
           </a:bodyPr>
           <a:lstStyle>
@@ -1524,15 +1576,19 @@
               <a:defRPr sz="5200"/>
             </a:lvl9pPr>
           </a:lstStyle>
-          <a:p/>
+          <a:p>
+            <a:endParaRPr/>
+          </a:p>
         </p:txBody>
       </p:sp>
       <p:sp>
         <p:nvSpPr>
           <p:cNvPr id="11" name="Google Shape;11;p2"/>
-          <p:cNvSpPr txBox="1"/>
+          <p:cNvSpPr txBox="1">
+            <a:spLocks noGrp="1"/>
+          </p:cNvSpPr>
           <p:nvPr>
-            <p:ph idx="1" type="subTitle"/>
+            <p:ph type="subTitle" idx="1"/>
           </p:nvPr>
         </p:nvSpPr>
         <p:spPr>
@@ -1545,7 +1601,7 @@
           </a:prstGeom>
         </p:spPr>
         <p:txBody>
-          <a:bodyPr anchorCtr="0" anchor="t" bIns="91425" lIns="91425" spcFirstLastPara="1" rIns="91425" wrap="square" tIns="91425">
+          <a:bodyPr spcFirstLastPara="1" wrap="square" lIns="91425" tIns="91425" rIns="91425" bIns="91425" anchor="t" anchorCtr="0">
             <a:normAutofit/>
           </a:bodyPr>
           <a:lstStyle>
@@ -1676,15 +1732,19 @@
               <a:defRPr sz="2800"/>
             </a:lvl9pPr>
           </a:lstStyle>
-          <a:p/>
+          <a:p>
+            <a:endParaRPr/>
+          </a:p>
         </p:txBody>
       </p:sp>
       <p:sp>
         <p:nvSpPr>
           <p:cNvPr id="12" name="Google Shape;12;p2"/>
-          <p:cNvSpPr txBox="1"/>
+          <p:cNvSpPr txBox="1">
+            <a:spLocks noGrp="1"/>
+          </p:cNvSpPr>
           <p:nvPr>
-            <p:ph idx="12" type="sldNum"/>
+            <p:ph type="sldNum" idx="12"/>
           </p:nvPr>
         </p:nvSpPr>
         <p:spPr>
@@ -1697,7 +1757,7 @@
           </a:prstGeom>
         </p:spPr>
         <p:txBody>
-          <a:bodyPr anchorCtr="0" anchor="ctr" bIns="91425" lIns="91425" spcFirstLastPara="1" rIns="91425" wrap="square" tIns="91425">
+          <a:bodyPr spcFirstLastPara="1" wrap="square" lIns="91425" tIns="91425" rIns="91425" bIns="91425" anchor="ctr" anchorCtr="0">
             <a:normAutofit/>
           </a:bodyPr>
           <a:lstStyle>
@@ -1739,7 +1799,7 @@
             </a:lvl9pPr>
           </a:lstStyle>
           <a:p>
-            <a:pPr indent="0" lvl="0" marL="0" rtl="0" algn="r">
+            <a:pPr marL="0" lvl="0" indent="0" algn="r" rtl="0">
               <a:spcBef>
                 <a:spcPts val="0"/>
               </a:spcBef>
@@ -1765,11 +1825,11 @@
 </file>
 
 <file path=ppt/slideLayouts/slideLayout10.xml><?xml version="1.0" encoding="utf-8"?>
-<p:sldLayout xmlns:a="http://schemas.openxmlformats.org/drawingml/2006/main" xmlns:r="http://schemas.openxmlformats.org/officeDocument/2006/relationships" xmlns:mc="http://schemas.openxmlformats.org/markup-compatibility/2006" xmlns:mv="urn:schemas-microsoft-com:mac:vml" xmlns:p="http://schemas.openxmlformats.org/presentationml/2006/main" xmlns:c="http://schemas.openxmlformats.org/drawingml/2006/chart" xmlns:dgm="http://schemas.openxmlformats.org/drawingml/2006/diagram" xmlns:o="urn:schemas-microsoft-com:office:office" xmlns:v="urn:schemas-microsoft-com:vml" xmlns:pvml="urn:schemas-microsoft-com:office:powerpoint" xmlns:com="http://schemas.openxmlformats.org/drawingml/2006/compatibility" xmlns:p14="http://schemas.microsoft.com/office/powerpoint/2010/main" xmlns:p15="http://schemas.microsoft.com/office/powerpoint/2012/main" xmlns:ahyp="http://schemas.microsoft.com/office/drawing/2018/hyperlinkcolor" matchingName="Big number">
+<p:sldLayout xmlns:a="http://schemas.openxmlformats.org/drawingml/2006/main" xmlns:r="http://schemas.openxmlformats.org/officeDocument/2006/relationships" xmlns:p="http://schemas.openxmlformats.org/presentationml/2006/main" matchingName="Big number">
   <p:cSld name="BIG_NUMBER">
     <p:spTree>
       <p:nvGrpSpPr>
-        <p:cNvPr id="44" name="Shape 44"/>
+        <p:cNvPr id="1" name="Shape 44"/>
         <p:cNvGrpSpPr/>
         <p:nvPr/>
       </p:nvGrpSpPr>
@@ -1784,9 +1844,11 @@
       <p:sp>
         <p:nvSpPr>
           <p:cNvPr id="45" name="Google Shape;45;p11"/>
-          <p:cNvSpPr txBox="1"/>
+          <p:cNvSpPr txBox="1">
+            <a:spLocks noGrp="1"/>
+          </p:cNvSpPr>
           <p:nvPr>
-            <p:ph hasCustomPrompt="1" type="title"/>
+            <p:ph type="title" hasCustomPrompt="1"/>
           </p:nvPr>
         </p:nvSpPr>
         <p:spPr>
@@ -1799,7 +1861,7 @@
           </a:prstGeom>
         </p:spPr>
         <p:txBody>
-          <a:bodyPr anchorCtr="0" anchor="b" bIns="91425" lIns="91425" spcFirstLastPara="1" rIns="91425" wrap="square" tIns="91425">
+          <a:bodyPr spcFirstLastPara="1" wrap="square" lIns="91425" tIns="91425" rIns="91425" bIns="91425" anchor="b" anchorCtr="0">
             <a:normAutofit/>
           </a:bodyPr>
           <a:lstStyle>
@@ -1913,9 +1975,11 @@
       <p:sp>
         <p:nvSpPr>
           <p:cNvPr id="46" name="Google Shape;46;p11"/>
-          <p:cNvSpPr txBox="1"/>
+          <p:cNvSpPr txBox="1">
+            <a:spLocks noGrp="1"/>
+          </p:cNvSpPr>
           <p:nvPr>
-            <p:ph idx="1" type="body"/>
+            <p:ph type="body" idx="1"/>
           </p:nvPr>
         </p:nvSpPr>
         <p:spPr>
@@ -1928,11 +1992,11 @@
           </a:prstGeom>
         </p:spPr>
         <p:txBody>
-          <a:bodyPr anchorCtr="0" anchor="t" bIns="91425" lIns="91425" spcFirstLastPara="1" rIns="91425" wrap="square" tIns="91425">
+          <a:bodyPr spcFirstLastPara="1" wrap="square" lIns="91425" tIns="91425" rIns="91425" bIns="91425" anchor="t" anchorCtr="0">
             <a:normAutofit/>
           </a:bodyPr>
           <a:lstStyle>
-            <a:lvl1pPr indent="-342900" lvl="0" marL="457200" algn="ctr">
+            <a:lvl1pPr marL="457200" lvl="0" indent="-342900" algn="ctr">
               <a:spcBef>
                 <a:spcPts val="0"/>
               </a:spcBef>
@@ -1943,7 +2007,7 @@
               <a:buChar char="●"/>
               <a:defRPr/>
             </a:lvl1pPr>
-            <a:lvl2pPr indent="-317500" lvl="1" marL="914400" algn="ctr">
+            <a:lvl2pPr marL="914400" lvl="1" indent="-317500" algn="ctr">
               <a:spcBef>
                 <a:spcPts val="0"/>
               </a:spcBef>
@@ -1954,7 +2018,7 @@
               <a:buChar char="○"/>
               <a:defRPr/>
             </a:lvl2pPr>
-            <a:lvl3pPr indent="-317500" lvl="2" marL="1371600" algn="ctr">
+            <a:lvl3pPr marL="1371600" lvl="2" indent="-317500" algn="ctr">
               <a:spcBef>
                 <a:spcPts val="0"/>
               </a:spcBef>
@@ -1965,7 +2029,7 @@
               <a:buChar char="■"/>
               <a:defRPr/>
             </a:lvl3pPr>
-            <a:lvl4pPr indent="-317500" lvl="3" marL="1828800" algn="ctr">
+            <a:lvl4pPr marL="1828800" lvl="3" indent="-317500" algn="ctr">
               <a:spcBef>
                 <a:spcPts val="0"/>
               </a:spcBef>
@@ -1976,7 +2040,7 @@
               <a:buChar char="●"/>
               <a:defRPr/>
             </a:lvl4pPr>
-            <a:lvl5pPr indent="-317500" lvl="4" marL="2286000" algn="ctr">
+            <a:lvl5pPr marL="2286000" lvl="4" indent="-317500" algn="ctr">
               <a:spcBef>
                 <a:spcPts val="0"/>
               </a:spcBef>
@@ -1987,7 +2051,7 @@
               <a:buChar char="○"/>
               <a:defRPr/>
             </a:lvl5pPr>
-            <a:lvl6pPr indent="-317500" lvl="5" marL="2743200" algn="ctr">
+            <a:lvl6pPr marL="2743200" lvl="5" indent="-317500" algn="ctr">
               <a:spcBef>
                 <a:spcPts val="0"/>
               </a:spcBef>
@@ -1998,7 +2062,7 @@
               <a:buChar char="■"/>
               <a:defRPr/>
             </a:lvl6pPr>
-            <a:lvl7pPr indent="-317500" lvl="6" marL="3200400" algn="ctr">
+            <a:lvl7pPr marL="3200400" lvl="6" indent="-317500" algn="ctr">
               <a:spcBef>
                 <a:spcPts val="0"/>
               </a:spcBef>
@@ -2009,7 +2073,7 @@
               <a:buChar char="●"/>
               <a:defRPr/>
             </a:lvl7pPr>
-            <a:lvl8pPr indent="-317500" lvl="7" marL="3657600" algn="ctr">
+            <a:lvl8pPr marL="3657600" lvl="7" indent="-317500" algn="ctr">
               <a:spcBef>
                 <a:spcPts val="0"/>
               </a:spcBef>
@@ -2020,7 +2084,7 @@
               <a:buChar char="○"/>
               <a:defRPr/>
             </a:lvl8pPr>
-            <a:lvl9pPr indent="-317500" lvl="8" marL="4114800" algn="ctr">
+            <a:lvl9pPr marL="4114800" lvl="8" indent="-317500" algn="ctr">
               <a:spcBef>
                 <a:spcPts val="0"/>
               </a:spcBef>
@@ -2032,15 +2096,19 @@
               <a:defRPr/>
             </a:lvl9pPr>
           </a:lstStyle>
-          <a:p/>
+          <a:p>
+            <a:endParaRPr/>
+          </a:p>
         </p:txBody>
       </p:sp>
       <p:sp>
         <p:nvSpPr>
           <p:cNvPr id="47" name="Google Shape;47;p11"/>
-          <p:cNvSpPr txBox="1"/>
+          <p:cNvSpPr txBox="1">
+            <a:spLocks noGrp="1"/>
+          </p:cNvSpPr>
           <p:nvPr>
-            <p:ph idx="12" type="sldNum"/>
+            <p:ph type="sldNum" idx="12"/>
           </p:nvPr>
         </p:nvSpPr>
         <p:spPr>
@@ -2053,7 +2121,7 @@
           </a:prstGeom>
         </p:spPr>
         <p:txBody>
-          <a:bodyPr anchorCtr="0" anchor="ctr" bIns="91425" lIns="91425" spcFirstLastPara="1" rIns="91425" wrap="square" tIns="91425">
+          <a:bodyPr spcFirstLastPara="1" wrap="square" lIns="91425" tIns="91425" rIns="91425" bIns="91425" anchor="ctr" anchorCtr="0">
             <a:normAutofit/>
           </a:bodyPr>
           <a:lstStyle>
@@ -2095,7 +2163,7 @@
             </a:lvl9pPr>
           </a:lstStyle>
           <a:p>
-            <a:pPr indent="0" lvl="0" marL="0" rtl="0" algn="r">
+            <a:pPr marL="0" lvl="0" indent="0" algn="r" rtl="0">
               <a:spcBef>
                 <a:spcPts val="0"/>
               </a:spcBef>
@@ -2121,11 +2189,11 @@
 </file>
 
 <file path=ppt/slideLayouts/slideLayout11.xml><?xml version="1.0" encoding="utf-8"?>
-<p:sldLayout xmlns:a="http://schemas.openxmlformats.org/drawingml/2006/main" xmlns:r="http://schemas.openxmlformats.org/officeDocument/2006/relationships" xmlns:mc="http://schemas.openxmlformats.org/markup-compatibility/2006" xmlns:mv="urn:schemas-microsoft-com:mac:vml" xmlns:p="http://schemas.openxmlformats.org/presentationml/2006/main" xmlns:c="http://schemas.openxmlformats.org/drawingml/2006/chart" xmlns:dgm="http://schemas.openxmlformats.org/drawingml/2006/diagram" xmlns:o="urn:schemas-microsoft-com:office:office" xmlns:v="urn:schemas-microsoft-com:vml" xmlns:pvml="urn:schemas-microsoft-com:office:powerpoint" xmlns:com="http://schemas.openxmlformats.org/drawingml/2006/compatibility" xmlns:p14="http://schemas.microsoft.com/office/powerpoint/2010/main" xmlns:p15="http://schemas.microsoft.com/office/powerpoint/2012/main" xmlns:ahyp="http://schemas.microsoft.com/office/drawing/2018/hyperlinkcolor" matchingName="Blank" type="blank">
+<p:sldLayout xmlns:a="http://schemas.openxmlformats.org/drawingml/2006/main" xmlns:r="http://schemas.openxmlformats.org/officeDocument/2006/relationships" xmlns:p="http://schemas.openxmlformats.org/presentationml/2006/main" matchingName="Blank" type="blank">
   <p:cSld name="BLANK">
     <p:spTree>
       <p:nvGrpSpPr>
-        <p:cNvPr id="48" name="Shape 48"/>
+        <p:cNvPr id="1" name="Shape 48"/>
         <p:cNvGrpSpPr/>
         <p:nvPr/>
       </p:nvGrpSpPr>
@@ -2140,9 +2208,11 @@
       <p:sp>
         <p:nvSpPr>
           <p:cNvPr id="49" name="Google Shape;49;p12"/>
-          <p:cNvSpPr txBox="1"/>
+          <p:cNvSpPr txBox="1">
+            <a:spLocks noGrp="1"/>
+          </p:cNvSpPr>
           <p:nvPr>
-            <p:ph idx="12" type="sldNum"/>
+            <p:ph type="sldNum" idx="12"/>
           </p:nvPr>
         </p:nvSpPr>
         <p:spPr>
@@ -2155,7 +2225,7 @@
           </a:prstGeom>
         </p:spPr>
         <p:txBody>
-          <a:bodyPr anchorCtr="0" anchor="ctr" bIns="91425" lIns="91425" spcFirstLastPara="1" rIns="91425" wrap="square" tIns="91425">
+          <a:bodyPr spcFirstLastPara="1" wrap="square" lIns="91425" tIns="91425" rIns="91425" bIns="91425" anchor="ctr" anchorCtr="0">
             <a:normAutofit/>
           </a:bodyPr>
           <a:lstStyle>
@@ -2197,7 +2267,7 @@
             </a:lvl9pPr>
           </a:lstStyle>
           <a:p>
-            <a:pPr indent="0" lvl="0" marL="0" rtl="0" algn="r">
+            <a:pPr marL="0" lvl="0" indent="0" algn="r" rtl="0">
               <a:spcBef>
                 <a:spcPts val="0"/>
               </a:spcBef>
@@ -2223,11 +2293,11 @@
 </file>
 
 <file path=ppt/slideLayouts/slideLayout2.xml><?xml version="1.0" encoding="utf-8"?>
-<p:sldLayout xmlns:a="http://schemas.openxmlformats.org/drawingml/2006/main" xmlns:r="http://schemas.openxmlformats.org/officeDocument/2006/relationships" xmlns:mc="http://schemas.openxmlformats.org/markup-compatibility/2006" xmlns:mv="urn:schemas-microsoft-com:mac:vml" xmlns:p="http://schemas.openxmlformats.org/presentationml/2006/main" xmlns:c="http://schemas.openxmlformats.org/drawingml/2006/chart" xmlns:dgm="http://schemas.openxmlformats.org/drawingml/2006/diagram" xmlns:o="urn:schemas-microsoft-com:office:office" xmlns:v="urn:schemas-microsoft-com:vml" xmlns:pvml="urn:schemas-microsoft-com:office:powerpoint" xmlns:com="http://schemas.openxmlformats.org/drawingml/2006/compatibility" xmlns:p14="http://schemas.microsoft.com/office/powerpoint/2010/main" xmlns:p15="http://schemas.microsoft.com/office/powerpoint/2012/main" xmlns:ahyp="http://schemas.microsoft.com/office/drawing/2018/hyperlinkcolor" matchingName="Section header" type="secHead">
+<p:sldLayout xmlns:a="http://schemas.openxmlformats.org/drawingml/2006/main" xmlns:r="http://schemas.openxmlformats.org/officeDocument/2006/relationships" xmlns:p="http://schemas.openxmlformats.org/presentationml/2006/main" matchingName="Section header" type="secHead">
   <p:cSld name="SECTION_HEADER">
     <p:spTree>
       <p:nvGrpSpPr>
-        <p:cNvPr id="13" name="Shape 13"/>
+        <p:cNvPr id="1" name="Shape 13"/>
         <p:cNvGrpSpPr/>
         <p:nvPr/>
       </p:nvGrpSpPr>
@@ -2242,7 +2312,9 @@
       <p:sp>
         <p:nvSpPr>
           <p:cNvPr id="14" name="Google Shape;14;p3"/>
-          <p:cNvSpPr txBox="1"/>
+          <p:cNvSpPr txBox="1">
+            <a:spLocks noGrp="1"/>
+          </p:cNvSpPr>
           <p:nvPr>
             <p:ph type="title"/>
           </p:nvPr>
@@ -2257,7 +2329,7 @@
           </a:prstGeom>
         </p:spPr>
         <p:txBody>
-          <a:bodyPr anchorCtr="0" anchor="ctr" bIns="91425" lIns="91425" spcFirstLastPara="1" rIns="91425" wrap="square" tIns="91425">
+          <a:bodyPr spcFirstLastPara="1" wrap="square" lIns="91425" tIns="91425" rIns="91425" bIns="91425" anchor="ctr" anchorCtr="0">
             <a:normAutofit/>
           </a:bodyPr>
           <a:lstStyle>
@@ -2361,15 +2433,19 @@
               <a:defRPr sz="3600"/>
             </a:lvl9pPr>
           </a:lstStyle>
-          <a:p/>
+          <a:p>
+            <a:endParaRPr/>
+          </a:p>
         </p:txBody>
       </p:sp>
       <p:sp>
         <p:nvSpPr>
           <p:cNvPr id="15" name="Google Shape;15;p3"/>
-          <p:cNvSpPr txBox="1"/>
+          <p:cNvSpPr txBox="1">
+            <a:spLocks noGrp="1"/>
+          </p:cNvSpPr>
           <p:nvPr>
-            <p:ph idx="12" type="sldNum"/>
+            <p:ph type="sldNum" idx="12"/>
           </p:nvPr>
         </p:nvSpPr>
         <p:spPr>
@@ -2382,7 +2458,7 @@
           </a:prstGeom>
         </p:spPr>
         <p:txBody>
-          <a:bodyPr anchorCtr="0" anchor="ctr" bIns="91425" lIns="91425" spcFirstLastPara="1" rIns="91425" wrap="square" tIns="91425">
+          <a:bodyPr spcFirstLastPara="1" wrap="square" lIns="91425" tIns="91425" rIns="91425" bIns="91425" anchor="ctr" anchorCtr="0">
             <a:normAutofit/>
           </a:bodyPr>
           <a:lstStyle>
@@ -2424,7 +2500,7 @@
             </a:lvl9pPr>
           </a:lstStyle>
           <a:p>
-            <a:pPr indent="0" lvl="0" marL="0" rtl="0" algn="r">
+            <a:pPr marL="0" lvl="0" indent="0" algn="r" rtl="0">
               <a:spcBef>
                 <a:spcPts val="0"/>
               </a:spcBef>
@@ -2450,11 +2526,11 @@
 </file>
 
 <file path=ppt/slideLayouts/slideLayout3.xml><?xml version="1.0" encoding="utf-8"?>
-<p:sldLayout xmlns:a="http://schemas.openxmlformats.org/drawingml/2006/main" xmlns:r="http://schemas.openxmlformats.org/officeDocument/2006/relationships" xmlns:mc="http://schemas.openxmlformats.org/markup-compatibility/2006" xmlns:mv="urn:schemas-microsoft-com:mac:vml" xmlns:p="http://schemas.openxmlformats.org/presentationml/2006/main" xmlns:c="http://schemas.openxmlformats.org/drawingml/2006/chart" xmlns:dgm="http://schemas.openxmlformats.org/drawingml/2006/diagram" xmlns:o="urn:schemas-microsoft-com:office:office" xmlns:v="urn:schemas-microsoft-com:vml" xmlns:pvml="urn:schemas-microsoft-com:office:powerpoint" xmlns:com="http://schemas.openxmlformats.org/drawingml/2006/compatibility" xmlns:p14="http://schemas.microsoft.com/office/powerpoint/2010/main" xmlns:p15="http://schemas.microsoft.com/office/powerpoint/2012/main" xmlns:ahyp="http://schemas.microsoft.com/office/drawing/2018/hyperlinkcolor" matchingName="Title and body" type="tx">
+<p:sldLayout xmlns:a="http://schemas.openxmlformats.org/drawingml/2006/main" xmlns:r="http://schemas.openxmlformats.org/officeDocument/2006/relationships" xmlns:p="http://schemas.openxmlformats.org/presentationml/2006/main" matchingName="Title and body" type="tx">
   <p:cSld name="TITLE_AND_BODY">
     <p:spTree>
       <p:nvGrpSpPr>
-        <p:cNvPr id="16" name="Shape 16"/>
+        <p:cNvPr id="1" name="Shape 16"/>
         <p:cNvGrpSpPr/>
         <p:nvPr/>
       </p:nvGrpSpPr>
@@ -2469,7 +2545,9 @@
       <p:sp>
         <p:nvSpPr>
           <p:cNvPr id="17" name="Google Shape;17;p4"/>
-          <p:cNvSpPr txBox="1"/>
+          <p:cNvSpPr txBox="1">
+            <a:spLocks noGrp="1"/>
+          </p:cNvSpPr>
           <p:nvPr>
             <p:ph type="title"/>
           </p:nvPr>
@@ -2484,7 +2562,7 @@
           </a:prstGeom>
         </p:spPr>
         <p:txBody>
-          <a:bodyPr anchorCtr="0" anchor="t" bIns="91425" lIns="91425" spcFirstLastPara="1" rIns="91425" wrap="square" tIns="91425">
+          <a:bodyPr spcFirstLastPara="1" wrap="square" lIns="91425" tIns="91425" rIns="91425" bIns="91425" anchor="t" anchorCtr="0">
             <a:normAutofit/>
           </a:bodyPr>
           <a:lstStyle>
@@ -2588,15 +2666,19 @@
               <a:defRPr/>
             </a:lvl9pPr>
           </a:lstStyle>
-          <a:p/>
+          <a:p>
+            <a:endParaRPr/>
+          </a:p>
         </p:txBody>
       </p:sp>
       <p:sp>
         <p:nvSpPr>
           <p:cNvPr id="18" name="Google Shape;18;p4"/>
-          <p:cNvSpPr txBox="1"/>
+          <p:cNvSpPr txBox="1">
+            <a:spLocks noGrp="1"/>
+          </p:cNvSpPr>
           <p:nvPr>
-            <p:ph idx="1" type="body"/>
+            <p:ph type="body" idx="1"/>
           </p:nvPr>
         </p:nvSpPr>
         <p:spPr>
@@ -2609,11 +2691,11 @@
           </a:prstGeom>
         </p:spPr>
         <p:txBody>
-          <a:bodyPr anchorCtr="0" anchor="t" bIns="91425" lIns="91425" spcFirstLastPara="1" rIns="91425" wrap="square" tIns="91425">
+          <a:bodyPr spcFirstLastPara="1" wrap="square" lIns="91425" tIns="91425" rIns="91425" bIns="91425" anchor="t" anchorCtr="0">
             <a:normAutofit/>
           </a:bodyPr>
           <a:lstStyle>
-            <a:lvl1pPr indent="-342900" lvl="0" marL="457200">
+            <a:lvl1pPr marL="457200" lvl="0" indent="-342900">
               <a:spcBef>
                 <a:spcPts val="0"/>
               </a:spcBef>
@@ -2624,7 +2706,7 @@
               <a:buChar char="●"/>
               <a:defRPr/>
             </a:lvl1pPr>
-            <a:lvl2pPr indent="-317500" lvl="1" marL="914400">
+            <a:lvl2pPr marL="914400" lvl="1" indent="-317500">
               <a:spcBef>
                 <a:spcPts val="0"/>
               </a:spcBef>
@@ -2635,7 +2717,7 @@
               <a:buChar char="○"/>
               <a:defRPr/>
             </a:lvl2pPr>
-            <a:lvl3pPr indent="-317500" lvl="2" marL="1371600">
+            <a:lvl3pPr marL="1371600" lvl="2" indent="-317500">
               <a:spcBef>
                 <a:spcPts val="0"/>
               </a:spcBef>
@@ -2646,7 +2728,7 @@
               <a:buChar char="■"/>
               <a:defRPr/>
             </a:lvl3pPr>
-            <a:lvl4pPr indent="-317500" lvl="3" marL="1828800">
+            <a:lvl4pPr marL="1828800" lvl="3" indent="-317500">
               <a:spcBef>
                 <a:spcPts val="0"/>
               </a:spcBef>
@@ -2657,7 +2739,7 @@
               <a:buChar char="●"/>
               <a:defRPr/>
             </a:lvl4pPr>
-            <a:lvl5pPr indent="-317500" lvl="4" marL="2286000">
+            <a:lvl5pPr marL="2286000" lvl="4" indent="-317500">
               <a:spcBef>
                 <a:spcPts val="0"/>
               </a:spcBef>
@@ -2668,7 +2750,7 @@
               <a:buChar char="○"/>
               <a:defRPr/>
             </a:lvl5pPr>
-            <a:lvl6pPr indent="-317500" lvl="5" marL="2743200">
+            <a:lvl6pPr marL="2743200" lvl="5" indent="-317500">
               <a:spcBef>
                 <a:spcPts val="0"/>
               </a:spcBef>
@@ -2679,7 +2761,7 @@
               <a:buChar char="■"/>
               <a:defRPr/>
             </a:lvl6pPr>
-            <a:lvl7pPr indent="-317500" lvl="6" marL="3200400">
+            <a:lvl7pPr marL="3200400" lvl="6" indent="-317500">
               <a:spcBef>
                 <a:spcPts val="0"/>
               </a:spcBef>
@@ -2690,7 +2772,7 @@
               <a:buChar char="●"/>
               <a:defRPr/>
             </a:lvl7pPr>
-            <a:lvl8pPr indent="-317500" lvl="7" marL="3657600">
+            <a:lvl8pPr marL="3657600" lvl="7" indent="-317500">
               <a:spcBef>
                 <a:spcPts val="0"/>
               </a:spcBef>
@@ -2701,7 +2783,7 @@
               <a:buChar char="○"/>
               <a:defRPr/>
             </a:lvl8pPr>
-            <a:lvl9pPr indent="-317500" lvl="8" marL="4114800">
+            <a:lvl9pPr marL="4114800" lvl="8" indent="-317500">
               <a:spcBef>
                 <a:spcPts val="0"/>
               </a:spcBef>
@@ -2713,15 +2795,19 @@
               <a:defRPr/>
             </a:lvl9pPr>
           </a:lstStyle>
-          <a:p/>
+          <a:p>
+            <a:endParaRPr/>
+          </a:p>
         </p:txBody>
       </p:sp>
       <p:sp>
         <p:nvSpPr>
           <p:cNvPr id="19" name="Google Shape;19;p4"/>
-          <p:cNvSpPr txBox="1"/>
+          <p:cNvSpPr txBox="1">
+            <a:spLocks noGrp="1"/>
+          </p:cNvSpPr>
           <p:nvPr>
-            <p:ph idx="12" type="sldNum"/>
+            <p:ph type="sldNum" idx="12"/>
           </p:nvPr>
         </p:nvSpPr>
         <p:spPr>
@@ -2734,7 +2820,7 @@
           </a:prstGeom>
         </p:spPr>
         <p:txBody>
-          <a:bodyPr anchorCtr="0" anchor="ctr" bIns="91425" lIns="91425" spcFirstLastPara="1" rIns="91425" wrap="square" tIns="91425">
+          <a:bodyPr spcFirstLastPara="1" wrap="square" lIns="91425" tIns="91425" rIns="91425" bIns="91425" anchor="ctr" anchorCtr="0">
             <a:normAutofit/>
           </a:bodyPr>
           <a:lstStyle>
@@ -2776,7 +2862,7 @@
             </a:lvl9pPr>
           </a:lstStyle>
           <a:p>
-            <a:pPr indent="0" lvl="0" marL="0" rtl="0" algn="r">
+            <a:pPr marL="0" lvl="0" indent="0" algn="r" rtl="0">
               <a:spcBef>
                 <a:spcPts val="0"/>
               </a:spcBef>
@@ -2802,11 +2888,11 @@
 </file>
 
 <file path=ppt/slideLayouts/slideLayout4.xml><?xml version="1.0" encoding="utf-8"?>
-<p:sldLayout xmlns:a="http://schemas.openxmlformats.org/drawingml/2006/main" xmlns:r="http://schemas.openxmlformats.org/officeDocument/2006/relationships" xmlns:mc="http://schemas.openxmlformats.org/markup-compatibility/2006" xmlns:mv="urn:schemas-microsoft-com:mac:vml" xmlns:p="http://schemas.openxmlformats.org/presentationml/2006/main" xmlns:c="http://schemas.openxmlformats.org/drawingml/2006/chart" xmlns:dgm="http://schemas.openxmlformats.org/drawingml/2006/diagram" xmlns:o="urn:schemas-microsoft-com:office:office" xmlns:v="urn:schemas-microsoft-com:vml" xmlns:pvml="urn:schemas-microsoft-com:office:powerpoint" xmlns:com="http://schemas.openxmlformats.org/drawingml/2006/compatibility" xmlns:p14="http://schemas.microsoft.com/office/powerpoint/2010/main" xmlns:p15="http://schemas.microsoft.com/office/powerpoint/2012/main" xmlns:ahyp="http://schemas.microsoft.com/office/drawing/2018/hyperlinkcolor" matchingName="Title and two columns" type="twoColTx">
+<p:sldLayout xmlns:a="http://schemas.openxmlformats.org/drawingml/2006/main" xmlns:r="http://schemas.openxmlformats.org/officeDocument/2006/relationships" xmlns:p="http://schemas.openxmlformats.org/presentationml/2006/main" matchingName="Title and two columns" type="twoColTx">
   <p:cSld name="TITLE_AND_TWO_COLUMNS">
     <p:spTree>
       <p:nvGrpSpPr>
-        <p:cNvPr id="20" name="Shape 20"/>
+        <p:cNvPr id="1" name="Shape 20"/>
         <p:cNvGrpSpPr/>
         <p:nvPr/>
       </p:nvGrpSpPr>
@@ -2821,7 +2907,9 @@
       <p:sp>
         <p:nvSpPr>
           <p:cNvPr id="21" name="Google Shape;21;p5"/>
-          <p:cNvSpPr txBox="1"/>
+          <p:cNvSpPr txBox="1">
+            <a:spLocks noGrp="1"/>
+          </p:cNvSpPr>
           <p:nvPr>
             <p:ph type="title"/>
           </p:nvPr>
@@ -2836,7 +2924,7 @@
           </a:prstGeom>
         </p:spPr>
         <p:txBody>
-          <a:bodyPr anchorCtr="0" anchor="t" bIns="91425" lIns="91425" spcFirstLastPara="1" rIns="91425" wrap="square" tIns="91425">
+          <a:bodyPr spcFirstLastPara="1" wrap="square" lIns="91425" tIns="91425" rIns="91425" bIns="91425" anchor="t" anchorCtr="0">
             <a:normAutofit/>
           </a:bodyPr>
           <a:lstStyle>
@@ -2940,15 +3028,19 @@
               <a:defRPr/>
             </a:lvl9pPr>
           </a:lstStyle>
-          <a:p/>
+          <a:p>
+            <a:endParaRPr/>
+          </a:p>
         </p:txBody>
       </p:sp>
       <p:sp>
         <p:nvSpPr>
           <p:cNvPr id="22" name="Google Shape;22;p5"/>
-          <p:cNvSpPr txBox="1"/>
+          <p:cNvSpPr txBox="1">
+            <a:spLocks noGrp="1"/>
+          </p:cNvSpPr>
           <p:nvPr>
-            <p:ph idx="1" type="body"/>
+            <p:ph type="body" idx="1"/>
           </p:nvPr>
         </p:nvSpPr>
         <p:spPr>
@@ -2961,11 +3053,11 @@
           </a:prstGeom>
         </p:spPr>
         <p:txBody>
-          <a:bodyPr anchorCtr="0" anchor="t" bIns="91425" lIns="91425" spcFirstLastPara="1" rIns="91425" wrap="square" tIns="91425">
+          <a:bodyPr spcFirstLastPara="1" wrap="square" lIns="91425" tIns="91425" rIns="91425" bIns="91425" anchor="t" anchorCtr="0">
             <a:normAutofit/>
           </a:bodyPr>
           <a:lstStyle>
-            <a:lvl1pPr indent="-317500" lvl="0" marL="457200">
+            <a:lvl1pPr marL="457200" lvl="0" indent="-317500">
               <a:spcBef>
                 <a:spcPts val="0"/>
               </a:spcBef>
@@ -2976,7 +3068,7 @@
               <a:buChar char="●"/>
               <a:defRPr sz="1400"/>
             </a:lvl1pPr>
-            <a:lvl2pPr indent="-304800" lvl="1" marL="914400">
+            <a:lvl2pPr marL="914400" lvl="1" indent="-304800">
               <a:spcBef>
                 <a:spcPts val="0"/>
               </a:spcBef>
@@ -2987,7 +3079,7 @@
               <a:buChar char="○"/>
               <a:defRPr sz="1200"/>
             </a:lvl2pPr>
-            <a:lvl3pPr indent="-304800" lvl="2" marL="1371600">
+            <a:lvl3pPr marL="1371600" lvl="2" indent="-304800">
               <a:spcBef>
                 <a:spcPts val="0"/>
               </a:spcBef>
@@ -2998,7 +3090,7 @@
               <a:buChar char="■"/>
               <a:defRPr sz="1200"/>
             </a:lvl3pPr>
-            <a:lvl4pPr indent="-304800" lvl="3" marL="1828800">
+            <a:lvl4pPr marL="1828800" lvl="3" indent="-304800">
               <a:spcBef>
                 <a:spcPts val="0"/>
               </a:spcBef>
@@ -3009,7 +3101,7 @@
               <a:buChar char="●"/>
               <a:defRPr sz="1200"/>
             </a:lvl4pPr>
-            <a:lvl5pPr indent="-304800" lvl="4" marL="2286000">
+            <a:lvl5pPr marL="2286000" lvl="4" indent="-304800">
               <a:spcBef>
                 <a:spcPts val="0"/>
               </a:spcBef>
@@ -3020,7 +3112,7 @@
               <a:buChar char="○"/>
               <a:defRPr sz="1200"/>
             </a:lvl5pPr>
-            <a:lvl6pPr indent="-304800" lvl="5" marL="2743200">
+            <a:lvl6pPr marL="2743200" lvl="5" indent="-304800">
               <a:spcBef>
                 <a:spcPts val="0"/>
               </a:spcBef>
@@ -3031,7 +3123,7 @@
               <a:buChar char="■"/>
               <a:defRPr sz="1200"/>
             </a:lvl6pPr>
-            <a:lvl7pPr indent="-304800" lvl="6" marL="3200400">
+            <a:lvl7pPr marL="3200400" lvl="6" indent="-304800">
               <a:spcBef>
                 <a:spcPts val="0"/>
               </a:spcBef>
@@ -3042,7 +3134,7 @@
               <a:buChar char="●"/>
               <a:defRPr sz="1200"/>
             </a:lvl7pPr>
-            <a:lvl8pPr indent="-304800" lvl="7" marL="3657600">
+            <a:lvl8pPr marL="3657600" lvl="7" indent="-304800">
               <a:spcBef>
                 <a:spcPts val="0"/>
               </a:spcBef>
@@ -3053,7 +3145,7 @@
               <a:buChar char="○"/>
               <a:defRPr sz="1200"/>
             </a:lvl8pPr>
-            <a:lvl9pPr indent="-304800" lvl="8" marL="4114800">
+            <a:lvl9pPr marL="4114800" lvl="8" indent="-304800">
               <a:spcBef>
                 <a:spcPts val="0"/>
               </a:spcBef>
@@ -3065,15 +3157,19 @@
               <a:defRPr sz="1200"/>
             </a:lvl9pPr>
           </a:lstStyle>
-          <a:p/>
+          <a:p>
+            <a:endParaRPr/>
+          </a:p>
         </p:txBody>
       </p:sp>
       <p:sp>
         <p:nvSpPr>
           <p:cNvPr id="23" name="Google Shape;23;p5"/>
-          <p:cNvSpPr txBox="1"/>
+          <p:cNvSpPr txBox="1">
+            <a:spLocks noGrp="1"/>
+          </p:cNvSpPr>
           <p:nvPr>
-            <p:ph idx="2" type="body"/>
+            <p:ph type="body" idx="2"/>
           </p:nvPr>
         </p:nvSpPr>
         <p:spPr>
@@ -3086,11 +3182,11 @@
           </a:prstGeom>
         </p:spPr>
         <p:txBody>
-          <a:bodyPr anchorCtr="0" anchor="t" bIns="91425" lIns="91425" spcFirstLastPara="1" rIns="91425" wrap="square" tIns="91425">
+          <a:bodyPr spcFirstLastPara="1" wrap="square" lIns="91425" tIns="91425" rIns="91425" bIns="91425" anchor="t" anchorCtr="0">
             <a:normAutofit/>
           </a:bodyPr>
           <a:lstStyle>
-            <a:lvl1pPr indent="-317500" lvl="0" marL="457200">
+            <a:lvl1pPr marL="457200" lvl="0" indent="-317500">
               <a:spcBef>
                 <a:spcPts val="0"/>
               </a:spcBef>
@@ -3101,7 +3197,7 @@
               <a:buChar char="●"/>
               <a:defRPr sz="1400"/>
             </a:lvl1pPr>
-            <a:lvl2pPr indent="-304800" lvl="1" marL="914400">
+            <a:lvl2pPr marL="914400" lvl="1" indent="-304800">
               <a:spcBef>
                 <a:spcPts val="0"/>
               </a:spcBef>
@@ -3112,7 +3208,7 @@
               <a:buChar char="○"/>
               <a:defRPr sz="1200"/>
             </a:lvl2pPr>
-            <a:lvl3pPr indent="-304800" lvl="2" marL="1371600">
+            <a:lvl3pPr marL="1371600" lvl="2" indent="-304800">
               <a:spcBef>
                 <a:spcPts val="0"/>
               </a:spcBef>
@@ -3123,7 +3219,7 @@
               <a:buChar char="■"/>
               <a:defRPr sz="1200"/>
             </a:lvl3pPr>
-            <a:lvl4pPr indent="-304800" lvl="3" marL="1828800">
+            <a:lvl4pPr marL="1828800" lvl="3" indent="-304800">
               <a:spcBef>
                 <a:spcPts val="0"/>
               </a:spcBef>
@@ -3134,7 +3230,7 @@
               <a:buChar char="●"/>
               <a:defRPr sz="1200"/>
             </a:lvl4pPr>
-            <a:lvl5pPr indent="-304800" lvl="4" marL="2286000">
+            <a:lvl5pPr marL="2286000" lvl="4" indent="-304800">
               <a:spcBef>
                 <a:spcPts val="0"/>
               </a:spcBef>
@@ -3145,7 +3241,7 @@
               <a:buChar char="○"/>
               <a:defRPr sz="1200"/>
             </a:lvl5pPr>
-            <a:lvl6pPr indent="-304800" lvl="5" marL="2743200">
+            <a:lvl6pPr marL="2743200" lvl="5" indent="-304800">
               <a:spcBef>
                 <a:spcPts val="0"/>
               </a:spcBef>
@@ -3156,7 +3252,7 @@
               <a:buChar char="■"/>
               <a:defRPr sz="1200"/>
             </a:lvl6pPr>
-            <a:lvl7pPr indent="-304800" lvl="6" marL="3200400">
+            <a:lvl7pPr marL="3200400" lvl="6" indent="-304800">
               <a:spcBef>
                 <a:spcPts val="0"/>
               </a:spcBef>
@@ -3167,7 +3263,7 @@
               <a:buChar char="●"/>
               <a:defRPr sz="1200"/>
             </a:lvl7pPr>
-            <a:lvl8pPr indent="-304800" lvl="7" marL="3657600">
+            <a:lvl8pPr marL="3657600" lvl="7" indent="-304800">
               <a:spcBef>
                 <a:spcPts val="0"/>
               </a:spcBef>
@@ -3178,7 +3274,7 @@
               <a:buChar char="○"/>
               <a:defRPr sz="1200"/>
             </a:lvl8pPr>
-            <a:lvl9pPr indent="-304800" lvl="8" marL="4114800">
+            <a:lvl9pPr marL="4114800" lvl="8" indent="-304800">
               <a:spcBef>
                 <a:spcPts val="0"/>
               </a:spcBef>
@@ -3190,15 +3286,19 @@
               <a:defRPr sz="1200"/>
             </a:lvl9pPr>
           </a:lstStyle>
-          <a:p/>
+          <a:p>
+            <a:endParaRPr/>
+          </a:p>
         </p:txBody>
       </p:sp>
       <p:sp>
         <p:nvSpPr>
           <p:cNvPr id="24" name="Google Shape;24;p5"/>
-          <p:cNvSpPr txBox="1"/>
+          <p:cNvSpPr txBox="1">
+            <a:spLocks noGrp="1"/>
+          </p:cNvSpPr>
           <p:nvPr>
-            <p:ph idx="12" type="sldNum"/>
+            <p:ph type="sldNum" idx="12"/>
           </p:nvPr>
         </p:nvSpPr>
         <p:spPr>
@@ -3211,7 +3311,7 @@
           </a:prstGeom>
         </p:spPr>
         <p:txBody>
-          <a:bodyPr anchorCtr="0" anchor="ctr" bIns="91425" lIns="91425" spcFirstLastPara="1" rIns="91425" wrap="square" tIns="91425">
+          <a:bodyPr spcFirstLastPara="1" wrap="square" lIns="91425" tIns="91425" rIns="91425" bIns="91425" anchor="ctr" anchorCtr="0">
             <a:normAutofit/>
           </a:bodyPr>
           <a:lstStyle>
@@ -3253,7 +3353,7 @@
             </a:lvl9pPr>
           </a:lstStyle>
           <a:p>
-            <a:pPr indent="0" lvl="0" marL="0" rtl="0" algn="r">
+            <a:pPr marL="0" lvl="0" indent="0" algn="r" rtl="0">
               <a:spcBef>
                 <a:spcPts val="0"/>
               </a:spcBef>
@@ -3279,11 +3379,11 @@
 </file>
 
 <file path=ppt/slideLayouts/slideLayout5.xml><?xml version="1.0" encoding="utf-8"?>
-<p:sldLayout xmlns:a="http://schemas.openxmlformats.org/drawingml/2006/main" xmlns:r="http://schemas.openxmlformats.org/officeDocument/2006/relationships" xmlns:mc="http://schemas.openxmlformats.org/markup-compatibility/2006" xmlns:mv="urn:schemas-microsoft-com:mac:vml" xmlns:p="http://schemas.openxmlformats.org/presentationml/2006/main" xmlns:c="http://schemas.openxmlformats.org/drawingml/2006/chart" xmlns:dgm="http://schemas.openxmlformats.org/drawingml/2006/diagram" xmlns:o="urn:schemas-microsoft-com:office:office" xmlns:v="urn:schemas-microsoft-com:vml" xmlns:pvml="urn:schemas-microsoft-com:office:powerpoint" xmlns:com="http://schemas.openxmlformats.org/drawingml/2006/compatibility" xmlns:p14="http://schemas.microsoft.com/office/powerpoint/2010/main" xmlns:p15="http://schemas.microsoft.com/office/powerpoint/2012/main" xmlns:ahyp="http://schemas.microsoft.com/office/drawing/2018/hyperlinkcolor" matchingName="Title only" type="titleOnly">
+<p:sldLayout xmlns:a="http://schemas.openxmlformats.org/drawingml/2006/main" xmlns:r="http://schemas.openxmlformats.org/officeDocument/2006/relationships" xmlns:p="http://schemas.openxmlformats.org/presentationml/2006/main" matchingName="Title only" type="titleOnly">
   <p:cSld name="TITLE_ONLY">
     <p:spTree>
       <p:nvGrpSpPr>
-        <p:cNvPr id="25" name="Shape 25"/>
+        <p:cNvPr id="1" name="Shape 25"/>
         <p:cNvGrpSpPr/>
         <p:nvPr/>
       </p:nvGrpSpPr>
@@ -3298,7 +3398,9 @@
       <p:sp>
         <p:nvSpPr>
           <p:cNvPr id="26" name="Google Shape;26;p6"/>
-          <p:cNvSpPr txBox="1"/>
+          <p:cNvSpPr txBox="1">
+            <a:spLocks noGrp="1"/>
+          </p:cNvSpPr>
           <p:nvPr>
             <p:ph type="title"/>
           </p:nvPr>
@@ -3313,7 +3415,7 @@
           </a:prstGeom>
         </p:spPr>
         <p:txBody>
-          <a:bodyPr anchorCtr="0" anchor="t" bIns="91425" lIns="91425" spcFirstLastPara="1" rIns="91425" wrap="square" tIns="91425">
+          <a:bodyPr spcFirstLastPara="1" wrap="square" lIns="91425" tIns="91425" rIns="91425" bIns="91425" anchor="t" anchorCtr="0">
             <a:normAutofit/>
           </a:bodyPr>
           <a:lstStyle>
@@ -3417,15 +3519,19 @@
               <a:defRPr/>
             </a:lvl9pPr>
           </a:lstStyle>
-          <a:p/>
+          <a:p>
+            <a:endParaRPr/>
+          </a:p>
         </p:txBody>
       </p:sp>
       <p:sp>
         <p:nvSpPr>
           <p:cNvPr id="27" name="Google Shape;27;p6"/>
-          <p:cNvSpPr txBox="1"/>
+          <p:cNvSpPr txBox="1">
+            <a:spLocks noGrp="1"/>
+          </p:cNvSpPr>
           <p:nvPr>
-            <p:ph idx="12" type="sldNum"/>
+            <p:ph type="sldNum" idx="12"/>
           </p:nvPr>
         </p:nvSpPr>
         <p:spPr>
@@ -3438,7 +3544,7 @@
           </a:prstGeom>
         </p:spPr>
         <p:txBody>
-          <a:bodyPr anchorCtr="0" anchor="ctr" bIns="91425" lIns="91425" spcFirstLastPara="1" rIns="91425" wrap="square" tIns="91425">
+          <a:bodyPr spcFirstLastPara="1" wrap="square" lIns="91425" tIns="91425" rIns="91425" bIns="91425" anchor="ctr" anchorCtr="0">
             <a:normAutofit/>
           </a:bodyPr>
           <a:lstStyle>
@@ -3480,7 +3586,7 @@
             </a:lvl9pPr>
           </a:lstStyle>
           <a:p>
-            <a:pPr indent="0" lvl="0" marL="0" rtl="0" algn="r">
+            <a:pPr marL="0" lvl="0" indent="0" algn="r" rtl="0">
               <a:spcBef>
                 <a:spcPts val="0"/>
               </a:spcBef>
@@ -3506,11 +3612,11 @@
 </file>
 
 <file path=ppt/slideLayouts/slideLayout6.xml><?xml version="1.0" encoding="utf-8"?>
-<p:sldLayout xmlns:a="http://schemas.openxmlformats.org/drawingml/2006/main" xmlns:r="http://schemas.openxmlformats.org/officeDocument/2006/relationships" xmlns:mc="http://schemas.openxmlformats.org/markup-compatibility/2006" xmlns:mv="urn:schemas-microsoft-com:mac:vml" xmlns:p="http://schemas.openxmlformats.org/presentationml/2006/main" xmlns:c="http://schemas.openxmlformats.org/drawingml/2006/chart" xmlns:dgm="http://schemas.openxmlformats.org/drawingml/2006/diagram" xmlns:o="urn:schemas-microsoft-com:office:office" xmlns:v="urn:schemas-microsoft-com:vml" xmlns:pvml="urn:schemas-microsoft-com:office:powerpoint" xmlns:com="http://schemas.openxmlformats.org/drawingml/2006/compatibility" xmlns:p14="http://schemas.microsoft.com/office/powerpoint/2010/main" xmlns:p15="http://schemas.microsoft.com/office/powerpoint/2012/main" xmlns:ahyp="http://schemas.microsoft.com/office/drawing/2018/hyperlinkcolor" matchingName="One column text">
+<p:sldLayout xmlns:a="http://schemas.openxmlformats.org/drawingml/2006/main" xmlns:r="http://schemas.openxmlformats.org/officeDocument/2006/relationships" xmlns:p="http://schemas.openxmlformats.org/presentationml/2006/main" matchingName="One column text">
   <p:cSld name="ONE_COLUMN_TEXT">
     <p:spTree>
       <p:nvGrpSpPr>
-        <p:cNvPr id="28" name="Shape 28"/>
+        <p:cNvPr id="1" name="Shape 28"/>
         <p:cNvGrpSpPr/>
         <p:nvPr/>
       </p:nvGrpSpPr>
@@ -3525,7 +3631,9 @@
       <p:sp>
         <p:nvSpPr>
           <p:cNvPr id="29" name="Google Shape;29;p7"/>
-          <p:cNvSpPr txBox="1"/>
+          <p:cNvSpPr txBox="1">
+            <a:spLocks noGrp="1"/>
+          </p:cNvSpPr>
           <p:nvPr>
             <p:ph type="title"/>
           </p:nvPr>
@@ -3540,7 +3648,7 @@
           </a:prstGeom>
         </p:spPr>
         <p:txBody>
-          <a:bodyPr anchorCtr="0" anchor="b" bIns="91425" lIns="91425" spcFirstLastPara="1" rIns="91425" wrap="square" tIns="91425">
+          <a:bodyPr spcFirstLastPara="1" wrap="square" lIns="91425" tIns="91425" rIns="91425" bIns="91425" anchor="b" anchorCtr="0">
             <a:normAutofit/>
           </a:bodyPr>
           <a:lstStyle>
@@ -3644,15 +3752,19 @@
               <a:defRPr sz="2400"/>
             </a:lvl9pPr>
           </a:lstStyle>
-          <a:p/>
+          <a:p>
+            <a:endParaRPr/>
+          </a:p>
         </p:txBody>
       </p:sp>
       <p:sp>
         <p:nvSpPr>
           <p:cNvPr id="30" name="Google Shape;30;p7"/>
-          <p:cNvSpPr txBox="1"/>
+          <p:cNvSpPr txBox="1">
+            <a:spLocks noGrp="1"/>
+          </p:cNvSpPr>
           <p:nvPr>
-            <p:ph idx="1" type="body"/>
+            <p:ph type="body" idx="1"/>
           </p:nvPr>
         </p:nvSpPr>
         <p:spPr>
@@ -3665,11 +3777,11 @@
           </a:prstGeom>
         </p:spPr>
         <p:txBody>
-          <a:bodyPr anchorCtr="0" anchor="t" bIns="91425" lIns="91425" spcFirstLastPara="1" rIns="91425" wrap="square" tIns="91425">
+          <a:bodyPr spcFirstLastPara="1" wrap="square" lIns="91425" tIns="91425" rIns="91425" bIns="91425" anchor="t" anchorCtr="0">
             <a:normAutofit/>
           </a:bodyPr>
           <a:lstStyle>
-            <a:lvl1pPr indent="-304800" lvl="0" marL="457200">
+            <a:lvl1pPr marL="457200" lvl="0" indent="-304800">
               <a:spcBef>
                 <a:spcPts val="0"/>
               </a:spcBef>
@@ -3680,7 +3792,7 @@
               <a:buChar char="●"/>
               <a:defRPr sz="1200"/>
             </a:lvl1pPr>
-            <a:lvl2pPr indent="-304800" lvl="1" marL="914400">
+            <a:lvl2pPr marL="914400" lvl="1" indent="-304800">
               <a:spcBef>
                 <a:spcPts val="0"/>
               </a:spcBef>
@@ -3691,7 +3803,7 @@
               <a:buChar char="○"/>
               <a:defRPr sz="1200"/>
             </a:lvl2pPr>
-            <a:lvl3pPr indent="-304800" lvl="2" marL="1371600">
+            <a:lvl3pPr marL="1371600" lvl="2" indent="-304800">
               <a:spcBef>
                 <a:spcPts val="0"/>
               </a:spcBef>
@@ -3702,7 +3814,7 @@
               <a:buChar char="■"/>
               <a:defRPr sz="1200"/>
             </a:lvl3pPr>
-            <a:lvl4pPr indent="-304800" lvl="3" marL="1828800">
+            <a:lvl4pPr marL="1828800" lvl="3" indent="-304800">
               <a:spcBef>
                 <a:spcPts val="0"/>
               </a:spcBef>
@@ -3713,7 +3825,7 @@
               <a:buChar char="●"/>
               <a:defRPr sz="1200"/>
             </a:lvl4pPr>
-            <a:lvl5pPr indent="-304800" lvl="4" marL="2286000">
+            <a:lvl5pPr marL="2286000" lvl="4" indent="-304800">
               <a:spcBef>
                 <a:spcPts val="0"/>
               </a:spcBef>
@@ -3724,7 +3836,7 @@
               <a:buChar char="○"/>
               <a:defRPr sz="1200"/>
             </a:lvl5pPr>
-            <a:lvl6pPr indent="-304800" lvl="5" marL="2743200">
+            <a:lvl6pPr marL="2743200" lvl="5" indent="-304800">
               <a:spcBef>
                 <a:spcPts val="0"/>
               </a:spcBef>
@@ -3735,7 +3847,7 @@
               <a:buChar char="■"/>
               <a:defRPr sz="1200"/>
             </a:lvl6pPr>
-            <a:lvl7pPr indent="-304800" lvl="6" marL="3200400">
+            <a:lvl7pPr marL="3200400" lvl="6" indent="-304800">
               <a:spcBef>
                 <a:spcPts val="0"/>
               </a:spcBef>
@@ -3746,7 +3858,7 @@
               <a:buChar char="●"/>
               <a:defRPr sz="1200"/>
             </a:lvl7pPr>
-            <a:lvl8pPr indent="-304800" lvl="7" marL="3657600">
+            <a:lvl8pPr marL="3657600" lvl="7" indent="-304800">
               <a:spcBef>
                 <a:spcPts val="0"/>
               </a:spcBef>
@@ -3757,7 +3869,7 @@
               <a:buChar char="○"/>
               <a:defRPr sz="1200"/>
             </a:lvl8pPr>
-            <a:lvl9pPr indent="-304800" lvl="8" marL="4114800">
+            <a:lvl9pPr marL="4114800" lvl="8" indent="-304800">
               <a:spcBef>
                 <a:spcPts val="0"/>
               </a:spcBef>
@@ -3769,15 +3881,19 @@
               <a:defRPr sz="1200"/>
             </a:lvl9pPr>
           </a:lstStyle>
-          <a:p/>
+          <a:p>
+            <a:endParaRPr/>
+          </a:p>
         </p:txBody>
       </p:sp>
       <p:sp>
         <p:nvSpPr>
           <p:cNvPr id="31" name="Google Shape;31;p7"/>
-          <p:cNvSpPr txBox="1"/>
+          <p:cNvSpPr txBox="1">
+            <a:spLocks noGrp="1"/>
+          </p:cNvSpPr>
           <p:nvPr>
-            <p:ph idx="12" type="sldNum"/>
+            <p:ph type="sldNum" idx="12"/>
           </p:nvPr>
         </p:nvSpPr>
         <p:spPr>
@@ -3790,7 +3906,7 @@
           </a:prstGeom>
         </p:spPr>
         <p:txBody>
-          <a:bodyPr anchorCtr="0" anchor="ctr" bIns="91425" lIns="91425" spcFirstLastPara="1" rIns="91425" wrap="square" tIns="91425">
+          <a:bodyPr spcFirstLastPara="1" wrap="square" lIns="91425" tIns="91425" rIns="91425" bIns="91425" anchor="ctr" anchorCtr="0">
             <a:normAutofit/>
           </a:bodyPr>
           <a:lstStyle>
@@ -3832,7 +3948,7 @@
             </a:lvl9pPr>
           </a:lstStyle>
           <a:p>
-            <a:pPr indent="0" lvl="0" marL="0" rtl="0" algn="r">
+            <a:pPr marL="0" lvl="0" indent="0" algn="r" rtl="0">
               <a:spcBef>
                 <a:spcPts val="0"/>
               </a:spcBef>
@@ -3858,11 +3974,11 @@
 </file>
 
 <file path=ppt/slideLayouts/slideLayout7.xml><?xml version="1.0" encoding="utf-8"?>
-<p:sldLayout xmlns:a="http://schemas.openxmlformats.org/drawingml/2006/main" xmlns:r="http://schemas.openxmlformats.org/officeDocument/2006/relationships" xmlns:mc="http://schemas.openxmlformats.org/markup-compatibility/2006" xmlns:mv="urn:schemas-microsoft-com:mac:vml" xmlns:p="http://schemas.openxmlformats.org/presentationml/2006/main" xmlns:c="http://schemas.openxmlformats.org/drawingml/2006/chart" xmlns:dgm="http://schemas.openxmlformats.org/drawingml/2006/diagram" xmlns:o="urn:schemas-microsoft-com:office:office" xmlns:v="urn:schemas-microsoft-com:vml" xmlns:pvml="urn:schemas-microsoft-com:office:powerpoint" xmlns:com="http://schemas.openxmlformats.org/drawingml/2006/compatibility" xmlns:p14="http://schemas.microsoft.com/office/powerpoint/2010/main" xmlns:p15="http://schemas.microsoft.com/office/powerpoint/2012/main" xmlns:ahyp="http://schemas.microsoft.com/office/drawing/2018/hyperlinkcolor" matchingName="Main point">
+<p:sldLayout xmlns:a="http://schemas.openxmlformats.org/drawingml/2006/main" xmlns:r="http://schemas.openxmlformats.org/officeDocument/2006/relationships" xmlns:p="http://schemas.openxmlformats.org/presentationml/2006/main" matchingName="Main point">
   <p:cSld name="MAIN_POINT">
     <p:spTree>
       <p:nvGrpSpPr>
-        <p:cNvPr id="32" name="Shape 32"/>
+        <p:cNvPr id="1" name="Shape 32"/>
         <p:cNvGrpSpPr/>
         <p:nvPr/>
       </p:nvGrpSpPr>
@@ -3877,7 +3993,9 @@
       <p:sp>
         <p:nvSpPr>
           <p:cNvPr id="33" name="Google Shape;33;p8"/>
-          <p:cNvSpPr txBox="1"/>
+          <p:cNvSpPr txBox="1">
+            <a:spLocks noGrp="1"/>
+          </p:cNvSpPr>
           <p:nvPr>
             <p:ph type="title"/>
           </p:nvPr>
@@ -3892,7 +4010,7 @@
           </a:prstGeom>
         </p:spPr>
         <p:txBody>
-          <a:bodyPr anchorCtr="0" anchor="ctr" bIns="91425" lIns="91425" spcFirstLastPara="1" rIns="91425" wrap="square" tIns="91425">
+          <a:bodyPr spcFirstLastPara="1" wrap="square" lIns="91425" tIns="91425" rIns="91425" bIns="91425" anchor="ctr" anchorCtr="0">
             <a:normAutofit/>
           </a:bodyPr>
           <a:lstStyle>
@@ -3996,15 +4114,19 @@
               <a:defRPr sz="4800"/>
             </a:lvl9pPr>
           </a:lstStyle>
-          <a:p/>
+          <a:p>
+            <a:endParaRPr/>
+          </a:p>
         </p:txBody>
       </p:sp>
       <p:sp>
         <p:nvSpPr>
           <p:cNvPr id="34" name="Google Shape;34;p8"/>
-          <p:cNvSpPr txBox="1"/>
+          <p:cNvSpPr txBox="1">
+            <a:spLocks noGrp="1"/>
+          </p:cNvSpPr>
           <p:nvPr>
-            <p:ph idx="12" type="sldNum"/>
+            <p:ph type="sldNum" idx="12"/>
           </p:nvPr>
         </p:nvSpPr>
         <p:spPr>
@@ -4017,7 +4139,7 @@
           </a:prstGeom>
         </p:spPr>
         <p:txBody>
-          <a:bodyPr anchorCtr="0" anchor="ctr" bIns="91425" lIns="91425" spcFirstLastPara="1" rIns="91425" wrap="square" tIns="91425">
+          <a:bodyPr spcFirstLastPara="1" wrap="square" lIns="91425" tIns="91425" rIns="91425" bIns="91425" anchor="ctr" anchorCtr="0">
             <a:normAutofit/>
           </a:bodyPr>
           <a:lstStyle>
@@ -4059,7 +4181,7 @@
             </a:lvl9pPr>
           </a:lstStyle>
           <a:p>
-            <a:pPr indent="0" lvl="0" marL="0" rtl="0" algn="r">
+            <a:pPr marL="0" lvl="0" indent="0" algn="r" rtl="0">
               <a:spcBef>
                 <a:spcPts val="0"/>
               </a:spcBef>
@@ -4085,11 +4207,11 @@
 </file>
 
 <file path=ppt/slideLayouts/slideLayout8.xml><?xml version="1.0" encoding="utf-8"?>
-<p:sldLayout xmlns:a="http://schemas.openxmlformats.org/drawingml/2006/main" xmlns:r="http://schemas.openxmlformats.org/officeDocument/2006/relationships" xmlns:mc="http://schemas.openxmlformats.org/markup-compatibility/2006" xmlns:mv="urn:schemas-microsoft-com:mac:vml" xmlns:p="http://schemas.openxmlformats.org/presentationml/2006/main" xmlns:c="http://schemas.openxmlformats.org/drawingml/2006/chart" xmlns:dgm="http://schemas.openxmlformats.org/drawingml/2006/diagram" xmlns:o="urn:schemas-microsoft-com:office:office" xmlns:v="urn:schemas-microsoft-com:vml" xmlns:pvml="urn:schemas-microsoft-com:office:powerpoint" xmlns:com="http://schemas.openxmlformats.org/drawingml/2006/compatibility" xmlns:p14="http://schemas.microsoft.com/office/powerpoint/2010/main" xmlns:p15="http://schemas.microsoft.com/office/powerpoint/2012/main" xmlns:ahyp="http://schemas.microsoft.com/office/drawing/2018/hyperlinkcolor" matchingName="Section title and description">
+<p:sldLayout xmlns:a="http://schemas.openxmlformats.org/drawingml/2006/main" xmlns:r="http://schemas.openxmlformats.org/officeDocument/2006/relationships" xmlns:p="http://schemas.openxmlformats.org/presentationml/2006/main" matchingName="Section title and description">
   <p:cSld name="SECTION_TITLE_AND_DESCRIPTION">
     <p:spTree>
       <p:nvGrpSpPr>
-        <p:cNvPr id="35" name="Shape 35"/>
+        <p:cNvPr id="1" name="Shape 35"/>
         <p:cNvGrpSpPr/>
         <p:nvPr/>
       </p:nvGrpSpPr>
@@ -4123,12 +4245,12 @@
           </a:ln>
         </p:spPr>
         <p:txBody>
-          <a:bodyPr anchorCtr="0" anchor="ctr" bIns="91425" lIns="91425" spcFirstLastPara="1" rIns="91425" wrap="square" tIns="91425">
+          <a:bodyPr spcFirstLastPara="1" wrap="square" lIns="91425" tIns="91425" rIns="91425" bIns="91425" anchor="ctr" anchorCtr="0">
             <a:noAutofit/>
           </a:bodyPr>
           <a:lstStyle/>
           <a:p>
-            <a:pPr indent="0" lvl="0" marL="0" rtl="0" algn="l">
+            <a:pPr marL="0" lvl="0" indent="0" algn="l" rtl="0">
               <a:spcBef>
                 <a:spcPts val="0"/>
               </a:spcBef>
@@ -4137,9 +4259,6 @@
               </a:spcAft>
               <a:buNone/>
             </a:pPr>
-            <a:r>
-              <a:t/>
-            </a:r>
             <a:endParaRPr/>
           </a:p>
         </p:txBody>
@@ -4147,7 +4266,9 @@
       <p:sp>
         <p:nvSpPr>
           <p:cNvPr id="37" name="Google Shape;37;p9"/>
-          <p:cNvSpPr txBox="1"/>
+          <p:cNvSpPr txBox="1">
+            <a:spLocks noGrp="1"/>
+          </p:cNvSpPr>
           <p:nvPr>
             <p:ph type="title"/>
           </p:nvPr>
@@ -4162,7 +4283,7 @@
           </a:prstGeom>
         </p:spPr>
         <p:txBody>
-          <a:bodyPr anchorCtr="0" anchor="b" bIns="91425" lIns="91425" spcFirstLastPara="1" rIns="91425" wrap="square" tIns="91425">
+          <a:bodyPr spcFirstLastPara="1" wrap="square" lIns="91425" tIns="91425" rIns="91425" bIns="91425" anchor="b" anchorCtr="0">
             <a:normAutofit/>
           </a:bodyPr>
           <a:lstStyle>
@@ -4266,15 +4387,19 @@
               <a:defRPr sz="4200"/>
             </a:lvl9pPr>
           </a:lstStyle>
-          <a:p/>
+          <a:p>
+            <a:endParaRPr/>
+          </a:p>
         </p:txBody>
       </p:sp>
       <p:sp>
         <p:nvSpPr>
           <p:cNvPr id="38" name="Google Shape;38;p9"/>
-          <p:cNvSpPr txBox="1"/>
+          <p:cNvSpPr txBox="1">
+            <a:spLocks noGrp="1"/>
+          </p:cNvSpPr>
           <p:nvPr>
-            <p:ph idx="1" type="subTitle"/>
+            <p:ph type="subTitle" idx="1"/>
           </p:nvPr>
         </p:nvSpPr>
         <p:spPr>
@@ -4287,7 +4412,7 @@
           </a:prstGeom>
         </p:spPr>
         <p:txBody>
-          <a:bodyPr anchorCtr="0" anchor="t" bIns="91425" lIns="91425" spcFirstLastPara="1" rIns="91425" wrap="square" tIns="91425">
+          <a:bodyPr spcFirstLastPara="1" wrap="square" lIns="91425" tIns="91425" rIns="91425" bIns="91425" anchor="t" anchorCtr="0">
             <a:normAutofit/>
           </a:bodyPr>
           <a:lstStyle>
@@ -4418,15 +4543,19 @@
               <a:defRPr sz="2100"/>
             </a:lvl9pPr>
           </a:lstStyle>
-          <a:p/>
+          <a:p>
+            <a:endParaRPr/>
+          </a:p>
         </p:txBody>
       </p:sp>
       <p:sp>
         <p:nvSpPr>
           <p:cNvPr id="39" name="Google Shape;39;p9"/>
-          <p:cNvSpPr txBox="1"/>
+          <p:cNvSpPr txBox="1">
+            <a:spLocks noGrp="1"/>
+          </p:cNvSpPr>
           <p:nvPr>
-            <p:ph idx="2" type="body"/>
+            <p:ph type="body" idx="2"/>
           </p:nvPr>
         </p:nvSpPr>
         <p:spPr>
@@ -4439,11 +4568,11 @@
           </a:prstGeom>
         </p:spPr>
         <p:txBody>
-          <a:bodyPr anchorCtr="0" anchor="ctr" bIns="91425" lIns="91425" spcFirstLastPara="1" rIns="91425" wrap="square" tIns="91425">
+          <a:bodyPr spcFirstLastPara="1" wrap="square" lIns="91425" tIns="91425" rIns="91425" bIns="91425" anchor="ctr" anchorCtr="0">
             <a:normAutofit/>
           </a:bodyPr>
           <a:lstStyle>
-            <a:lvl1pPr indent="-342900" lvl="0" marL="457200">
+            <a:lvl1pPr marL="457200" lvl="0" indent="-342900">
               <a:spcBef>
                 <a:spcPts val="0"/>
               </a:spcBef>
@@ -4461,7 +4590,7 @@
                 </a:solidFill>
               </a:defRPr>
             </a:lvl1pPr>
-            <a:lvl2pPr indent="-317500" lvl="1" marL="914400">
+            <a:lvl2pPr marL="914400" lvl="1" indent="-317500">
               <a:spcBef>
                 <a:spcPts val="0"/>
               </a:spcBef>
@@ -4479,7 +4608,7 @@
                 </a:solidFill>
               </a:defRPr>
             </a:lvl2pPr>
-            <a:lvl3pPr indent="-317500" lvl="2" marL="1371600">
+            <a:lvl3pPr marL="1371600" lvl="2" indent="-317500">
               <a:spcBef>
                 <a:spcPts val="0"/>
               </a:spcBef>
@@ -4497,7 +4626,7 @@
                 </a:solidFill>
               </a:defRPr>
             </a:lvl3pPr>
-            <a:lvl4pPr indent="-317500" lvl="3" marL="1828800">
+            <a:lvl4pPr marL="1828800" lvl="3" indent="-317500">
               <a:spcBef>
                 <a:spcPts val="0"/>
               </a:spcBef>
@@ -4515,7 +4644,7 @@
                 </a:solidFill>
               </a:defRPr>
             </a:lvl4pPr>
-            <a:lvl5pPr indent="-317500" lvl="4" marL="2286000">
+            <a:lvl5pPr marL="2286000" lvl="4" indent="-317500">
               <a:spcBef>
                 <a:spcPts val="0"/>
               </a:spcBef>
@@ -4533,7 +4662,7 @@
                 </a:solidFill>
               </a:defRPr>
             </a:lvl5pPr>
-            <a:lvl6pPr indent="-317500" lvl="5" marL="2743200">
+            <a:lvl6pPr marL="2743200" lvl="5" indent="-317500">
               <a:spcBef>
                 <a:spcPts val="0"/>
               </a:spcBef>
@@ -4551,7 +4680,7 @@
                 </a:solidFill>
               </a:defRPr>
             </a:lvl6pPr>
-            <a:lvl7pPr indent="-317500" lvl="6" marL="3200400">
+            <a:lvl7pPr marL="3200400" lvl="6" indent="-317500">
               <a:spcBef>
                 <a:spcPts val="0"/>
               </a:spcBef>
@@ -4569,7 +4698,7 @@
                 </a:solidFill>
               </a:defRPr>
             </a:lvl7pPr>
-            <a:lvl8pPr indent="-317500" lvl="7" marL="3657600">
+            <a:lvl8pPr marL="3657600" lvl="7" indent="-317500">
               <a:spcBef>
                 <a:spcPts val="0"/>
               </a:spcBef>
@@ -4587,7 +4716,7 @@
                 </a:solidFill>
               </a:defRPr>
             </a:lvl8pPr>
-            <a:lvl9pPr indent="-317500" lvl="8" marL="4114800">
+            <a:lvl9pPr marL="4114800" lvl="8" indent="-317500">
               <a:spcBef>
                 <a:spcPts val="0"/>
               </a:spcBef>
@@ -4606,15 +4735,19 @@
               </a:defRPr>
             </a:lvl9pPr>
           </a:lstStyle>
-          <a:p/>
+          <a:p>
+            <a:endParaRPr/>
+          </a:p>
         </p:txBody>
       </p:sp>
       <p:sp>
         <p:nvSpPr>
           <p:cNvPr id="40" name="Google Shape;40;p9"/>
-          <p:cNvSpPr txBox="1"/>
+          <p:cNvSpPr txBox="1">
+            <a:spLocks noGrp="1"/>
+          </p:cNvSpPr>
           <p:nvPr>
-            <p:ph idx="12" type="sldNum"/>
+            <p:ph type="sldNum" idx="12"/>
           </p:nvPr>
         </p:nvSpPr>
         <p:spPr>
@@ -4627,7 +4760,7 @@
           </a:prstGeom>
         </p:spPr>
         <p:txBody>
-          <a:bodyPr anchorCtr="0" anchor="ctr" bIns="91425" lIns="91425" spcFirstLastPara="1" rIns="91425" wrap="square" tIns="91425">
+          <a:bodyPr spcFirstLastPara="1" wrap="square" lIns="91425" tIns="91425" rIns="91425" bIns="91425" anchor="ctr" anchorCtr="0">
             <a:normAutofit/>
           </a:bodyPr>
           <a:lstStyle>
@@ -4669,7 +4802,7 @@
             </a:lvl9pPr>
           </a:lstStyle>
           <a:p>
-            <a:pPr indent="0" lvl="0" marL="0" rtl="0" algn="r">
+            <a:pPr marL="0" lvl="0" indent="0" algn="r" rtl="0">
               <a:spcBef>
                 <a:spcPts val="0"/>
               </a:spcBef>
@@ -4695,11 +4828,11 @@
 </file>
 
 <file path=ppt/slideLayouts/slideLayout9.xml><?xml version="1.0" encoding="utf-8"?>
-<p:sldLayout xmlns:a="http://schemas.openxmlformats.org/drawingml/2006/main" xmlns:r="http://schemas.openxmlformats.org/officeDocument/2006/relationships" xmlns:mc="http://schemas.openxmlformats.org/markup-compatibility/2006" xmlns:mv="urn:schemas-microsoft-com:mac:vml" xmlns:p="http://schemas.openxmlformats.org/presentationml/2006/main" xmlns:c="http://schemas.openxmlformats.org/drawingml/2006/chart" xmlns:dgm="http://schemas.openxmlformats.org/drawingml/2006/diagram" xmlns:o="urn:schemas-microsoft-com:office:office" xmlns:v="urn:schemas-microsoft-com:vml" xmlns:pvml="urn:schemas-microsoft-com:office:powerpoint" xmlns:com="http://schemas.openxmlformats.org/drawingml/2006/compatibility" xmlns:p14="http://schemas.microsoft.com/office/powerpoint/2010/main" xmlns:p15="http://schemas.microsoft.com/office/powerpoint/2012/main" xmlns:ahyp="http://schemas.microsoft.com/office/drawing/2018/hyperlinkcolor" matchingName="Caption">
+<p:sldLayout xmlns:a="http://schemas.openxmlformats.org/drawingml/2006/main" xmlns:r="http://schemas.openxmlformats.org/officeDocument/2006/relationships" xmlns:p="http://schemas.openxmlformats.org/presentationml/2006/main" matchingName="Caption">
   <p:cSld name="CAPTION_ONLY">
     <p:spTree>
       <p:nvGrpSpPr>
-        <p:cNvPr id="41" name="Shape 41"/>
+        <p:cNvPr id="1" name="Shape 41"/>
         <p:cNvGrpSpPr/>
         <p:nvPr/>
       </p:nvGrpSpPr>
@@ -4714,9 +4847,11 @@
       <p:sp>
         <p:nvSpPr>
           <p:cNvPr id="42" name="Google Shape;42;p10"/>
-          <p:cNvSpPr txBox="1"/>
+          <p:cNvSpPr txBox="1">
+            <a:spLocks noGrp="1"/>
+          </p:cNvSpPr>
           <p:nvPr>
-            <p:ph idx="1" type="body"/>
+            <p:ph type="body" idx="1"/>
           </p:nvPr>
         </p:nvSpPr>
         <p:spPr>
@@ -4729,11 +4864,11 @@
           </a:prstGeom>
         </p:spPr>
         <p:txBody>
-          <a:bodyPr anchorCtr="0" anchor="ctr" bIns="91425" lIns="91425" spcFirstLastPara="1" rIns="91425" wrap="square" tIns="91425">
+          <a:bodyPr spcFirstLastPara="1" wrap="square" lIns="91425" tIns="91425" rIns="91425" bIns="91425" anchor="ctr" anchorCtr="0">
             <a:normAutofit/>
           </a:bodyPr>
           <a:lstStyle>
-            <a:lvl1pPr indent="-228600" lvl="0" marL="457200">
+            <a:lvl1pPr marL="457200" lvl="0" indent="-228600">
               <a:lnSpc>
                 <a:spcPct val="100000"/>
               </a:lnSpc>
@@ -4748,15 +4883,19 @@
               <a:defRPr/>
             </a:lvl1pPr>
           </a:lstStyle>
-          <a:p/>
+          <a:p>
+            <a:endParaRPr/>
+          </a:p>
         </p:txBody>
       </p:sp>
       <p:sp>
         <p:nvSpPr>
           <p:cNvPr id="43" name="Google Shape;43;p10"/>
-          <p:cNvSpPr txBox="1"/>
+          <p:cNvSpPr txBox="1">
+            <a:spLocks noGrp="1"/>
+          </p:cNvSpPr>
           <p:nvPr>
-            <p:ph idx="12" type="sldNum"/>
+            <p:ph type="sldNum" idx="12"/>
           </p:nvPr>
         </p:nvSpPr>
         <p:spPr>
@@ -4769,7 +4908,7 @@
           </a:prstGeom>
         </p:spPr>
         <p:txBody>
-          <a:bodyPr anchorCtr="0" anchor="ctr" bIns="91425" lIns="91425" spcFirstLastPara="1" rIns="91425" wrap="square" tIns="91425">
+          <a:bodyPr spcFirstLastPara="1" wrap="square" lIns="91425" tIns="91425" rIns="91425" bIns="91425" anchor="ctr" anchorCtr="0">
             <a:normAutofit/>
           </a:bodyPr>
           <a:lstStyle>
@@ -4811,7 +4950,7 @@
             </a:lvl9pPr>
           </a:lstStyle>
           <a:p>
-            <a:pPr indent="0" lvl="0" marL="0" rtl="0" algn="r">
+            <a:pPr marL="0" lvl="0" indent="0" algn="r" rtl="0">
               <a:spcBef>
                 <a:spcPts val="0"/>
               </a:spcBef>
@@ -4837,18 +4976,19 @@
 </file>
 
 <file path=ppt/slideMasters/slideMaster1.xml><?xml version="1.0" encoding="utf-8"?>
-<p:sldMaster xmlns:a="http://schemas.openxmlformats.org/drawingml/2006/main" xmlns:r="http://schemas.openxmlformats.org/officeDocument/2006/relationships" xmlns:mc="http://schemas.openxmlformats.org/markup-compatibility/2006" xmlns:mv="urn:schemas-microsoft-com:mac:vml" xmlns:p="http://schemas.openxmlformats.org/presentationml/2006/main" xmlns:c="http://schemas.openxmlformats.org/drawingml/2006/chart" xmlns:dgm="http://schemas.openxmlformats.org/drawingml/2006/diagram" xmlns:o="urn:schemas-microsoft-com:office:office" xmlns:v="urn:schemas-microsoft-com:vml" xmlns:pvml="urn:schemas-microsoft-com:office:powerpoint" xmlns:com="http://schemas.openxmlformats.org/drawingml/2006/compatibility" xmlns:p14="http://schemas.microsoft.com/office/powerpoint/2010/main" xmlns:p15="http://schemas.microsoft.com/office/powerpoint/2012/main" xmlns:ahyp="http://schemas.microsoft.com/office/drawing/2018/hyperlinkcolor">
+<p:sldMaster xmlns:a="http://schemas.openxmlformats.org/drawingml/2006/main" xmlns:r="http://schemas.openxmlformats.org/officeDocument/2006/relationships" xmlns:p="http://schemas.openxmlformats.org/presentationml/2006/main">
   <p:cSld name="simple-dark-2">
     <p:bg>
       <p:bgPr>
         <a:solidFill>
           <a:schemeClr val="lt1"/>
         </a:solidFill>
+        <a:effectLst/>
       </p:bgPr>
     </p:bg>
     <p:spTree>
       <p:nvGrpSpPr>
-        <p:cNvPr id="5" name="Shape 5"/>
+        <p:cNvPr id="1" name="Shape 5"/>
         <p:cNvGrpSpPr/>
         <p:nvPr/>
       </p:nvGrpSpPr>
@@ -4863,7 +5003,9 @@
       <p:sp>
         <p:nvSpPr>
           <p:cNvPr id="6" name="Google Shape;6;p1"/>
-          <p:cNvSpPr txBox="1"/>
+          <p:cNvSpPr txBox="1">
+            <a:spLocks noGrp="1"/>
+          </p:cNvSpPr>
           <p:nvPr>
             <p:ph type="title"/>
           </p:nvPr>
@@ -4882,7 +5024,7 @@
           </a:ln>
         </p:spPr>
         <p:txBody>
-          <a:bodyPr anchorCtr="0" anchor="t" bIns="91425" lIns="91425" spcFirstLastPara="1" rIns="91425" wrap="square" tIns="91425">
+          <a:bodyPr spcFirstLastPara="1" wrap="square" lIns="91425" tIns="91425" rIns="91425" bIns="91425" anchor="t" anchorCtr="0">
             <a:normAutofit/>
           </a:bodyPr>
           <a:lstStyle>
@@ -5049,15 +5191,19 @@
               </a:defRPr>
             </a:lvl9pPr>
           </a:lstStyle>
-          <a:p/>
+          <a:p>
+            <a:endParaRPr/>
+          </a:p>
         </p:txBody>
       </p:sp>
       <p:sp>
         <p:nvSpPr>
           <p:cNvPr id="7" name="Google Shape;7;p1"/>
-          <p:cNvSpPr txBox="1"/>
+          <p:cNvSpPr txBox="1">
+            <a:spLocks noGrp="1"/>
+          </p:cNvSpPr>
           <p:nvPr>
-            <p:ph idx="1" type="body"/>
+            <p:ph type="body" idx="1"/>
           </p:nvPr>
         </p:nvSpPr>
         <p:spPr>
@@ -5074,11 +5220,11 @@
           </a:ln>
         </p:spPr>
         <p:txBody>
-          <a:bodyPr anchorCtr="0" anchor="t" bIns="91425" lIns="91425" spcFirstLastPara="1" rIns="91425" wrap="square" tIns="91425">
+          <a:bodyPr spcFirstLastPara="1" wrap="square" lIns="91425" tIns="91425" rIns="91425" bIns="91425" anchor="t" anchorCtr="0">
             <a:normAutofit/>
           </a:bodyPr>
           <a:lstStyle>
-            <a:lvl1pPr indent="-342900" lvl="0" marL="457200">
+            <a:lvl1pPr marL="457200" lvl="0" indent="-342900">
               <a:lnSpc>
                 <a:spcPct val="115000"/>
               </a:lnSpc>
@@ -5099,7 +5245,7 @@
                 </a:solidFill>
               </a:defRPr>
             </a:lvl1pPr>
-            <a:lvl2pPr indent="-317500" lvl="1" marL="914400">
+            <a:lvl2pPr marL="914400" lvl="1" indent="-317500">
               <a:lnSpc>
                 <a:spcPct val="115000"/>
               </a:lnSpc>
@@ -5120,7 +5266,7 @@
                 </a:solidFill>
               </a:defRPr>
             </a:lvl2pPr>
-            <a:lvl3pPr indent="-317500" lvl="2" marL="1371600">
+            <a:lvl3pPr marL="1371600" lvl="2" indent="-317500">
               <a:lnSpc>
                 <a:spcPct val="115000"/>
               </a:lnSpc>
@@ -5141,7 +5287,7 @@
                 </a:solidFill>
               </a:defRPr>
             </a:lvl3pPr>
-            <a:lvl4pPr indent="-317500" lvl="3" marL="1828800">
+            <a:lvl4pPr marL="1828800" lvl="3" indent="-317500">
               <a:lnSpc>
                 <a:spcPct val="115000"/>
               </a:lnSpc>
@@ -5162,7 +5308,7 @@
                 </a:solidFill>
               </a:defRPr>
             </a:lvl4pPr>
-            <a:lvl5pPr indent="-317500" lvl="4" marL="2286000">
+            <a:lvl5pPr marL="2286000" lvl="4" indent="-317500">
               <a:lnSpc>
                 <a:spcPct val="115000"/>
               </a:lnSpc>
@@ -5183,7 +5329,7 @@
                 </a:solidFill>
               </a:defRPr>
             </a:lvl5pPr>
-            <a:lvl6pPr indent="-317500" lvl="5" marL="2743200">
+            <a:lvl6pPr marL="2743200" lvl="5" indent="-317500">
               <a:lnSpc>
                 <a:spcPct val="115000"/>
               </a:lnSpc>
@@ -5204,7 +5350,7 @@
                 </a:solidFill>
               </a:defRPr>
             </a:lvl6pPr>
-            <a:lvl7pPr indent="-317500" lvl="6" marL="3200400">
+            <a:lvl7pPr marL="3200400" lvl="6" indent="-317500">
               <a:lnSpc>
                 <a:spcPct val="115000"/>
               </a:lnSpc>
@@ -5225,7 +5371,7 @@
                 </a:solidFill>
               </a:defRPr>
             </a:lvl7pPr>
-            <a:lvl8pPr indent="-317500" lvl="7" marL="3657600">
+            <a:lvl8pPr marL="3657600" lvl="7" indent="-317500">
               <a:lnSpc>
                 <a:spcPct val="115000"/>
               </a:lnSpc>
@@ -5246,7 +5392,7 @@
                 </a:solidFill>
               </a:defRPr>
             </a:lvl8pPr>
-            <a:lvl9pPr indent="-317500" lvl="8" marL="4114800">
+            <a:lvl9pPr marL="4114800" lvl="8" indent="-317500">
               <a:lnSpc>
                 <a:spcPct val="115000"/>
               </a:lnSpc>
@@ -5268,15 +5414,19 @@
               </a:defRPr>
             </a:lvl9pPr>
           </a:lstStyle>
-          <a:p/>
+          <a:p>
+            <a:endParaRPr/>
+          </a:p>
         </p:txBody>
       </p:sp>
       <p:sp>
         <p:nvSpPr>
           <p:cNvPr id="8" name="Google Shape;8;p1"/>
-          <p:cNvSpPr txBox="1"/>
+          <p:cNvSpPr txBox="1">
+            <a:spLocks noGrp="1"/>
+          </p:cNvSpPr>
           <p:nvPr>
-            <p:ph idx="12" type="sldNum"/>
+            <p:ph type="sldNum" idx="12"/>
           </p:nvPr>
         </p:nvSpPr>
         <p:spPr>
@@ -5293,7 +5443,7 @@
           </a:ln>
         </p:spPr>
         <p:txBody>
-          <a:bodyPr anchorCtr="0" anchor="ctr" bIns="91425" lIns="91425" spcFirstLastPara="1" rIns="91425" wrap="square" tIns="91425">
+          <a:bodyPr spcFirstLastPara="1" wrap="square" lIns="91425" tIns="91425" rIns="91425" bIns="91425" anchor="ctr" anchorCtr="0">
             <a:normAutofit/>
           </a:bodyPr>
           <a:lstStyle>
@@ -5371,7 +5521,7 @@
             </a:lvl9pPr>
           </a:lstStyle>
           <a:p>
-            <a:pPr indent="0" lvl="0" marL="0" rtl="0" algn="r">
+            <a:pPr marL="0" lvl="0" indent="0" algn="r" rtl="0">
               <a:spcBef>
                 <a:spcPts val="0"/>
               </a:spcBef>
@@ -5390,7 +5540,7 @@
       </p:sp>
     </p:spTree>
   </p:cSld>
-  <p:clrMap accent1="accent1" accent2="accent2" accent3="accent3" accent4="accent4" accent5="accent5" accent6="accent6" bg1="lt1" bg2="dk2" tx1="dk1" tx2="lt2" folHlink="folHlink" hlink="hlink"/>
+  <p:clrMap bg1="lt1" tx1="dk1" bg2="dk2" tx2="lt2" accent1="accent1" accent2="accent2" accent3="accent3" accent4="accent4" accent5="accent5" accent6="accent6" hlink="hlink" folHlink="folHlink"/>
   <p:sldLayoutIdLst>
     <p:sldLayoutId id="2147483648" r:id="rId1"/>
     <p:sldLayoutId id="2147483649" r:id="rId2"/>
@@ -5404,10 +5554,10 @@
     <p:sldLayoutId id="2147483657" r:id="rId10"/>
     <p:sldLayoutId id="2147483658" r:id="rId11"/>
   </p:sldLayoutIdLst>
-  <p:hf dt="0" ftr="0" hdr="0" sldNum="0"/>
+  <p:hf sldNum="0" hdr="0" ftr="0" dt="0"/>
   <p:txStyles>
     <p:titleStyle>
-      <a:defPPr lvl="0" marR="0" rtl="0" algn="l">
+      <a:defPPr marR="0" lvl="0" algn="l" rtl="0">
         <a:lnSpc>
           <a:spcPct val="100000"/>
         </a:lnSpc>
@@ -5418,7 +5568,7 @@
           <a:spcPts val="0"/>
         </a:spcAft>
       </a:defPPr>
-      <a:lvl1pPr lvl="0" marR="0" rtl="0" algn="l">
+      <a:lvl1pPr marR="0" lvl="0" algn="l" rtl="0">
         <a:lnSpc>
           <a:spcPct val="100000"/>
         </a:lnSpc>
@@ -5432,7 +5582,7 @@
           <a:srgbClr val="000000"/>
         </a:buClr>
         <a:buFont typeface="Arial"/>
-        <a:defRPr b="0" i="0" sz="1400" u="none" cap="none" strike="noStrike">
+        <a:defRPr sz="1400" b="0" i="0" u="none" strike="noStrike" cap="none">
           <a:solidFill>
             <a:srgbClr val="000000"/>
           </a:solidFill>
@@ -5442,7 +5592,7 @@
           <a:sym typeface="Arial"/>
         </a:defRPr>
       </a:lvl1pPr>
-      <a:lvl2pPr lvl="1" marR="0" rtl="0" algn="l">
+      <a:lvl2pPr marR="0" lvl="1" algn="l" rtl="0">
         <a:lnSpc>
           <a:spcPct val="100000"/>
         </a:lnSpc>
@@ -5456,7 +5606,7 @@
           <a:srgbClr val="000000"/>
         </a:buClr>
         <a:buFont typeface="Arial"/>
-        <a:defRPr b="0" i="0" sz="1400" u="none" cap="none" strike="noStrike">
+        <a:defRPr sz="1400" b="0" i="0" u="none" strike="noStrike" cap="none">
           <a:solidFill>
             <a:srgbClr val="000000"/>
           </a:solidFill>
@@ -5466,7 +5616,7 @@
           <a:sym typeface="Arial"/>
         </a:defRPr>
       </a:lvl2pPr>
-      <a:lvl3pPr lvl="2" marR="0" rtl="0" algn="l">
+      <a:lvl3pPr marR="0" lvl="2" algn="l" rtl="0">
         <a:lnSpc>
           <a:spcPct val="100000"/>
         </a:lnSpc>
@@ -5480,7 +5630,7 @@
           <a:srgbClr val="000000"/>
         </a:buClr>
         <a:buFont typeface="Arial"/>
-        <a:defRPr b="0" i="0" sz="1400" u="none" cap="none" strike="noStrike">
+        <a:defRPr sz="1400" b="0" i="0" u="none" strike="noStrike" cap="none">
           <a:solidFill>
             <a:srgbClr val="000000"/>
           </a:solidFill>
@@ -5490,7 +5640,7 @@
           <a:sym typeface="Arial"/>
         </a:defRPr>
       </a:lvl3pPr>
-      <a:lvl4pPr lvl="3" marR="0" rtl="0" algn="l">
+      <a:lvl4pPr marR="0" lvl="3" algn="l" rtl="0">
         <a:lnSpc>
           <a:spcPct val="100000"/>
         </a:lnSpc>
@@ -5504,7 +5654,7 @@
           <a:srgbClr val="000000"/>
         </a:buClr>
         <a:buFont typeface="Arial"/>
-        <a:defRPr b="0" i="0" sz="1400" u="none" cap="none" strike="noStrike">
+        <a:defRPr sz="1400" b="0" i="0" u="none" strike="noStrike" cap="none">
           <a:solidFill>
             <a:srgbClr val="000000"/>
           </a:solidFill>
@@ -5514,7 +5664,7 @@
           <a:sym typeface="Arial"/>
         </a:defRPr>
       </a:lvl4pPr>
-      <a:lvl5pPr lvl="4" marR="0" rtl="0" algn="l">
+      <a:lvl5pPr marR="0" lvl="4" algn="l" rtl="0">
         <a:lnSpc>
           <a:spcPct val="100000"/>
         </a:lnSpc>
@@ -5528,7 +5678,7 @@
           <a:srgbClr val="000000"/>
         </a:buClr>
         <a:buFont typeface="Arial"/>
-        <a:defRPr b="0" i="0" sz="1400" u="none" cap="none" strike="noStrike">
+        <a:defRPr sz="1400" b="0" i="0" u="none" strike="noStrike" cap="none">
           <a:solidFill>
             <a:srgbClr val="000000"/>
           </a:solidFill>
@@ -5538,7 +5688,7 @@
           <a:sym typeface="Arial"/>
         </a:defRPr>
       </a:lvl5pPr>
-      <a:lvl6pPr lvl="5" marR="0" rtl="0" algn="l">
+      <a:lvl6pPr marR="0" lvl="5" algn="l" rtl="0">
         <a:lnSpc>
           <a:spcPct val="100000"/>
         </a:lnSpc>
@@ -5552,7 +5702,7 @@
           <a:srgbClr val="000000"/>
         </a:buClr>
         <a:buFont typeface="Arial"/>
-        <a:defRPr b="0" i="0" sz="1400" u="none" cap="none" strike="noStrike">
+        <a:defRPr sz="1400" b="0" i="0" u="none" strike="noStrike" cap="none">
           <a:solidFill>
             <a:srgbClr val="000000"/>
           </a:solidFill>
@@ -5562,7 +5712,7 @@
           <a:sym typeface="Arial"/>
         </a:defRPr>
       </a:lvl6pPr>
-      <a:lvl7pPr lvl="6" marR="0" rtl="0" algn="l">
+      <a:lvl7pPr marR="0" lvl="6" algn="l" rtl="0">
         <a:lnSpc>
           <a:spcPct val="100000"/>
         </a:lnSpc>
@@ -5576,7 +5726,7 @@
           <a:srgbClr val="000000"/>
         </a:buClr>
         <a:buFont typeface="Arial"/>
-        <a:defRPr b="0" i="0" sz="1400" u="none" cap="none" strike="noStrike">
+        <a:defRPr sz="1400" b="0" i="0" u="none" strike="noStrike" cap="none">
           <a:solidFill>
             <a:srgbClr val="000000"/>
           </a:solidFill>
@@ -5586,7 +5736,7 @@
           <a:sym typeface="Arial"/>
         </a:defRPr>
       </a:lvl7pPr>
-      <a:lvl8pPr lvl="7" marR="0" rtl="0" algn="l">
+      <a:lvl8pPr marR="0" lvl="7" algn="l" rtl="0">
         <a:lnSpc>
           <a:spcPct val="100000"/>
         </a:lnSpc>
@@ -5600,7 +5750,7 @@
           <a:srgbClr val="000000"/>
         </a:buClr>
         <a:buFont typeface="Arial"/>
-        <a:defRPr b="0" i="0" sz="1400" u="none" cap="none" strike="noStrike">
+        <a:defRPr sz="1400" b="0" i="0" u="none" strike="noStrike" cap="none">
           <a:solidFill>
             <a:srgbClr val="000000"/>
           </a:solidFill>
@@ -5610,7 +5760,7 @@
           <a:sym typeface="Arial"/>
         </a:defRPr>
       </a:lvl8pPr>
-      <a:lvl9pPr lvl="8" marR="0" rtl="0" algn="l">
+      <a:lvl9pPr marR="0" lvl="8" algn="l" rtl="0">
         <a:lnSpc>
           <a:spcPct val="100000"/>
         </a:lnSpc>
@@ -5624,7 +5774,7 @@
           <a:srgbClr val="000000"/>
         </a:buClr>
         <a:buFont typeface="Arial"/>
-        <a:defRPr b="0" i="0" sz="1400" u="none" cap="none" strike="noStrike">
+        <a:defRPr sz="1400" b="0" i="0" u="none" strike="noStrike" cap="none">
           <a:solidFill>
             <a:srgbClr val="000000"/>
           </a:solidFill>
@@ -5636,7 +5786,7 @@
       </a:lvl9pPr>
     </p:titleStyle>
     <p:bodyStyle>
-      <a:defPPr lvl="0" marR="0" rtl="0" algn="l">
+      <a:defPPr marR="0" lvl="0" algn="l" rtl="0">
         <a:lnSpc>
           <a:spcPct val="100000"/>
         </a:lnSpc>
@@ -5647,7 +5797,7 @@
           <a:spcPts val="0"/>
         </a:spcAft>
       </a:defPPr>
-      <a:lvl1pPr lvl="0" marR="0" rtl="0" algn="l">
+      <a:lvl1pPr marR="0" lvl="0" algn="l" rtl="0">
         <a:lnSpc>
           <a:spcPct val="100000"/>
         </a:lnSpc>
@@ -5661,7 +5811,7 @@
           <a:srgbClr val="000000"/>
         </a:buClr>
         <a:buFont typeface="Arial"/>
-        <a:defRPr b="0" i="0" sz="1400" u="none" cap="none" strike="noStrike">
+        <a:defRPr sz="1400" b="0" i="0" u="none" strike="noStrike" cap="none">
           <a:solidFill>
             <a:srgbClr val="000000"/>
           </a:solidFill>
@@ -5671,7 +5821,7 @@
           <a:sym typeface="Arial"/>
         </a:defRPr>
       </a:lvl1pPr>
-      <a:lvl2pPr lvl="1" marR="0" rtl="0" algn="l">
+      <a:lvl2pPr marR="0" lvl="1" algn="l" rtl="0">
         <a:lnSpc>
           <a:spcPct val="100000"/>
         </a:lnSpc>
@@ -5685,7 +5835,7 @@
           <a:srgbClr val="000000"/>
         </a:buClr>
         <a:buFont typeface="Arial"/>
-        <a:defRPr b="0" i="0" sz="1400" u="none" cap="none" strike="noStrike">
+        <a:defRPr sz="1400" b="0" i="0" u="none" strike="noStrike" cap="none">
           <a:solidFill>
             <a:srgbClr val="000000"/>
           </a:solidFill>
@@ -5695,7 +5845,7 @@
           <a:sym typeface="Arial"/>
         </a:defRPr>
       </a:lvl2pPr>
-      <a:lvl3pPr lvl="2" marR="0" rtl="0" algn="l">
+      <a:lvl3pPr marR="0" lvl="2" algn="l" rtl="0">
         <a:lnSpc>
           <a:spcPct val="100000"/>
         </a:lnSpc>
@@ -5709,7 +5859,7 @@
           <a:srgbClr val="000000"/>
         </a:buClr>
         <a:buFont typeface="Arial"/>
-        <a:defRPr b="0" i="0" sz="1400" u="none" cap="none" strike="noStrike">
+        <a:defRPr sz="1400" b="0" i="0" u="none" strike="noStrike" cap="none">
           <a:solidFill>
             <a:srgbClr val="000000"/>
           </a:solidFill>
@@ -5719,7 +5869,7 @@
           <a:sym typeface="Arial"/>
         </a:defRPr>
       </a:lvl3pPr>
-      <a:lvl4pPr lvl="3" marR="0" rtl="0" algn="l">
+      <a:lvl4pPr marR="0" lvl="3" algn="l" rtl="0">
         <a:lnSpc>
           <a:spcPct val="100000"/>
         </a:lnSpc>
@@ -5733,7 +5883,7 @@
           <a:srgbClr val="000000"/>
         </a:buClr>
         <a:buFont typeface="Arial"/>
-        <a:defRPr b="0" i="0" sz="1400" u="none" cap="none" strike="noStrike">
+        <a:defRPr sz="1400" b="0" i="0" u="none" strike="noStrike" cap="none">
           <a:solidFill>
             <a:srgbClr val="000000"/>
           </a:solidFill>
@@ -5743,7 +5893,7 @@
           <a:sym typeface="Arial"/>
         </a:defRPr>
       </a:lvl4pPr>
-      <a:lvl5pPr lvl="4" marR="0" rtl="0" algn="l">
+      <a:lvl5pPr marR="0" lvl="4" algn="l" rtl="0">
         <a:lnSpc>
           <a:spcPct val="100000"/>
         </a:lnSpc>
@@ -5757,7 +5907,7 @@
           <a:srgbClr val="000000"/>
         </a:buClr>
         <a:buFont typeface="Arial"/>
-        <a:defRPr b="0" i="0" sz="1400" u="none" cap="none" strike="noStrike">
+        <a:defRPr sz="1400" b="0" i="0" u="none" strike="noStrike" cap="none">
           <a:solidFill>
             <a:srgbClr val="000000"/>
           </a:solidFill>
@@ -5767,7 +5917,7 @@
           <a:sym typeface="Arial"/>
         </a:defRPr>
       </a:lvl5pPr>
-      <a:lvl6pPr lvl="5" marR="0" rtl="0" algn="l">
+      <a:lvl6pPr marR="0" lvl="5" algn="l" rtl="0">
         <a:lnSpc>
           <a:spcPct val="100000"/>
         </a:lnSpc>
@@ -5781,7 +5931,7 @@
           <a:srgbClr val="000000"/>
         </a:buClr>
         <a:buFont typeface="Arial"/>
-        <a:defRPr b="0" i="0" sz="1400" u="none" cap="none" strike="noStrike">
+        <a:defRPr sz="1400" b="0" i="0" u="none" strike="noStrike" cap="none">
           <a:solidFill>
             <a:srgbClr val="000000"/>
           </a:solidFill>
@@ -5791,7 +5941,7 @@
           <a:sym typeface="Arial"/>
         </a:defRPr>
       </a:lvl6pPr>
-      <a:lvl7pPr lvl="6" marR="0" rtl="0" algn="l">
+      <a:lvl7pPr marR="0" lvl="6" algn="l" rtl="0">
         <a:lnSpc>
           <a:spcPct val="100000"/>
         </a:lnSpc>
@@ -5805,7 +5955,7 @@
           <a:srgbClr val="000000"/>
         </a:buClr>
         <a:buFont typeface="Arial"/>
-        <a:defRPr b="0" i="0" sz="1400" u="none" cap="none" strike="noStrike">
+        <a:defRPr sz="1400" b="0" i="0" u="none" strike="noStrike" cap="none">
           <a:solidFill>
             <a:srgbClr val="000000"/>
           </a:solidFill>
@@ -5815,7 +5965,7 @@
           <a:sym typeface="Arial"/>
         </a:defRPr>
       </a:lvl7pPr>
-      <a:lvl8pPr lvl="7" marR="0" rtl="0" algn="l">
+      <a:lvl8pPr marR="0" lvl="7" algn="l" rtl="0">
         <a:lnSpc>
           <a:spcPct val="100000"/>
         </a:lnSpc>
@@ -5829,7 +5979,7 @@
           <a:srgbClr val="000000"/>
         </a:buClr>
         <a:buFont typeface="Arial"/>
-        <a:defRPr b="0" i="0" sz="1400" u="none" cap="none" strike="noStrike">
+        <a:defRPr sz="1400" b="0" i="0" u="none" strike="noStrike" cap="none">
           <a:solidFill>
             <a:srgbClr val="000000"/>
           </a:solidFill>
@@ -5839,7 +5989,7 @@
           <a:sym typeface="Arial"/>
         </a:defRPr>
       </a:lvl8pPr>
-      <a:lvl9pPr lvl="8" marR="0" rtl="0" algn="l">
+      <a:lvl9pPr marR="0" lvl="8" algn="l" rtl="0">
         <a:lnSpc>
           <a:spcPct val="100000"/>
         </a:lnSpc>
@@ -5853,7 +6003,7 @@
           <a:srgbClr val="000000"/>
         </a:buClr>
         <a:buFont typeface="Arial"/>
-        <a:defRPr b="0" i="0" sz="1400" u="none" cap="none" strike="noStrike">
+        <a:defRPr sz="1400" b="0" i="0" u="none" strike="noStrike" cap="none">
           <a:solidFill>
             <a:srgbClr val="000000"/>
           </a:solidFill>
@@ -5865,7 +6015,7 @@
       </a:lvl9pPr>
     </p:bodyStyle>
     <p:otherStyle>
-      <a:defPPr lvl="0" marR="0" rtl="0" algn="l">
+      <a:defPPr marR="0" lvl="0" algn="l" rtl="0">
         <a:lnSpc>
           <a:spcPct val="100000"/>
         </a:lnSpc>
@@ -5876,7 +6026,7 @@
           <a:spcPts val="0"/>
         </a:spcAft>
       </a:defPPr>
-      <a:lvl1pPr lvl="0" marR="0" rtl="0" algn="l">
+      <a:lvl1pPr marR="0" lvl="0" algn="l" rtl="0">
         <a:lnSpc>
           <a:spcPct val="100000"/>
         </a:lnSpc>
@@ -5890,7 +6040,7 @@
           <a:srgbClr val="000000"/>
         </a:buClr>
         <a:buFont typeface="Arial"/>
-        <a:defRPr b="0" i="0" sz="1400" u="none" cap="none" strike="noStrike">
+        <a:defRPr sz="1400" b="0" i="0" u="none" strike="noStrike" cap="none">
           <a:solidFill>
             <a:srgbClr val="000000"/>
           </a:solidFill>
@@ -5900,7 +6050,7 @@
           <a:sym typeface="Arial"/>
         </a:defRPr>
       </a:lvl1pPr>
-      <a:lvl2pPr lvl="1" marR="0" rtl="0" algn="l">
+      <a:lvl2pPr marR="0" lvl="1" algn="l" rtl="0">
         <a:lnSpc>
           <a:spcPct val="100000"/>
         </a:lnSpc>
@@ -5914,7 +6064,7 @@
           <a:srgbClr val="000000"/>
         </a:buClr>
         <a:buFont typeface="Arial"/>
-        <a:defRPr b="0" i="0" sz="1400" u="none" cap="none" strike="noStrike">
+        <a:defRPr sz="1400" b="0" i="0" u="none" strike="noStrike" cap="none">
           <a:solidFill>
             <a:srgbClr val="000000"/>
           </a:solidFill>
@@ -5924,7 +6074,7 @@
           <a:sym typeface="Arial"/>
         </a:defRPr>
       </a:lvl2pPr>
-      <a:lvl3pPr lvl="2" marR="0" rtl="0" algn="l">
+      <a:lvl3pPr marR="0" lvl="2" algn="l" rtl="0">
         <a:lnSpc>
           <a:spcPct val="100000"/>
         </a:lnSpc>
@@ -5938,7 +6088,7 @@
           <a:srgbClr val="000000"/>
         </a:buClr>
         <a:buFont typeface="Arial"/>
-        <a:defRPr b="0" i="0" sz="1400" u="none" cap="none" strike="noStrike">
+        <a:defRPr sz="1400" b="0" i="0" u="none" strike="noStrike" cap="none">
           <a:solidFill>
             <a:srgbClr val="000000"/>
           </a:solidFill>
@@ -5948,7 +6098,7 @@
           <a:sym typeface="Arial"/>
         </a:defRPr>
       </a:lvl3pPr>
-      <a:lvl4pPr lvl="3" marR="0" rtl="0" algn="l">
+      <a:lvl4pPr marR="0" lvl="3" algn="l" rtl="0">
         <a:lnSpc>
           <a:spcPct val="100000"/>
         </a:lnSpc>
@@ -5962,7 +6112,7 @@
           <a:srgbClr val="000000"/>
         </a:buClr>
         <a:buFont typeface="Arial"/>
-        <a:defRPr b="0" i="0" sz="1400" u="none" cap="none" strike="noStrike">
+        <a:defRPr sz="1400" b="0" i="0" u="none" strike="noStrike" cap="none">
           <a:solidFill>
             <a:srgbClr val="000000"/>
           </a:solidFill>
@@ -5972,7 +6122,7 @@
           <a:sym typeface="Arial"/>
         </a:defRPr>
       </a:lvl4pPr>
-      <a:lvl5pPr lvl="4" marR="0" rtl="0" algn="l">
+      <a:lvl5pPr marR="0" lvl="4" algn="l" rtl="0">
         <a:lnSpc>
           <a:spcPct val="100000"/>
         </a:lnSpc>
@@ -5986,7 +6136,7 @@
           <a:srgbClr val="000000"/>
         </a:buClr>
         <a:buFont typeface="Arial"/>
-        <a:defRPr b="0" i="0" sz="1400" u="none" cap="none" strike="noStrike">
+        <a:defRPr sz="1400" b="0" i="0" u="none" strike="noStrike" cap="none">
           <a:solidFill>
             <a:srgbClr val="000000"/>
           </a:solidFill>
@@ -5996,7 +6146,7 @@
           <a:sym typeface="Arial"/>
         </a:defRPr>
       </a:lvl5pPr>
-      <a:lvl6pPr lvl="5" marR="0" rtl="0" algn="l">
+      <a:lvl6pPr marR="0" lvl="5" algn="l" rtl="0">
         <a:lnSpc>
           <a:spcPct val="100000"/>
         </a:lnSpc>
@@ -6010,7 +6160,7 @@
           <a:srgbClr val="000000"/>
         </a:buClr>
         <a:buFont typeface="Arial"/>
-        <a:defRPr b="0" i="0" sz="1400" u="none" cap="none" strike="noStrike">
+        <a:defRPr sz="1400" b="0" i="0" u="none" strike="noStrike" cap="none">
           <a:solidFill>
             <a:srgbClr val="000000"/>
           </a:solidFill>
@@ -6020,7 +6170,7 @@
           <a:sym typeface="Arial"/>
         </a:defRPr>
       </a:lvl6pPr>
-      <a:lvl7pPr lvl="6" marR="0" rtl="0" algn="l">
+      <a:lvl7pPr marR="0" lvl="6" algn="l" rtl="0">
         <a:lnSpc>
           <a:spcPct val="100000"/>
         </a:lnSpc>
@@ -6034,7 +6184,7 @@
           <a:srgbClr val="000000"/>
         </a:buClr>
         <a:buFont typeface="Arial"/>
-        <a:defRPr b="0" i="0" sz="1400" u="none" cap="none" strike="noStrike">
+        <a:defRPr sz="1400" b="0" i="0" u="none" strike="noStrike" cap="none">
           <a:solidFill>
             <a:srgbClr val="000000"/>
           </a:solidFill>
@@ -6044,7 +6194,7 @@
           <a:sym typeface="Arial"/>
         </a:defRPr>
       </a:lvl7pPr>
-      <a:lvl8pPr lvl="7" marR="0" rtl="0" algn="l">
+      <a:lvl8pPr marR="0" lvl="7" algn="l" rtl="0">
         <a:lnSpc>
           <a:spcPct val="100000"/>
         </a:lnSpc>
@@ -6058,7 +6208,7 @@
           <a:srgbClr val="000000"/>
         </a:buClr>
         <a:buFont typeface="Arial"/>
-        <a:defRPr b="0" i="0" sz="1400" u="none" cap="none" strike="noStrike">
+        <a:defRPr sz="1400" b="0" i="0" u="none" strike="noStrike" cap="none">
           <a:solidFill>
             <a:srgbClr val="000000"/>
           </a:solidFill>
@@ -6068,7 +6218,7 @@
           <a:sym typeface="Arial"/>
         </a:defRPr>
       </a:lvl8pPr>
-      <a:lvl9pPr lvl="8" marR="0" rtl="0" algn="l">
+      <a:lvl9pPr marR="0" lvl="8" algn="l" rtl="0">
         <a:lnSpc>
           <a:spcPct val="100000"/>
         </a:lnSpc>
@@ -6082,7 +6232,7 @@
           <a:srgbClr val="000000"/>
         </a:buClr>
         <a:buFont typeface="Arial"/>
-        <a:defRPr b="0" i="0" sz="1400" u="none" cap="none" strike="noStrike">
+        <a:defRPr sz="1400" b="0" i="0" u="none" strike="noStrike" cap="none">
           <a:solidFill>
             <a:srgbClr val="000000"/>
           </a:solidFill>
@@ -6098,11 +6248,11 @@
 </file>
 
 <file path=ppt/slides/slide1.xml><?xml version="1.0" encoding="utf-8"?>
-<p:sld xmlns:a="http://schemas.openxmlformats.org/drawingml/2006/main" xmlns:r="http://schemas.openxmlformats.org/officeDocument/2006/relationships" xmlns:mc="http://schemas.openxmlformats.org/markup-compatibility/2006" xmlns:mv="urn:schemas-microsoft-com:mac:vml" xmlns:p="http://schemas.openxmlformats.org/presentationml/2006/main" xmlns:c="http://schemas.openxmlformats.org/drawingml/2006/chart" xmlns:dgm="http://schemas.openxmlformats.org/drawingml/2006/diagram" xmlns:o="urn:schemas-microsoft-com:office:office" xmlns:v="urn:schemas-microsoft-com:vml" xmlns:pvml="urn:schemas-microsoft-com:office:powerpoint" xmlns:com="http://schemas.openxmlformats.org/drawingml/2006/compatibility" xmlns:p14="http://schemas.microsoft.com/office/powerpoint/2010/main" xmlns:p15="http://schemas.microsoft.com/office/powerpoint/2012/main" xmlns:ahyp="http://schemas.microsoft.com/office/drawing/2018/hyperlinkcolor">
+<p:sld xmlns:a="http://schemas.openxmlformats.org/drawingml/2006/main" xmlns:r="http://schemas.openxmlformats.org/officeDocument/2006/relationships" xmlns:p="http://schemas.openxmlformats.org/presentationml/2006/main">
   <p:cSld>
     <p:spTree>
       <p:nvGrpSpPr>
-        <p:cNvPr id="53" name="Shape 53"/>
+        <p:cNvPr id="1" name="Shape 53"/>
         <p:cNvGrpSpPr/>
         <p:nvPr/>
       </p:nvGrpSpPr>
@@ -6117,7 +6267,9 @@
       <p:sp>
         <p:nvSpPr>
           <p:cNvPr id="54" name="Google Shape;54;p13"/>
-          <p:cNvSpPr txBox="1"/>
+          <p:cNvSpPr txBox="1">
+            <a:spLocks noGrp="1"/>
+          </p:cNvSpPr>
           <p:nvPr>
             <p:ph type="ctrTitle"/>
           </p:nvPr>
@@ -6132,12 +6284,12 @@
           </a:prstGeom>
         </p:spPr>
         <p:txBody>
-          <a:bodyPr anchorCtr="0" anchor="b" bIns="91425" lIns="91425" spcFirstLastPara="1" rIns="91425" wrap="square" tIns="91425">
+          <a:bodyPr spcFirstLastPara="1" wrap="square" lIns="91425" tIns="91425" rIns="91425" bIns="91425" anchor="b" anchorCtr="0">
             <a:normAutofit/>
           </a:bodyPr>
           <a:lstStyle/>
           <a:p>
-            <a:pPr indent="0" lvl="0" marL="0" rtl="0" algn="ctr">
+            <a:pPr marL="0" lvl="0" indent="0" algn="ctr" rtl="0">
               <a:spcBef>
                 <a:spcPts val="0"/>
               </a:spcBef>
@@ -6174,12 +6326,12 @@
           </a:ln>
         </p:spPr>
         <p:txBody>
-          <a:bodyPr anchorCtr="0" anchor="t" bIns="91425" lIns="91425" spcFirstLastPara="1" rIns="91425" wrap="square" tIns="91425">
+          <a:bodyPr spcFirstLastPara="1" wrap="square" lIns="91425" tIns="91425" rIns="91425" bIns="91425" anchor="t" anchorCtr="0">
             <a:noAutofit/>
           </a:bodyPr>
           <a:lstStyle/>
           <a:p>
-            <a:pPr indent="0" lvl="0" marL="0" rtl="0" algn="ctr">
+            <a:pPr marL="0" lvl="0" indent="0" algn="ctr" rtl="0">
               <a:spcBef>
                 <a:spcPts val="0"/>
               </a:spcBef>
@@ -6189,21 +6341,32 @@
               <a:buNone/>
             </a:pPr>
             <a:r>
-              <a:rPr lang="en">
+              <a:rPr lang="en" dirty="0">
                 <a:solidFill>
                   <a:schemeClr val="dk1"/>
                 </a:solidFill>
               </a:rPr>
-              <a:t>Please click the link below to fill out a Google Form. </a:t>
+              <a:t>Please click the link below to fill out a Prior Knowledge Assessment.</a:t>
             </a:r>
-            <a:endParaRPr>
+          </a:p>
+          <a:p>
+            <a:pPr marL="0" lvl="0" indent="0" algn="ctr" rtl="0">
+              <a:spcBef>
+                <a:spcPts val="0"/>
+              </a:spcBef>
+              <a:spcAft>
+                <a:spcPts val="0"/>
+              </a:spcAft>
+              <a:buNone/>
+            </a:pPr>
+            <a:endParaRPr lang="en" dirty="0">
               <a:solidFill>
                 <a:schemeClr val="dk1"/>
               </a:solidFill>
             </a:endParaRPr>
           </a:p>
           <a:p>
-            <a:pPr indent="0" lvl="0" marL="0" rtl="0" algn="ctr">
+            <a:pPr marL="0" lvl="0" indent="0" algn="ctr" rtl="0">
               <a:spcBef>
                 <a:spcPts val="0"/>
               </a:spcBef>
@@ -6213,16 +6376,38 @@
               <a:buNone/>
             </a:pPr>
             <a:r>
-              <a:t/>
+              <a:rPr lang="en" dirty="0">
+                <a:solidFill>
+                  <a:schemeClr val="dk1"/>
+                </a:solidFill>
+              </a:rPr>
+              <a:t>Click </a:t>
             </a:r>
-            <a:endParaRPr>
+            <a:r>
+              <a:rPr lang="en" dirty="0">
+                <a:solidFill>
+                  <a:schemeClr val="dk1"/>
+                </a:solidFill>
+                <a:hlinkClick r:id="rId3"/>
+              </a:rPr>
+              <a:t>here</a:t>
+            </a:r>
+            <a:r>
+              <a:rPr lang="en" dirty="0">
+                <a:solidFill>
+                  <a:schemeClr val="dk1"/>
+                </a:solidFill>
+              </a:rPr>
+              <a:t>. </a:t>
+            </a:r>
+            <a:endParaRPr dirty="0">
               <a:solidFill>
                 <a:schemeClr val="dk1"/>
               </a:solidFill>
             </a:endParaRPr>
           </a:p>
           <a:p>
-            <a:pPr indent="0" lvl="0" marL="0" rtl="0" algn="ctr">
+            <a:pPr marL="0" lvl="0" indent="0" algn="ctr" rtl="0">
               <a:spcBef>
                 <a:spcPts val="0"/>
               </a:spcBef>
@@ -6231,32 +6416,7 @@
               </a:spcAft>
               <a:buNone/>
             </a:pPr>
-            <a:r>
-              <a:rPr lang="en" sz="1300" u="sng">
-                <a:solidFill>
-                  <a:schemeClr val="hlink"/>
-                </a:solidFill>
-                <a:latin typeface="Times New Roman"/>
-                <a:ea typeface="Times New Roman"/>
-                <a:cs typeface="Times New Roman"/>
-                <a:sym typeface="Times New Roman"/>
-                <a:hlinkClick r:id="rId3"/>
-              </a:rPr>
-              <a:t>https://docs.google.com/forms/d/e/1FAIpQLSdQcnYvi6wNEJNccWcaTLqz-OSIM5Blto5mKAWNQ02_ibkJDg/viewform?vc=0&amp;c=0&amp;w=1&amp;flr=0</a:t>
-            </a:r>
-            <a:r>
-              <a:rPr lang="en" sz="1300">
-                <a:solidFill>
-                  <a:schemeClr val="dk1"/>
-                </a:solidFill>
-                <a:latin typeface="Times New Roman"/>
-                <a:ea typeface="Times New Roman"/>
-                <a:cs typeface="Times New Roman"/>
-                <a:sym typeface="Times New Roman"/>
-              </a:rPr>
-              <a:t> </a:t>
-            </a:r>
-            <a:endParaRPr sz="1700">
+            <a:endParaRPr dirty="0">
               <a:solidFill>
                 <a:schemeClr val="dk1"/>
               </a:solidFill>
@@ -6272,32 +6432,32 @@
   <p:timing>
     <p:tnLst>
       <p:par>
-        <p:cTn dur="indefinite" nodeType="tmRoot" restart="never">
+        <p:cTn id="1" dur="indefinite" restart="never" nodeType="tmRoot">
           <p:childTnLst>
             <p:seq concurrent="1" nextAc="seek">
-              <p:cTn dur="indefinite" id="2" nodeType="mainSeq">
+              <p:cTn id="2" dur="indefinite" nodeType="mainSeq">
                 <p:childTnLst>
                   <p:par>
-                    <p:cTn fill="hold">
+                    <p:cTn id="3" fill="hold">
                       <p:stCondLst>
                         <p:cond delay="indefinite"/>
                       </p:stCondLst>
                       <p:childTnLst>
                         <p:par>
-                          <p:cTn fill="hold">
+                          <p:cTn id="4" fill="hold">
                             <p:stCondLst>
                               <p:cond delay="0"/>
                             </p:stCondLst>
                             <p:childTnLst>
                               <p:par>
-                                <p:cTn fill="hold" nodeType="clickEffect" presetClass="entr" presetID="10" presetSubtype="0">
+                                <p:cTn id="5" presetID="10" presetClass="entr" presetSubtype="0" fill="hold" nodeType="clickEffect">
                                   <p:stCondLst>
                                     <p:cond delay="0"/>
                                   </p:stCondLst>
                                   <p:childTnLst>
                                     <p:set>
                                       <p:cBhvr>
-                                        <p:cTn dur="1" fill="hold">
+                                        <p:cTn id="6" dur="1" fill="hold">
                                           <p:stCondLst>
                                             <p:cond delay="0"/>
                                           </p:stCondLst>
@@ -6313,9 +6473,9 @@
                                         <p:strVal val="visible"/>
                                       </p:to>
                                     </p:set>
-                                    <p:animEffect filter="fade" transition="in">
+                                    <p:animEffect transition="in" filter="fade">
                                       <p:cBhvr>
-                                        <p:cTn dur="1000"/>
+                                        <p:cTn id="7" dur="1000"/>
                                         <p:tgtEl>
                                           <p:spTgt spid="55"/>
                                         </p:tgtEl>
@@ -6333,14 +6493,14 @@
                 </p:childTnLst>
               </p:cTn>
               <p:prevCondLst>
-                <p:cond evt="onPrev">
+                <p:cond evt="onPrev" delay="0">
                   <p:tgtEl>
                     <p:sldTgt/>
                   </p:tgtEl>
                 </p:cond>
               </p:prevCondLst>
               <p:nextCondLst>
-                <p:cond evt="onNext">
+                <p:cond evt="onNext" delay="0">
                   <p:tgtEl>
                     <p:sldTgt/>
                   </p:tgtEl>
@@ -6356,11 +6516,11 @@
 </file>
 
 <file path=ppt/slides/slide2.xml><?xml version="1.0" encoding="utf-8"?>
-<p:sld xmlns:a="http://schemas.openxmlformats.org/drawingml/2006/main" xmlns:r="http://schemas.openxmlformats.org/officeDocument/2006/relationships" xmlns:mc="http://schemas.openxmlformats.org/markup-compatibility/2006" xmlns:mv="urn:schemas-microsoft-com:mac:vml" xmlns:p="http://schemas.openxmlformats.org/presentationml/2006/main" xmlns:c="http://schemas.openxmlformats.org/drawingml/2006/chart" xmlns:dgm="http://schemas.openxmlformats.org/drawingml/2006/diagram" xmlns:o="urn:schemas-microsoft-com:office:office" xmlns:v="urn:schemas-microsoft-com:vml" xmlns:pvml="urn:schemas-microsoft-com:office:powerpoint" xmlns:com="http://schemas.openxmlformats.org/drawingml/2006/compatibility" xmlns:p14="http://schemas.microsoft.com/office/powerpoint/2010/main" xmlns:p15="http://schemas.microsoft.com/office/powerpoint/2012/main" xmlns:ahyp="http://schemas.microsoft.com/office/drawing/2018/hyperlinkcolor">
+<p:sld xmlns:a="http://schemas.openxmlformats.org/drawingml/2006/main" xmlns:r="http://schemas.openxmlformats.org/officeDocument/2006/relationships" xmlns:p="http://schemas.openxmlformats.org/presentationml/2006/main">
   <p:cSld>
     <p:spTree>
       <p:nvGrpSpPr>
-        <p:cNvPr id="59" name="Shape 59"/>
+        <p:cNvPr id="1" name="Shape 59"/>
         <p:cNvGrpSpPr/>
         <p:nvPr/>
       </p:nvGrpSpPr>
@@ -6375,7 +6535,9 @@
       <p:sp>
         <p:nvSpPr>
           <p:cNvPr id="60" name="Google Shape;60;p14"/>
-          <p:cNvSpPr txBox="1"/>
+          <p:cNvSpPr txBox="1">
+            <a:spLocks noGrp="1"/>
+          </p:cNvSpPr>
           <p:nvPr>
             <p:ph type="title"/>
           </p:nvPr>
@@ -6390,12 +6552,12 @@
           </a:prstGeom>
         </p:spPr>
         <p:txBody>
-          <a:bodyPr anchorCtr="0" anchor="t" bIns="91425" lIns="91425" spcFirstLastPara="1" rIns="91425" wrap="square" tIns="91425">
+          <a:bodyPr spcFirstLastPara="1" wrap="square" lIns="91425" tIns="91425" rIns="91425" bIns="91425" anchor="t" anchorCtr="0">
             <a:normAutofit fontScale="90000"/>
           </a:bodyPr>
           <a:lstStyle/>
           <a:p>
-            <a:pPr indent="0" lvl="0" marL="0" rtl="0" algn="l">
+            <a:pPr marL="0" lvl="0" indent="0" algn="l" rtl="0">
               <a:spcBef>
                 <a:spcPts val="0"/>
               </a:spcBef>
@@ -6415,9 +6577,11 @@
       <p:sp>
         <p:nvSpPr>
           <p:cNvPr id="61" name="Google Shape;61;p14"/>
-          <p:cNvSpPr txBox="1"/>
+          <p:cNvSpPr txBox="1">
+            <a:spLocks noGrp="1"/>
+          </p:cNvSpPr>
           <p:nvPr>
-            <p:ph idx="1" type="body"/>
+            <p:ph type="body" idx="1"/>
           </p:nvPr>
         </p:nvSpPr>
         <p:spPr>
@@ -6430,12 +6594,12 @@
           </a:prstGeom>
         </p:spPr>
         <p:txBody>
-          <a:bodyPr anchorCtr="0" anchor="t" bIns="91425" lIns="91425" spcFirstLastPara="1" rIns="91425" wrap="square" tIns="91425">
-            <a:normAutofit fontScale="92500"/>
+          <a:bodyPr spcFirstLastPara="1" wrap="square" lIns="91425" tIns="91425" rIns="91425" bIns="91425" anchor="t" anchorCtr="0">
+            <a:normAutofit fontScale="92500" lnSpcReduction="10000"/>
           </a:bodyPr>
           <a:lstStyle/>
           <a:p>
-            <a:pPr indent="-334327" lvl="0" marL="457200" rtl="0" algn="l">
+            <a:pPr marL="457200" lvl="0" indent="-334327" algn="l" rtl="0">
               <a:spcBef>
                 <a:spcPts val="0"/>
               </a:spcBef>
@@ -6452,7 +6616,7 @@
             <a:endParaRPr/>
           </a:p>
           <a:p>
-            <a:pPr indent="-334327" lvl="0" marL="457200" rtl="0" algn="l">
+            <a:pPr marL="457200" lvl="0" indent="-334327" algn="l" rtl="0">
               <a:spcBef>
                 <a:spcPts val="0"/>
               </a:spcBef>
@@ -6469,7 +6633,7 @@
             <a:endParaRPr/>
           </a:p>
           <a:p>
-            <a:pPr indent="-334327" lvl="0" marL="457200" rtl="0" algn="l">
+            <a:pPr marL="457200" lvl="0" indent="-334327" algn="l" rtl="0">
               <a:spcBef>
                 <a:spcPts val="0"/>
               </a:spcBef>
@@ -6507,12 +6671,12 @@
           </a:ln>
         </p:spPr>
         <p:txBody>
-          <a:bodyPr anchorCtr="0" anchor="t" bIns="91425" lIns="91425" spcFirstLastPara="1" rIns="91425" wrap="square" tIns="91425">
+          <a:bodyPr spcFirstLastPara="1" wrap="square" lIns="91425" tIns="91425" rIns="91425" bIns="91425" anchor="t" anchorCtr="0">
             <a:noAutofit/>
           </a:bodyPr>
           <a:lstStyle/>
           <a:p>
-            <a:pPr indent="-342900" lvl="0" marL="457200" rtl="0" algn="l">
+            <a:pPr marL="457200" lvl="0" indent="-342900" algn="l" rtl="0">
               <a:spcBef>
                 <a:spcPts val="0"/>
               </a:spcBef>
@@ -6540,7 +6704,7 @@
             </a:endParaRPr>
           </a:p>
           <a:p>
-            <a:pPr indent="0" lvl="0" marL="0" rtl="0" algn="l">
+            <a:pPr marL="0" lvl="0" indent="0" algn="l" rtl="0">
               <a:spcBef>
                 <a:spcPts val="0"/>
               </a:spcBef>
@@ -6564,7 +6728,7 @@
             </a:endParaRPr>
           </a:p>
           <a:p>
-            <a:pPr indent="-342900" lvl="0" marL="457200" rtl="0" algn="l">
+            <a:pPr marL="457200" lvl="0" indent="-342900" algn="l" rtl="0">
               <a:spcBef>
                 <a:spcPts val="0"/>
               </a:spcBef>
@@ -6592,7 +6756,7 @@
             </a:endParaRPr>
           </a:p>
           <a:p>
-            <a:pPr indent="0" lvl="0" marL="0" rtl="0" algn="l">
+            <a:pPr marL="0" lvl="0" indent="0" algn="l" rtl="0">
               <a:spcBef>
                 <a:spcPts val="0"/>
               </a:spcBef>
@@ -6640,14 +6804,14 @@
             <a:avLst/>
           </a:prstGeom>
           <a:noFill/>
-          <a:ln cap="flat" cmpd="sng" w="28575">
+          <a:ln w="28575" cap="flat" cmpd="sng">
             <a:solidFill>
               <a:schemeClr val="dk2"/>
             </a:solidFill>
             <a:prstDash val="solid"/>
             <a:round/>
-            <a:headEnd len="sm" w="sm" type="none"/>
-            <a:tailEnd len="sm" w="sm" type="none"/>
+            <a:headEnd type="none" w="sm" len="sm"/>
+            <a:tailEnd type="none" w="sm" len="sm"/>
           </a:ln>
         </p:spPr>
       </p:pic>
@@ -6659,32 +6823,32 @@
   <p:timing>
     <p:tnLst>
       <p:par>
-        <p:cTn dur="indefinite" nodeType="tmRoot" restart="never">
+        <p:cTn id="1" dur="indefinite" restart="never" nodeType="tmRoot">
           <p:childTnLst>
             <p:seq concurrent="1" nextAc="seek">
-              <p:cTn dur="indefinite" id="2" nodeType="mainSeq">
+              <p:cTn id="2" dur="indefinite" nodeType="mainSeq">
                 <p:childTnLst>
                   <p:par>
-                    <p:cTn fill="hold">
+                    <p:cTn id="3" fill="hold">
                       <p:stCondLst>
                         <p:cond delay="indefinite"/>
                       </p:stCondLst>
                       <p:childTnLst>
                         <p:par>
-                          <p:cTn fill="hold">
+                          <p:cTn id="4" fill="hold">
                             <p:stCondLst>
                               <p:cond delay="0"/>
                             </p:stCondLst>
                             <p:childTnLst>
                               <p:par>
-                                <p:cTn fill="hold" nodeType="clickEffect" presetClass="entr" presetID="10" presetSubtype="0">
+                                <p:cTn id="5" presetID="10" presetClass="entr" presetSubtype="0" fill="hold" nodeType="clickEffect">
                                   <p:stCondLst>
                                     <p:cond delay="0"/>
                                   </p:stCondLst>
                                   <p:childTnLst>
                                     <p:set>
                                       <p:cBhvr>
-                                        <p:cTn dur="1" fill="hold">
+                                        <p:cTn id="6" dur="1" fill="hold">
                                           <p:stCondLst>
                                             <p:cond delay="0"/>
                                           </p:stCondLst>
@@ -6700,9 +6864,9 @@
                                         <p:strVal val="visible"/>
                                       </p:to>
                                     </p:set>
-                                    <p:animEffect filter="fade" transition="in">
+                                    <p:animEffect transition="in" filter="fade">
                                       <p:cBhvr>
-                                        <p:cTn dur="1000"/>
+                                        <p:cTn id="7" dur="1000"/>
                                         <p:tgtEl>
                                           <p:spTgt spid="61"/>
                                         </p:tgtEl>
@@ -6718,26 +6882,26 @@
                     </p:cTn>
                   </p:par>
                   <p:par>
-                    <p:cTn fill="hold">
+                    <p:cTn id="8" fill="hold">
                       <p:stCondLst>
                         <p:cond delay="indefinite"/>
                       </p:stCondLst>
                       <p:childTnLst>
                         <p:par>
-                          <p:cTn fill="hold">
+                          <p:cTn id="9" fill="hold">
                             <p:stCondLst>
                               <p:cond delay="0"/>
                             </p:stCondLst>
                             <p:childTnLst>
                               <p:par>
-                                <p:cTn fill="hold" nodeType="clickEffect" presetClass="entr" presetID="10" presetSubtype="0">
+                                <p:cTn id="10" presetID="10" presetClass="entr" presetSubtype="0" fill="hold" nodeType="clickEffect">
                                   <p:stCondLst>
                                     <p:cond delay="0"/>
                                   </p:stCondLst>
                                   <p:childTnLst>
                                     <p:set>
                                       <p:cBhvr>
-                                        <p:cTn dur="1" fill="hold">
+                                        <p:cTn id="11" dur="1" fill="hold">
                                           <p:stCondLst>
                                             <p:cond delay="0"/>
                                           </p:stCondLst>
@@ -6753,9 +6917,9 @@
                                         <p:strVal val="visible"/>
                                       </p:to>
                                     </p:set>
-                                    <p:animEffect filter="fade" transition="in">
+                                    <p:animEffect transition="in" filter="fade">
                                       <p:cBhvr>
-                                        <p:cTn dur="1000"/>
+                                        <p:cTn id="12" dur="1000"/>
                                         <p:tgtEl>
                                           <p:spTgt spid="62"/>
                                         </p:tgtEl>
@@ -6765,14 +6929,14 @@
                                 </p:cTn>
                               </p:par>
                               <p:par>
-                                <p:cTn fill="hold" nodeType="withEffect" presetClass="entr" presetID="10" presetSubtype="0">
+                                <p:cTn id="13" presetID="10" presetClass="entr" presetSubtype="0" fill="hold" nodeType="withEffect">
                                   <p:stCondLst>
                                     <p:cond delay="0"/>
                                   </p:stCondLst>
                                   <p:childTnLst>
                                     <p:set>
                                       <p:cBhvr>
-                                        <p:cTn dur="1" fill="hold">
+                                        <p:cTn id="14" dur="1" fill="hold">
                                           <p:stCondLst>
                                             <p:cond delay="0"/>
                                           </p:stCondLst>
@@ -6788,9 +6952,9 @@
                                         <p:strVal val="visible"/>
                                       </p:to>
                                     </p:set>
-                                    <p:animEffect filter="fade" transition="in">
+                                    <p:animEffect transition="in" filter="fade">
                                       <p:cBhvr>
-                                        <p:cTn dur="1000"/>
+                                        <p:cTn id="15" dur="1000"/>
                                         <p:tgtEl>
                                           <p:spTgt spid="63"/>
                                         </p:tgtEl>
@@ -6808,14 +6972,14 @@
                 </p:childTnLst>
               </p:cTn>
               <p:prevCondLst>
-                <p:cond evt="onPrev">
+                <p:cond evt="onPrev" delay="0">
                   <p:tgtEl>
                     <p:sldTgt/>
                   </p:tgtEl>
                 </p:cond>
               </p:prevCondLst>
               <p:nextCondLst>
-                <p:cond evt="onNext">
+                <p:cond evt="onNext" delay="0">
                   <p:tgtEl>
                     <p:sldTgt/>
                   </p:tgtEl>
@@ -6831,11 +6995,11 @@
 </file>
 
 <file path=ppt/slides/slide3.xml><?xml version="1.0" encoding="utf-8"?>
-<p:sld xmlns:a="http://schemas.openxmlformats.org/drawingml/2006/main" xmlns:r="http://schemas.openxmlformats.org/officeDocument/2006/relationships" xmlns:mc="http://schemas.openxmlformats.org/markup-compatibility/2006" xmlns:mv="urn:schemas-microsoft-com:mac:vml" xmlns:p="http://schemas.openxmlformats.org/presentationml/2006/main" xmlns:c="http://schemas.openxmlformats.org/drawingml/2006/chart" xmlns:dgm="http://schemas.openxmlformats.org/drawingml/2006/diagram" xmlns:o="urn:schemas-microsoft-com:office:office" xmlns:v="urn:schemas-microsoft-com:vml" xmlns:pvml="urn:schemas-microsoft-com:office:powerpoint" xmlns:com="http://schemas.openxmlformats.org/drawingml/2006/compatibility" xmlns:p14="http://schemas.microsoft.com/office/powerpoint/2010/main" xmlns:p15="http://schemas.microsoft.com/office/powerpoint/2012/main" xmlns:ahyp="http://schemas.microsoft.com/office/drawing/2018/hyperlinkcolor">
+<p:sld xmlns:a="http://schemas.openxmlformats.org/drawingml/2006/main" xmlns:r="http://schemas.openxmlformats.org/officeDocument/2006/relationships" xmlns:p="http://schemas.openxmlformats.org/presentationml/2006/main">
   <p:cSld>
     <p:spTree>
       <p:nvGrpSpPr>
-        <p:cNvPr id="67" name="Shape 67"/>
+        <p:cNvPr id="1" name="Shape 67"/>
         <p:cNvGrpSpPr/>
         <p:nvPr/>
       </p:nvGrpSpPr>
@@ -6850,7 +7014,9 @@
       <p:sp>
         <p:nvSpPr>
           <p:cNvPr id="68" name="Google Shape;68;p15"/>
-          <p:cNvSpPr txBox="1"/>
+          <p:cNvSpPr txBox="1">
+            <a:spLocks noGrp="1"/>
+          </p:cNvSpPr>
           <p:nvPr>
             <p:ph type="title"/>
           </p:nvPr>
@@ -6865,12 +7031,12 @@
           </a:prstGeom>
         </p:spPr>
         <p:txBody>
-          <a:bodyPr anchorCtr="0" anchor="t" bIns="91425" lIns="91425" spcFirstLastPara="1" rIns="91425" wrap="square" tIns="91425">
+          <a:bodyPr spcFirstLastPara="1" wrap="square" lIns="91425" tIns="91425" rIns="91425" bIns="91425" anchor="t" anchorCtr="0">
             <a:normAutofit fontScale="90000"/>
           </a:bodyPr>
           <a:lstStyle/>
           <a:p>
-            <a:pPr indent="0" lvl="0" marL="0" rtl="0" algn="l">
+            <a:pPr marL="0" lvl="0" indent="0" algn="l" rtl="0">
               <a:spcBef>
                 <a:spcPts val="0"/>
               </a:spcBef>
@@ -6881,23 +7047,7 @@
             </a:pPr>
             <a:r>
               <a:rPr lang="en"/>
-              <a:t>The </a:t>
-            </a:r>
-            <a:r>
-              <a:rPr lang="en"/>
-              <a:t>Cultural</a:t>
-            </a:r>
-            <a:r>
-              <a:rPr lang="en"/>
-              <a:t> Stone </a:t>
-            </a:r>
-            <a:r>
-              <a:rPr lang="en"/>
-              <a:t>Stability</a:t>
-            </a:r>
-            <a:r>
-              <a:rPr lang="en"/>
-              <a:t> Index </a:t>
+              <a:t>The Cultural Stone Stability Index </a:t>
             </a:r>
             <a:endParaRPr/>
           </a:p>
@@ -6906,9 +7056,11 @@
       <p:sp>
         <p:nvSpPr>
           <p:cNvPr id="69" name="Google Shape;69;p15"/>
-          <p:cNvSpPr txBox="1"/>
+          <p:cNvSpPr txBox="1">
+            <a:spLocks noGrp="1"/>
+          </p:cNvSpPr>
           <p:nvPr>
-            <p:ph idx="1" type="body"/>
+            <p:ph type="body" idx="1"/>
           </p:nvPr>
         </p:nvSpPr>
         <p:spPr>
@@ -6921,12 +7073,12 @@
           </a:prstGeom>
         </p:spPr>
         <p:txBody>
-          <a:bodyPr anchorCtr="0" anchor="t" bIns="91425" lIns="91425" spcFirstLastPara="1" rIns="91425" wrap="square" tIns="91425">
+          <a:bodyPr spcFirstLastPara="1" wrap="square" lIns="91425" tIns="91425" rIns="91425" bIns="91425" anchor="t" anchorCtr="0">
             <a:normAutofit/>
           </a:bodyPr>
           <a:lstStyle/>
           <a:p>
-            <a:pPr indent="-342900" lvl="0" marL="457200" rtl="0" algn="l">
+            <a:pPr marL="457200" lvl="0" indent="-342900" algn="l" rtl="0">
               <a:spcBef>
                 <a:spcPts val="0"/>
               </a:spcBef>
@@ -6938,16 +7090,12 @@
             </a:pPr>
             <a:r>
               <a:rPr lang="en"/>
-              <a:t>This index is used to </a:t>
-            </a:r>
-            <a:r>
-              <a:rPr lang="en"/>
-              <a:t>measure natural and cultural stone.</a:t>
+              <a:t>This index is used to measure natural and cultural stone.</a:t>
             </a:r>
             <a:endParaRPr/>
           </a:p>
           <a:p>
-            <a:pPr indent="-342900" lvl="0" marL="457200" rtl="0" algn="l">
+            <a:pPr marL="457200" lvl="0" indent="-342900" algn="l" rtl="0">
               <a:spcBef>
                 <a:spcPts val="0"/>
               </a:spcBef>
@@ -6964,7 +7112,7 @@
             <a:endParaRPr/>
           </a:p>
           <a:p>
-            <a:pPr indent="-342900" lvl="0" marL="457200" rtl="0" algn="l">
+            <a:pPr marL="457200" lvl="0" indent="-342900" algn="l" rtl="0">
               <a:spcBef>
                 <a:spcPts val="0"/>
               </a:spcBef>
@@ -6981,7 +7129,7 @@
             <a:endParaRPr/>
           </a:p>
           <a:p>
-            <a:pPr indent="-342900" lvl="0" marL="457200" rtl="0" algn="l">
+            <a:pPr marL="457200" lvl="0" indent="-342900" algn="l" rtl="0">
               <a:spcBef>
                 <a:spcPts val="0"/>
               </a:spcBef>
@@ -7019,12 +7167,12 @@
           </a:ln>
         </p:spPr>
         <p:txBody>
-          <a:bodyPr anchorCtr="0" anchor="t" bIns="91425" lIns="91425" spcFirstLastPara="1" rIns="91425" wrap="square" tIns="91425">
+          <a:bodyPr spcFirstLastPara="1" wrap="square" lIns="91425" tIns="91425" rIns="91425" bIns="91425" anchor="t" anchorCtr="0">
             <a:noAutofit/>
           </a:bodyPr>
           <a:lstStyle/>
           <a:p>
-            <a:pPr indent="-342900" lvl="0" marL="457200" rtl="0" algn="l">
+            <a:pPr marL="457200" lvl="0" indent="-342900" algn="l" rtl="0">
               <a:spcBef>
                 <a:spcPts val="0"/>
               </a:spcBef>
@@ -7038,21 +7186,21 @@
               <a:buChar char="●"/>
             </a:pPr>
             <a:r>
-              <a:rPr lang="en" sz="1800">
+              <a:rPr lang="en" sz="1800" dirty="0">
                 <a:solidFill>
                   <a:srgbClr val="B7B7B7"/>
                 </a:solidFill>
               </a:rPr>
               <a:t>Assessing these structures matters in order to preserve the heritage of the cultures to which the structures belong to. </a:t>
             </a:r>
-            <a:endParaRPr sz="1800">
+            <a:endParaRPr sz="1800" dirty="0">
               <a:solidFill>
                 <a:srgbClr val="B7B7B7"/>
               </a:solidFill>
             </a:endParaRPr>
           </a:p>
           <a:p>
-            <a:pPr indent="-342900" lvl="0" marL="457200" rtl="0" algn="l">
+            <a:pPr marL="457200" lvl="0" indent="-342900" algn="l" rtl="0">
               <a:spcBef>
                 <a:spcPts val="0"/>
               </a:spcBef>
@@ -7066,14 +7214,14 @@
               <a:buChar char="●"/>
             </a:pPr>
             <a:r>
-              <a:rPr lang="en" sz="1800">
+              <a:rPr lang="en" sz="1800" dirty="0">
                 <a:solidFill>
                   <a:srgbClr val="B7B7B7"/>
                 </a:solidFill>
               </a:rPr>
-              <a:t>Using the CSSI can also determine the danger risks of the stone structure. If left unchecked, the structure could collapse and injury the community nearby.</a:t>
+              <a:t>Using the CSSI can also determine the danger risks of the stone structure. If left unchecked, the structure could collapse.</a:t>
             </a:r>
-            <a:endParaRPr sz="1800">
+            <a:endParaRPr sz="1800" dirty="0">
               <a:solidFill>
                 <a:srgbClr val="B7B7B7"/>
               </a:solidFill>
@@ -7089,32 +7237,32 @@
   <p:timing>
     <p:tnLst>
       <p:par>
-        <p:cTn dur="indefinite" nodeType="tmRoot" restart="never">
+        <p:cTn id="1" dur="indefinite" restart="never" nodeType="tmRoot">
           <p:childTnLst>
             <p:seq concurrent="1" nextAc="seek">
-              <p:cTn dur="indefinite" id="2" nodeType="mainSeq">
+              <p:cTn id="2" dur="indefinite" nodeType="mainSeq">
                 <p:childTnLst>
                   <p:par>
-                    <p:cTn fill="hold">
+                    <p:cTn id="3" fill="hold">
                       <p:stCondLst>
                         <p:cond delay="indefinite"/>
                       </p:stCondLst>
                       <p:childTnLst>
                         <p:par>
-                          <p:cTn fill="hold">
+                          <p:cTn id="4" fill="hold">
                             <p:stCondLst>
                               <p:cond delay="0"/>
                             </p:stCondLst>
                             <p:childTnLst>
                               <p:par>
-                                <p:cTn fill="hold" nodeType="clickEffect" presetClass="entr" presetID="10" presetSubtype="0">
+                                <p:cTn id="5" presetID="10" presetClass="entr" presetSubtype="0" fill="hold" nodeType="clickEffect">
                                   <p:stCondLst>
                                     <p:cond delay="0"/>
                                   </p:stCondLst>
                                   <p:childTnLst>
                                     <p:set>
                                       <p:cBhvr>
-                                        <p:cTn dur="1" fill="hold">
+                                        <p:cTn id="6" dur="1" fill="hold">
                                           <p:stCondLst>
                                             <p:cond delay="0"/>
                                           </p:stCondLst>
@@ -7130,9 +7278,9 @@
                                         <p:strVal val="visible"/>
                                       </p:to>
                                     </p:set>
-                                    <p:animEffect filter="fade" transition="in">
+                                    <p:animEffect transition="in" filter="fade">
                                       <p:cBhvr>
-                                        <p:cTn dur="1000"/>
+                                        <p:cTn id="7" dur="1000"/>
                                         <p:tgtEl>
                                           <p:spTgt spid="69"/>
                                         </p:tgtEl>
@@ -7148,26 +7296,26 @@
                     </p:cTn>
                   </p:par>
                   <p:par>
-                    <p:cTn fill="hold">
+                    <p:cTn id="8" fill="hold">
                       <p:stCondLst>
                         <p:cond delay="indefinite"/>
                       </p:stCondLst>
                       <p:childTnLst>
                         <p:par>
-                          <p:cTn fill="hold">
+                          <p:cTn id="9" fill="hold">
                             <p:stCondLst>
                               <p:cond delay="0"/>
                             </p:stCondLst>
                             <p:childTnLst>
                               <p:par>
-                                <p:cTn fill="hold" nodeType="clickEffect" presetClass="entr" presetID="10" presetSubtype="0">
+                                <p:cTn id="10" presetID="10" presetClass="entr" presetSubtype="0" fill="hold" nodeType="clickEffect">
                                   <p:stCondLst>
                                     <p:cond delay="0"/>
                                   </p:stCondLst>
                                   <p:childTnLst>
                                     <p:set>
                                       <p:cBhvr>
-                                        <p:cTn dur="1" fill="hold">
+                                        <p:cTn id="11" dur="1" fill="hold">
                                           <p:stCondLst>
                                             <p:cond delay="0"/>
                                           </p:stCondLst>
@@ -7183,9 +7331,9 @@
                                         <p:strVal val="visible"/>
                                       </p:to>
                                     </p:set>
-                                    <p:animEffect filter="fade" transition="in">
+                                    <p:animEffect transition="in" filter="fade">
                                       <p:cBhvr>
-                                        <p:cTn dur="1000"/>
+                                        <p:cTn id="12" dur="1000"/>
                                         <p:tgtEl>
                                           <p:spTgt spid="70"/>
                                         </p:tgtEl>
@@ -7203,14 +7351,14 @@
                 </p:childTnLst>
               </p:cTn>
               <p:prevCondLst>
-                <p:cond evt="onPrev">
+                <p:cond evt="onPrev" delay="0">
                   <p:tgtEl>
                     <p:sldTgt/>
                   </p:tgtEl>
                 </p:cond>
               </p:prevCondLst>
               <p:nextCondLst>
-                <p:cond evt="onNext">
+                <p:cond evt="onNext" delay="0">
                   <p:tgtEl>
                     <p:sldTgt/>
                   </p:tgtEl>
@@ -7226,11 +7374,11 @@
 </file>
 
 <file path=ppt/slides/slide4.xml><?xml version="1.0" encoding="utf-8"?>
-<p:sld xmlns:a="http://schemas.openxmlformats.org/drawingml/2006/main" xmlns:r="http://schemas.openxmlformats.org/officeDocument/2006/relationships" xmlns:mc="http://schemas.openxmlformats.org/markup-compatibility/2006" xmlns:mv="urn:schemas-microsoft-com:mac:vml" xmlns:p="http://schemas.openxmlformats.org/presentationml/2006/main" xmlns:c="http://schemas.openxmlformats.org/drawingml/2006/chart" xmlns:dgm="http://schemas.openxmlformats.org/drawingml/2006/diagram" xmlns:o="urn:schemas-microsoft-com:office:office" xmlns:v="urn:schemas-microsoft-com:vml" xmlns:pvml="urn:schemas-microsoft-com:office:powerpoint" xmlns:com="http://schemas.openxmlformats.org/drawingml/2006/compatibility" xmlns:p14="http://schemas.microsoft.com/office/powerpoint/2010/main" xmlns:p15="http://schemas.microsoft.com/office/powerpoint/2012/main" xmlns:ahyp="http://schemas.microsoft.com/office/drawing/2018/hyperlinkcolor">
+<p:sld xmlns:a="http://schemas.openxmlformats.org/drawingml/2006/main" xmlns:r="http://schemas.openxmlformats.org/officeDocument/2006/relationships" xmlns:p="http://schemas.openxmlformats.org/presentationml/2006/main">
   <p:cSld>
     <p:spTree>
       <p:nvGrpSpPr>
-        <p:cNvPr id="74" name="Shape 74"/>
+        <p:cNvPr id="1" name="Shape 74"/>
         <p:cNvGrpSpPr/>
         <p:nvPr/>
       </p:nvGrpSpPr>
@@ -7245,7 +7393,9 @@
       <p:sp>
         <p:nvSpPr>
           <p:cNvPr id="75" name="Google Shape;75;p16"/>
-          <p:cNvSpPr txBox="1"/>
+          <p:cNvSpPr txBox="1">
+            <a:spLocks noGrp="1"/>
+          </p:cNvSpPr>
           <p:nvPr>
             <p:ph type="title"/>
           </p:nvPr>
@@ -7260,12 +7410,12 @@
           </a:prstGeom>
         </p:spPr>
         <p:txBody>
-          <a:bodyPr anchorCtr="0" anchor="t" bIns="91425" lIns="91425" spcFirstLastPara="1" rIns="91425" wrap="square" tIns="91425">
+          <a:bodyPr spcFirstLastPara="1" wrap="square" lIns="91425" tIns="91425" rIns="91425" bIns="91425" anchor="t" anchorCtr="0">
             <a:normAutofit fontScale="90000"/>
           </a:bodyPr>
           <a:lstStyle/>
           <a:p>
-            <a:pPr indent="0" lvl="0" marL="0" rtl="0" algn="l">
+            <a:pPr marL="0" lvl="0" indent="0" algn="l" rtl="0">
               <a:spcBef>
                 <a:spcPts val="0"/>
               </a:spcBef>
@@ -7275,19 +7425,21 @@
               <a:buNone/>
             </a:pPr>
             <a:r>
-              <a:rPr lang="en"/>
+              <a:rPr lang="en" dirty="0"/>
               <a:t>CSSI Activity</a:t>
             </a:r>
-            <a:endParaRPr/>
+            <a:endParaRPr dirty="0"/>
           </a:p>
         </p:txBody>
       </p:sp>
       <p:sp>
         <p:nvSpPr>
           <p:cNvPr id="76" name="Google Shape;76;p16"/>
-          <p:cNvSpPr txBox="1"/>
+          <p:cNvSpPr txBox="1">
+            <a:spLocks noGrp="1"/>
+          </p:cNvSpPr>
           <p:nvPr>
-            <p:ph idx="1" type="body"/>
+            <p:ph type="body" idx="1"/>
           </p:nvPr>
         </p:nvSpPr>
         <p:spPr>
@@ -7300,12 +7452,12 @@
           </a:prstGeom>
         </p:spPr>
         <p:txBody>
-          <a:bodyPr anchorCtr="0" anchor="t" bIns="91425" lIns="91425" spcFirstLastPara="1" rIns="91425" wrap="square" tIns="91425">
+          <a:bodyPr spcFirstLastPara="1" wrap="square" lIns="91425" tIns="91425" rIns="91425" bIns="91425" anchor="t" anchorCtr="0">
             <a:normAutofit/>
           </a:bodyPr>
           <a:lstStyle/>
           <a:p>
-            <a:pPr indent="0" lvl="0" marL="0" rtl="0" algn="l">
+            <a:pPr marL="0" lvl="0" indent="0" algn="l" rtl="0">
               <a:spcBef>
                 <a:spcPts val="0"/>
               </a:spcBef>
@@ -7315,13 +7467,13 @@
               <a:buNone/>
             </a:pPr>
             <a:r>
-              <a:rPr lang="en"/>
+              <a:rPr lang="en" dirty="0"/>
               <a:t>Some of the buildings of the Norman Sicilians are still around today.</a:t>
             </a:r>
-            <a:endParaRPr/>
+            <a:endParaRPr dirty="0"/>
           </a:p>
           <a:p>
-            <a:pPr indent="0" lvl="0" marL="0" rtl="0" algn="l">
+            <a:pPr marL="0" lvl="0" indent="0" algn="l" rtl="0">
               <a:spcBef>
                 <a:spcPts val="1200"/>
               </a:spcBef>
@@ -7331,13 +7483,13 @@
               <a:buNone/>
             </a:pPr>
             <a:r>
-              <a:rPr lang="en"/>
+              <a:rPr lang="en" dirty="0"/>
               <a:t>Activity: Assess the image on the next slide. Use the scoring sheet through the provided link to complete the assessment. </a:t>
             </a:r>
-            <a:endParaRPr/>
+            <a:endParaRPr dirty="0"/>
           </a:p>
           <a:p>
-            <a:pPr indent="0" lvl="0" marL="0" rtl="0" algn="l">
+            <a:pPr marL="0" lvl="0" indent="0" algn="l" rtl="0">
               <a:spcBef>
                 <a:spcPts val="1200"/>
               </a:spcBef>
@@ -7347,11 +7499,11 @@
               <a:buNone/>
             </a:pPr>
             <a:r>
-              <a:rPr lang="en"/>
+              <a:rPr lang="en" dirty="0"/>
               <a:t>Scoring sheet: </a:t>
             </a:r>
             <a:r>
-              <a:rPr lang="en" sz="1500" u="sng">
+              <a:rPr lang="en" sz="1500" u="sng" dirty="0">
                 <a:solidFill>
                   <a:schemeClr val="hlink"/>
                 </a:solidFill>
@@ -7363,10 +7515,10 @@
               </a:rPr>
               <a:t>http://normansicily.org/pdfs/cultural_stone_stability_index.pdf</a:t>
             </a:r>
-            <a:endParaRPr sz="2100"/>
+            <a:endParaRPr sz="2100" dirty="0"/>
           </a:p>
           <a:p>
-            <a:pPr indent="0" lvl="0" marL="0" rtl="0" algn="l">
+            <a:pPr marL="0" lvl="0" indent="0" algn="l" rtl="0">
               <a:spcBef>
                 <a:spcPts val="1200"/>
               </a:spcBef>
@@ -7375,10 +7527,7 @@
               </a:spcAft>
               <a:buNone/>
             </a:pPr>
-            <a:r>
-              <a:t/>
-            </a:r>
-            <a:endParaRPr sz="2100"/>
+            <a:endParaRPr sz="2100" dirty="0"/>
           </a:p>
         </p:txBody>
       </p:sp>
@@ -7390,32 +7539,32 @@
   <p:timing>
     <p:tnLst>
       <p:par>
-        <p:cTn dur="indefinite" nodeType="tmRoot" restart="never">
+        <p:cTn id="1" dur="indefinite" restart="never" nodeType="tmRoot">
           <p:childTnLst>
             <p:seq concurrent="1" nextAc="seek">
-              <p:cTn dur="indefinite" id="2" nodeType="mainSeq">
+              <p:cTn id="2" dur="indefinite" nodeType="mainSeq">
                 <p:childTnLst>
                   <p:par>
-                    <p:cTn fill="hold">
+                    <p:cTn id="3" fill="hold">
                       <p:stCondLst>
                         <p:cond delay="indefinite"/>
                       </p:stCondLst>
                       <p:childTnLst>
                         <p:par>
-                          <p:cTn fill="hold">
+                          <p:cTn id="4" fill="hold">
                             <p:stCondLst>
                               <p:cond delay="0"/>
                             </p:stCondLst>
                             <p:childTnLst>
                               <p:par>
-                                <p:cTn fill="hold" nodeType="clickEffect" presetClass="entr" presetID="10" presetSubtype="0">
+                                <p:cTn id="5" presetID="10" presetClass="entr" presetSubtype="0" fill="hold" nodeType="clickEffect">
                                   <p:stCondLst>
                                     <p:cond delay="0"/>
                                   </p:stCondLst>
                                   <p:childTnLst>
                                     <p:set>
                                       <p:cBhvr>
-                                        <p:cTn dur="1" fill="hold">
+                                        <p:cTn id="6" dur="1" fill="hold">
                                           <p:stCondLst>
                                             <p:cond delay="0"/>
                                           </p:stCondLst>
@@ -7431,9 +7580,9 @@
                                         <p:strVal val="visible"/>
                                       </p:to>
                                     </p:set>
-                                    <p:animEffect filter="fade" transition="in">
+                                    <p:animEffect transition="in" filter="fade">
                                       <p:cBhvr>
-                                        <p:cTn dur="1000"/>
+                                        <p:cTn id="7" dur="1000"/>
                                         <p:tgtEl>
                                           <p:spTgt spid="76"/>
                                         </p:tgtEl>
@@ -7451,14 +7600,14 @@
                 </p:childTnLst>
               </p:cTn>
               <p:prevCondLst>
-                <p:cond evt="onPrev">
+                <p:cond evt="onPrev" delay="0">
                   <p:tgtEl>
                     <p:sldTgt/>
                   </p:tgtEl>
                 </p:cond>
               </p:prevCondLst>
               <p:nextCondLst>
-                <p:cond evt="onNext">
+                <p:cond evt="onNext" delay="0">
                   <p:tgtEl>
                     <p:sldTgt/>
                   </p:tgtEl>
@@ -7474,11 +7623,11 @@
 </file>
 
 <file path=ppt/slides/slide5.xml><?xml version="1.0" encoding="utf-8"?>
-<p:sld xmlns:a="http://schemas.openxmlformats.org/drawingml/2006/main" xmlns:r="http://schemas.openxmlformats.org/officeDocument/2006/relationships" xmlns:mc="http://schemas.openxmlformats.org/markup-compatibility/2006" xmlns:mv="urn:schemas-microsoft-com:mac:vml" xmlns:p="http://schemas.openxmlformats.org/presentationml/2006/main" xmlns:c="http://schemas.openxmlformats.org/drawingml/2006/chart" xmlns:dgm="http://schemas.openxmlformats.org/drawingml/2006/diagram" xmlns:o="urn:schemas-microsoft-com:office:office" xmlns:v="urn:schemas-microsoft-com:vml" xmlns:pvml="urn:schemas-microsoft-com:office:powerpoint" xmlns:com="http://schemas.openxmlformats.org/drawingml/2006/compatibility" xmlns:p14="http://schemas.microsoft.com/office/powerpoint/2010/main" xmlns:p15="http://schemas.microsoft.com/office/powerpoint/2012/main" xmlns:ahyp="http://schemas.microsoft.com/office/drawing/2018/hyperlinkcolor">
+<p:sld xmlns:a="http://schemas.openxmlformats.org/drawingml/2006/main" xmlns:r="http://schemas.openxmlformats.org/officeDocument/2006/relationships" xmlns:p="http://schemas.openxmlformats.org/presentationml/2006/main">
   <p:cSld>
     <p:spTree>
       <p:nvGrpSpPr>
-        <p:cNvPr id="80" name="Shape 80"/>
+        <p:cNvPr id="1" name="Shape 80"/>
         <p:cNvGrpSpPr/>
         <p:nvPr/>
       </p:nvGrpSpPr>
@@ -7490,56 +7639,6 @@
           <a:chExt cx="0" cy="0"/>
         </a:xfrm>
       </p:grpSpPr>
-      <p:sp>
-        <p:nvSpPr>
-          <p:cNvPr id="81" name="Google Shape;81;p17"/>
-          <p:cNvSpPr txBox="1"/>
-          <p:nvPr/>
-        </p:nvSpPr>
-        <p:spPr>
-          <a:xfrm>
-            <a:off x="1007225" y="174575"/>
-            <a:ext cx="7198200" cy="461700"/>
-          </a:xfrm>
-          <a:prstGeom prst="rect">
-            <a:avLst/>
-          </a:prstGeom>
-          <a:noFill/>
-          <a:ln>
-            <a:noFill/>
-          </a:ln>
-        </p:spPr>
-        <p:txBody>
-          <a:bodyPr anchorCtr="0" anchor="t" bIns="91425" lIns="91425" spcFirstLastPara="1" rIns="91425" wrap="square" tIns="91425">
-            <a:spAutoFit/>
-          </a:bodyPr>
-          <a:lstStyle/>
-          <a:p>
-            <a:pPr indent="0" lvl="0" marL="0" rtl="0" algn="ctr">
-              <a:spcBef>
-                <a:spcPts val="0"/>
-              </a:spcBef>
-              <a:spcAft>
-                <a:spcPts val="0"/>
-              </a:spcAft>
-              <a:buNone/>
-            </a:pPr>
-            <a:r>
-              <a:rPr lang="en" sz="1800">
-                <a:solidFill>
-                  <a:schemeClr val="dk1"/>
-                </a:solidFill>
-              </a:rPr>
-              <a:t>Santa Maria di Campogrosso - Brick Ruins</a:t>
-            </a:r>
-            <a:endParaRPr sz="1800">
-              <a:solidFill>
-                <a:schemeClr val="dk1"/>
-              </a:solidFill>
-            </a:endParaRPr>
-          </a:p>
-        </p:txBody>
-      </p:sp>
       <p:pic>
         <p:nvPicPr>
           <p:cNvPr id="82" name="Google Shape;82;p17"/>
@@ -7568,6 +7667,70 @@
           </a:ln>
         </p:spPr>
       </p:pic>
+      <p:sp>
+        <p:nvSpPr>
+          <p:cNvPr id="4" name="Google Shape;87;p18">
+            <a:extLst>
+              <a:ext uri="{FF2B5EF4-FFF2-40B4-BE49-F238E27FC236}">
+                <a16:creationId xmlns:a16="http://schemas.microsoft.com/office/drawing/2014/main" id="{D920EB0D-2BBF-FBAC-4404-20F99566876B}"/>
+              </a:ext>
+            </a:extLst>
+          </p:cNvPr>
+          <p:cNvSpPr txBox="1">
+            <a:spLocks noGrp="1"/>
+          </p:cNvSpPr>
+          <p:nvPr>
+            <p:ph type="title"/>
+          </p:nvPr>
+        </p:nvSpPr>
+        <p:spPr>
+          <a:xfrm>
+            <a:off x="311700" y="174683"/>
+            <a:ext cx="8520600" cy="572700"/>
+          </a:xfrm>
+          <a:prstGeom prst="rect">
+            <a:avLst/>
+          </a:prstGeom>
+        </p:spPr>
+        <p:txBody>
+          <a:bodyPr spcFirstLastPara="1" wrap="square" lIns="91425" tIns="91425" rIns="91425" bIns="91425" anchor="t" anchorCtr="0">
+            <a:normAutofit fontScale="90000"/>
+          </a:bodyPr>
+          <a:lstStyle/>
+          <a:p>
+            <a:pPr lvl="0" algn="ctr"/>
+            <a:r>
+              <a:rPr lang="en" dirty="0">
+                <a:solidFill>
+                  <a:schemeClr val="tx1"/>
+                </a:solidFill>
+              </a:rPr>
+              <a:t>Santa Maria di </a:t>
+            </a:r>
+            <a:r>
+              <a:rPr lang="en" dirty="0" err="1">
+                <a:solidFill>
+                  <a:schemeClr val="tx1"/>
+                </a:solidFill>
+              </a:rPr>
+              <a:t>Campogrosso</a:t>
+            </a:r>
+            <a:r>
+              <a:rPr lang="en" dirty="0">
+                <a:solidFill>
+                  <a:schemeClr val="tx1"/>
+                </a:solidFill>
+              </a:rPr>
+              <a:t> – Brick Ruins</a:t>
+            </a:r>
+            <a:endParaRPr dirty="0">
+              <a:solidFill>
+                <a:schemeClr val="tx1"/>
+              </a:solidFill>
+            </a:endParaRPr>
+          </a:p>
+        </p:txBody>
+      </p:sp>
     </p:spTree>
   </p:cSld>
   <p:clrMapOvr>
@@ -7577,11 +7740,11 @@
 </file>
 
 <file path=ppt/slides/slide6.xml><?xml version="1.0" encoding="utf-8"?>
-<p:sld xmlns:a="http://schemas.openxmlformats.org/drawingml/2006/main" xmlns:r="http://schemas.openxmlformats.org/officeDocument/2006/relationships" xmlns:mc="http://schemas.openxmlformats.org/markup-compatibility/2006" xmlns:mv="urn:schemas-microsoft-com:mac:vml" xmlns:p="http://schemas.openxmlformats.org/presentationml/2006/main" xmlns:c="http://schemas.openxmlformats.org/drawingml/2006/chart" xmlns:dgm="http://schemas.openxmlformats.org/drawingml/2006/diagram" xmlns:o="urn:schemas-microsoft-com:office:office" xmlns:v="urn:schemas-microsoft-com:vml" xmlns:pvml="urn:schemas-microsoft-com:office:powerpoint" xmlns:com="http://schemas.openxmlformats.org/drawingml/2006/compatibility" xmlns:p14="http://schemas.microsoft.com/office/powerpoint/2010/main" xmlns:p15="http://schemas.microsoft.com/office/powerpoint/2012/main" xmlns:ahyp="http://schemas.microsoft.com/office/drawing/2018/hyperlinkcolor">
+<p:sld xmlns:a="http://schemas.openxmlformats.org/drawingml/2006/main" xmlns:r="http://schemas.openxmlformats.org/officeDocument/2006/relationships" xmlns:p="http://schemas.openxmlformats.org/presentationml/2006/main">
   <p:cSld>
     <p:spTree>
       <p:nvGrpSpPr>
-        <p:cNvPr id="86" name="Shape 86"/>
+        <p:cNvPr id="1" name="Shape 86"/>
         <p:cNvGrpSpPr/>
         <p:nvPr/>
       </p:nvGrpSpPr>
@@ -7596,7 +7759,9 @@
       <p:sp>
         <p:nvSpPr>
           <p:cNvPr id="87" name="Google Shape;87;p18"/>
-          <p:cNvSpPr txBox="1"/>
+          <p:cNvSpPr txBox="1">
+            <a:spLocks noGrp="1"/>
+          </p:cNvSpPr>
           <p:nvPr>
             <p:ph type="title"/>
           </p:nvPr>
@@ -7611,12 +7776,12 @@
           </a:prstGeom>
         </p:spPr>
         <p:txBody>
-          <a:bodyPr anchorCtr="0" anchor="t" bIns="91425" lIns="91425" spcFirstLastPara="1" rIns="91425" wrap="square" tIns="91425">
+          <a:bodyPr spcFirstLastPara="1" wrap="square" lIns="91425" tIns="91425" rIns="91425" bIns="91425" anchor="t" anchorCtr="0">
             <a:normAutofit fontScale="90000"/>
           </a:bodyPr>
           <a:lstStyle/>
           <a:p>
-            <a:pPr indent="0" lvl="0" marL="0" rtl="0" algn="l">
+            <a:pPr marL="0" lvl="0" indent="0" algn="l" rtl="0">
               <a:spcBef>
                 <a:spcPts val="0"/>
               </a:spcBef>
@@ -7626,19 +7791,21 @@
               <a:buNone/>
             </a:pPr>
             <a:r>
-              <a:rPr lang="en"/>
+              <a:rPr lang="en" dirty="0"/>
               <a:t>Discussion on CSSI</a:t>
             </a:r>
-            <a:endParaRPr/>
+            <a:endParaRPr dirty="0"/>
           </a:p>
         </p:txBody>
       </p:sp>
       <p:sp>
         <p:nvSpPr>
           <p:cNvPr id="88" name="Google Shape;88;p18"/>
-          <p:cNvSpPr txBox="1"/>
+          <p:cNvSpPr txBox="1">
+            <a:spLocks noGrp="1"/>
+          </p:cNvSpPr>
           <p:nvPr>
-            <p:ph idx="1" type="body"/>
+            <p:ph type="body" idx="1"/>
           </p:nvPr>
         </p:nvSpPr>
         <p:spPr>
@@ -7651,12 +7818,12 @@
           </a:prstGeom>
         </p:spPr>
         <p:txBody>
-          <a:bodyPr anchorCtr="0" anchor="t" bIns="91425" lIns="91425" spcFirstLastPara="1" rIns="91425" wrap="square" tIns="91425">
+          <a:bodyPr spcFirstLastPara="1" wrap="square" lIns="91425" tIns="91425" rIns="91425" bIns="91425" anchor="t" anchorCtr="0">
             <a:normAutofit/>
           </a:bodyPr>
           <a:lstStyle/>
           <a:p>
-            <a:pPr indent="0" lvl="0" marL="0" rtl="0" algn="l">
+            <a:pPr marL="0" lvl="0" indent="0" algn="l" rtl="0">
               <a:spcBef>
                 <a:spcPts val="0"/>
               </a:spcBef>
@@ -7666,13 +7833,13 @@
               <a:buNone/>
             </a:pPr>
             <a:r>
-              <a:rPr lang="en"/>
+              <a:rPr lang="en" dirty="0"/>
               <a:t>What physical observations can you make about the structure?</a:t>
             </a:r>
-            <a:endParaRPr/>
+            <a:endParaRPr dirty="0"/>
           </a:p>
           <a:p>
-            <a:pPr indent="0" lvl="0" marL="0" rtl="0" algn="l">
+            <a:pPr marL="0" lvl="0" indent="0" algn="l" rtl="0">
               <a:spcBef>
                 <a:spcPts val="1200"/>
               </a:spcBef>
@@ -7682,13 +7849,25 @@
               <a:buNone/>
             </a:pPr>
             <a:r>
-              <a:rPr lang="en"/>
-              <a:t>What Overall score did you give it? Why?</a:t>
+              <a:rPr lang="en" dirty="0"/>
+              <a:t>What overall score did you give it? Why?</a:t>
             </a:r>
-            <a:endParaRPr/>
+            <a:endParaRPr dirty="0"/>
           </a:p>
           <a:p>
-            <a:pPr indent="0" lvl="0" marL="0" rtl="0" algn="l">
+            <a:pPr marL="0" lvl="0" indent="0" algn="l" rtl="0">
+              <a:spcBef>
+                <a:spcPts val="1200"/>
+              </a:spcBef>
+              <a:spcAft>
+                <a:spcPts val="0"/>
+              </a:spcAft>
+              <a:buNone/>
+            </a:pPr>
+            <a:endParaRPr dirty="0"/>
+          </a:p>
+          <a:p>
+            <a:pPr marL="0" lvl="0" indent="0" algn="l" rtl="0">
               <a:spcBef>
                 <a:spcPts val="1200"/>
               </a:spcBef>
@@ -7698,12 +7877,12 @@
               <a:buNone/>
             </a:pPr>
             <a:r>
-              <a:t/>
+              <a:rPr lang="en" dirty="0"/>
+              <a:t>End of lesson question: (Make a copy and share it)</a:t>
             </a:r>
-            <a:endParaRPr/>
           </a:p>
           <a:p>
-            <a:pPr indent="0" lvl="0" marL="0" rtl="0" algn="l">
+            <a:pPr marL="0" lvl="0" indent="0" algn="l" rtl="0">
               <a:spcBef>
                 <a:spcPts val="1200"/>
               </a:spcBef>
@@ -7713,35 +7892,16 @@
               <a:buNone/>
             </a:pPr>
             <a:r>
-              <a:rPr lang="en"/>
-              <a:t>End of lesson question: (Make a copy and share it)</a:t>
+              <a:rPr lang="en" dirty="0"/>
+              <a:t>Click </a:t>
             </a:r>
-            <a:endParaRPr/>
-          </a:p>
-          <a:p>
-            <a:pPr indent="0" lvl="0" marL="0" rtl="0" algn="l">
-              <a:spcBef>
-                <a:spcPts val="1200"/>
-              </a:spcBef>
-              <a:spcAft>
-                <a:spcPts val="1200"/>
-              </a:spcAft>
-              <a:buNone/>
-            </a:pPr>
             <a:r>
-              <a:rPr lang="en" u="sng">
-                <a:solidFill>
-                  <a:schemeClr val="hlink"/>
-                </a:solidFill>
+              <a:rPr lang="en" dirty="0">
                 <a:hlinkClick r:id="rId3"/>
               </a:rPr>
-              <a:t>https://docs.google.com/document/d/1G8q1kWIlAj19NS0lZM1I5tb7ZNHOAkwIGqdOhWQgXFM/edit</a:t>
+              <a:t>here</a:t>
             </a:r>
-            <a:r>
-              <a:rPr lang="en"/>
-              <a:t> </a:t>
-            </a:r>
-            <a:endParaRPr/>
+            <a:endParaRPr dirty="0"/>
           </a:p>
         </p:txBody>
       </p:sp>
@@ -7753,32 +7913,32 @@
   <p:timing>
     <p:tnLst>
       <p:par>
-        <p:cTn dur="indefinite" nodeType="tmRoot" restart="never">
+        <p:cTn id="1" dur="indefinite" restart="never" nodeType="tmRoot">
           <p:childTnLst>
             <p:seq concurrent="1" nextAc="seek">
-              <p:cTn dur="indefinite" id="2" nodeType="mainSeq">
+              <p:cTn id="2" dur="indefinite" nodeType="mainSeq">
                 <p:childTnLst>
                   <p:par>
-                    <p:cTn fill="hold">
+                    <p:cTn id="3" fill="hold">
                       <p:stCondLst>
                         <p:cond delay="indefinite"/>
                       </p:stCondLst>
                       <p:childTnLst>
                         <p:par>
-                          <p:cTn fill="hold">
+                          <p:cTn id="4" fill="hold">
                             <p:stCondLst>
                               <p:cond delay="0"/>
                             </p:stCondLst>
                             <p:childTnLst>
                               <p:par>
-                                <p:cTn fill="hold" nodeType="clickEffect" presetClass="entr" presetID="10" presetSubtype="0">
+                                <p:cTn id="5" presetID="10" presetClass="entr" presetSubtype="0" fill="hold" nodeType="clickEffect">
                                   <p:stCondLst>
                                     <p:cond delay="0"/>
                                   </p:stCondLst>
                                   <p:childTnLst>
                                     <p:set>
                                       <p:cBhvr>
-                                        <p:cTn dur="1" fill="hold">
+                                        <p:cTn id="6" dur="1" fill="hold">
                                           <p:stCondLst>
                                             <p:cond delay="0"/>
                                           </p:stCondLst>
@@ -7794,9 +7954,9 @@
                                         <p:strVal val="visible"/>
                                       </p:to>
                                     </p:set>
-                                    <p:animEffect filter="fade" transition="in">
+                                    <p:animEffect transition="in" filter="fade">
                                       <p:cBhvr>
-                                        <p:cTn dur="1000"/>
+                                        <p:cTn id="7" dur="1000"/>
                                         <p:tgtEl>
                                           <p:spTgt spid="88"/>
                                         </p:tgtEl>
@@ -7814,14 +7974,14 @@
                 </p:childTnLst>
               </p:cTn>
               <p:prevCondLst>
-                <p:cond evt="onPrev">
+                <p:cond evt="onPrev" delay="0">
                   <p:tgtEl>
                     <p:sldTgt/>
                   </p:tgtEl>
                 </p:cond>
               </p:prevCondLst>
               <p:nextCondLst>
-                <p:cond evt="onNext">
+                <p:cond evt="onNext" delay="0">
                   <p:tgtEl>
                     <p:sldTgt/>
                   </p:tgtEl>
@@ -7837,11 +7997,11 @@
 </file>
 
 <file path=ppt/slides/slide7.xml><?xml version="1.0" encoding="utf-8"?>
-<p:sld xmlns:a="http://schemas.openxmlformats.org/drawingml/2006/main" xmlns:r="http://schemas.openxmlformats.org/officeDocument/2006/relationships" xmlns:mc="http://schemas.openxmlformats.org/markup-compatibility/2006" xmlns:mv="urn:schemas-microsoft-com:mac:vml" xmlns:p="http://schemas.openxmlformats.org/presentationml/2006/main" xmlns:c="http://schemas.openxmlformats.org/drawingml/2006/chart" xmlns:dgm="http://schemas.openxmlformats.org/drawingml/2006/diagram" xmlns:o="urn:schemas-microsoft-com:office:office" xmlns:v="urn:schemas-microsoft-com:vml" xmlns:pvml="urn:schemas-microsoft-com:office:powerpoint" xmlns:com="http://schemas.openxmlformats.org/drawingml/2006/compatibility" xmlns:p14="http://schemas.microsoft.com/office/powerpoint/2010/main" xmlns:p15="http://schemas.microsoft.com/office/powerpoint/2012/main" xmlns:ahyp="http://schemas.microsoft.com/office/drawing/2018/hyperlinkcolor">
+<p:sld xmlns:a="http://schemas.openxmlformats.org/drawingml/2006/main" xmlns:r="http://schemas.openxmlformats.org/officeDocument/2006/relationships" xmlns:p="http://schemas.openxmlformats.org/presentationml/2006/main">
   <p:cSld>
     <p:spTree>
       <p:nvGrpSpPr>
-        <p:cNvPr id="92" name="Shape 92"/>
+        <p:cNvPr id="1" name="Shape 92"/>
         <p:cNvGrpSpPr/>
         <p:nvPr/>
       </p:nvGrpSpPr>
@@ -7856,7 +8016,9 @@
       <p:sp>
         <p:nvSpPr>
           <p:cNvPr id="93" name="Google Shape;93;p19"/>
-          <p:cNvSpPr txBox="1"/>
+          <p:cNvSpPr txBox="1">
+            <a:spLocks noGrp="1"/>
+          </p:cNvSpPr>
           <p:nvPr>
             <p:ph type="title"/>
           </p:nvPr>
@@ -7871,12 +8033,12 @@
           </a:prstGeom>
         </p:spPr>
         <p:txBody>
-          <a:bodyPr anchorCtr="0" anchor="t" bIns="91425" lIns="91425" spcFirstLastPara="1" rIns="91425" wrap="square" tIns="91425">
+          <a:bodyPr spcFirstLastPara="1" wrap="square" lIns="91425" tIns="91425" rIns="91425" bIns="91425" anchor="t" anchorCtr="0">
             <a:normAutofit fontScale="90000"/>
           </a:bodyPr>
           <a:lstStyle/>
           <a:p>
-            <a:pPr indent="0" lvl="0" marL="0" rtl="0" algn="l">
+            <a:pPr marL="0" lvl="0" indent="0" algn="l" rtl="0">
               <a:spcBef>
                 <a:spcPts val="0"/>
               </a:spcBef>
@@ -7896,9 +8058,11 @@
       <p:sp>
         <p:nvSpPr>
           <p:cNvPr id="94" name="Google Shape;94;p19"/>
-          <p:cNvSpPr txBox="1"/>
+          <p:cNvSpPr txBox="1">
+            <a:spLocks noGrp="1"/>
+          </p:cNvSpPr>
           <p:nvPr>
-            <p:ph idx="1" type="body"/>
+            <p:ph type="body" idx="1"/>
           </p:nvPr>
         </p:nvSpPr>
         <p:spPr>
@@ -7911,12 +8075,12 @@
           </a:prstGeom>
         </p:spPr>
         <p:txBody>
-          <a:bodyPr anchorCtr="0" anchor="t" bIns="91425" lIns="91425" spcFirstLastPara="1" rIns="91425" wrap="square" tIns="91425">
+          <a:bodyPr spcFirstLastPara="1" wrap="square" lIns="91425" tIns="91425" rIns="91425" bIns="91425" anchor="t" anchorCtr="0">
             <a:noAutofit/>
           </a:bodyPr>
           <a:lstStyle/>
           <a:p>
-            <a:pPr indent="0" lvl="0" marL="0" rtl="0" algn="l">
+            <a:pPr marL="0" lvl="0" indent="0" algn="l" rtl="0">
               <a:lnSpc>
                 <a:spcPct val="100000"/>
               </a:lnSpc>
@@ -7929,21 +8093,21 @@
               <a:buNone/>
             </a:pPr>
             <a:r>
-              <a:rPr lang="en">
+              <a:rPr lang="en" dirty="0">
                 <a:solidFill>
                   <a:srgbClr val="999999"/>
                 </a:solidFill>
               </a:rPr>
               <a:t>CSSI information source:</a:t>
             </a:r>
-            <a:endParaRPr>
+            <a:endParaRPr dirty="0">
               <a:solidFill>
                 <a:srgbClr val="999999"/>
               </a:solidFill>
             </a:endParaRPr>
           </a:p>
           <a:p>
-            <a:pPr indent="0" lvl="0" marL="355600" rtl="0" algn="l">
+            <a:pPr marL="355600" lvl="0" indent="0" algn="l" rtl="0">
               <a:lnSpc>
                 <a:spcPct val="100000"/>
               </a:lnSpc>
@@ -7956,7 +8120,7 @@
               <a:buNone/>
             </a:pPr>
             <a:r>
-              <a:rPr lang="en">
+              <a:rPr lang="en" dirty="0">
                 <a:solidFill>
                   <a:srgbClr val="999999"/>
                 </a:solidFill>
@@ -7964,7 +8128,7 @@
               <a:t>SHR Alliance. “CSSI: Stone Heritage Research Alliance LLC.” </a:t>
             </a:r>
             <a:r>
-              <a:rPr i="1" lang="en">
+              <a:rPr lang="en" i="1" dirty="0" err="1">
                 <a:solidFill>
                   <a:srgbClr val="999999"/>
                 </a:solidFill>
@@ -7972,21 +8136,53 @@
               <a:t>StoneHeritage</a:t>
             </a:r>
             <a:r>
-              <a:rPr lang="en">
+              <a:rPr lang="en" dirty="0">
                 <a:solidFill>
                   <a:srgbClr val="999999"/>
                 </a:solidFill>
               </a:rPr>
-              <a:t>, 2019, https://www.shralliance.com/cssi. </a:t>
+              <a:t>, 2019, https://</a:t>
             </a:r>
-            <a:endParaRPr>
+            <a:r>
+              <a:rPr lang="en" dirty="0" err="1">
+                <a:solidFill>
+                  <a:srgbClr val="999999"/>
+                </a:solidFill>
+              </a:rPr>
+              <a:t>www.shralliance.com</a:t>
+            </a:r>
+            <a:r>
+              <a:rPr lang="en" dirty="0">
+                <a:solidFill>
+                  <a:srgbClr val="999999"/>
+                </a:solidFill>
+              </a:rPr>
+              <a:t>/</a:t>
+            </a:r>
+            <a:r>
+              <a:rPr lang="en" dirty="0" err="1">
+                <a:solidFill>
+                  <a:srgbClr val="999999"/>
+                </a:solidFill>
+              </a:rPr>
+              <a:t>cssi</a:t>
+            </a:r>
+            <a:r>
+              <a:rPr lang="en" dirty="0">
+                <a:solidFill>
+                  <a:srgbClr val="999999"/>
+                </a:solidFill>
+              </a:rPr>
+              <a:t>. </a:t>
+            </a:r>
+            <a:endParaRPr dirty="0">
               <a:solidFill>
                 <a:srgbClr val="999999"/>
               </a:solidFill>
             </a:endParaRPr>
           </a:p>
           <a:p>
-            <a:pPr indent="0" lvl="0" marL="0" rtl="0" algn="l">
+            <a:pPr marL="0" lvl="0" indent="0" algn="l" rtl="0">
               <a:lnSpc>
                 <a:spcPct val="100000"/>
               </a:lnSpc>
@@ -7999,21 +8195,21 @@
               <a:buNone/>
             </a:pPr>
             <a:r>
-              <a:rPr lang="en">
+              <a:rPr lang="en" dirty="0">
                 <a:solidFill>
                   <a:srgbClr val="999999"/>
                 </a:solidFill>
               </a:rPr>
               <a:t>Norman Sicily architecture and Cappella Palatine image source: </a:t>
             </a:r>
-            <a:endParaRPr>
+            <a:endParaRPr dirty="0">
               <a:solidFill>
                 <a:srgbClr val="999999"/>
               </a:solidFill>
             </a:endParaRPr>
           </a:p>
           <a:p>
-            <a:pPr indent="0" lvl="0" marL="355600" rtl="0" algn="l">
+            <a:pPr marL="355600" lvl="0" indent="0" algn="l" rtl="0">
               <a:lnSpc>
                 <a:spcPct val="100000"/>
               </a:lnSpc>
@@ -8026,15 +8222,23 @@
               <a:buNone/>
             </a:pPr>
             <a:r>
-              <a:rPr lang="en">
+              <a:rPr lang="en" dirty="0" err="1">
                 <a:solidFill>
                   <a:srgbClr val="999999"/>
                 </a:solidFill>
               </a:rPr>
-              <a:t>Cotugno, Emily. “The World the Normans Made · VI. Art and Architecture.” </a:t>
+              <a:t>Cotugno</a:t>
             </a:r>
             <a:r>
-              <a:rPr i="1" lang="en">
+              <a:rPr lang="en" dirty="0">
+                <a:solidFill>
+                  <a:srgbClr val="999999"/>
+                </a:solidFill>
+              </a:rPr>
+              <a:t>, Emily. “The World the Normans Made · VI. Art and Architecture.” </a:t>
+            </a:r>
+            <a:r>
+              <a:rPr lang="en" i="1" dirty="0">
                 <a:solidFill>
                   <a:srgbClr val="999999"/>
                 </a:solidFill>
@@ -8042,103 +8246,62 @@
               <a:t>The Norman Sicily Project</a:t>
             </a:r>
             <a:r>
-              <a:rPr lang="en">
+              <a:rPr lang="en" dirty="0">
                 <a:solidFill>
                   <a:srgbClr val="999999"/>
                 </a:solidFill>
               </a:rPr>
-              <a:t>, 1 Sept. 2021, http://normansicily.org/en/resources/learn/group_four/. </a:t>
+              <a:t>, 1 Sept. 2021, http://</a:t>
             </a:r>
-            <a:endParaRPr>
-              <a:solidFill>
-                <a:srgbClr val="999999"/>
-              </a:solidFill>
-            </a:endParaRPr>
-          </a:p>
-          <a:p>
-            <a:pPr indent="0" lvl="0" marL="0" rtl="0" algn="l">
-              <a:lnSpc>
-                <a:spcPct val="100000"/>
-              </a:lnSpc>
-              <a:spcBef>
-                <a:spcPts val="1200"/>
-              </a:spcBef>
-              <a:spcAft>
-                <a:spcPts val="0"/>
-              </a:spcAft>
-              <a:buNone/>
-            </a:pPr>
             <a:r>
-              <a:rPr lang="en">
+              <a:rPr lang="en" dirty="0" err="1">
                 <a:solidFill>
                   <a:srgbClr val="999999"/>
                 </a:solidFill>
               </a:rPr>
-              <a:t>Santa Maria di Campogrosso image: </a:t>
+              <a:t>normansicily.org</a:t>
             </a:r>
-            <a:endParaRPr>
-              <a:solidFill>
-                <a:srgbClr val="999999"/>
-              </a:solidFill>
-            </a:endParaRPr>
-          </a:p>
-          <a:p>
-            <a:pPr indent="0" lvl="0" marL="355600" rtl="0" algn="l">
-              <a:spcBef>
-                <a:spcPts val="1200"/>
-              </a:spcBef>
-              <a:spcAft>
-                <a:spcPts val="0"/>
-              </a:spcAft>
-              <a:buNone/>
-            </a:pPr>
             <a:r>
-              <a:rPr lang="en">
+              <a:rPr lang="en" dirty="0">
                 <a:solidFill>
                   <a:srgbClr val="999999"/>
                 </a:solidFill>
               </a:rPr>
-              <a:t>Dawn, and Christina Giordano. </a:t>
+              <a:t>/</a:t>
             </a:r>
             <a:r>
-              <a:rPr i="1" lang="en">
+              <a:rPr lang="en" dirty="0" err="1">
                 <a:solidFill>
                   <a:srgbClr val="999999"/>
                 </a:solidFill>
               </a:rPr>
-              <a:t>Brick Ruins</a:t>
+              <a:t>en</a:t>
             </a:r>
             <a:r>
-              <a:rPr lang="en">
+              <a:rPr lang="en" dirty="0">
                 <a:solidFill>
                   <a:srgbClr val="999999"/>
                 </a:solidFill>
               </a:rPr>
-              <a:t>. Altavilla Milicia, Sicily, Italy, 5 Aug. 2014. </a:t>
+              <a:t>/resources/learn/</a:t>
             </a:r>
-            <a:endParaRPr>
-              <a:solidFill>
-                <a:srgbClr val="999999"/>
-              </a:solidFill>
-            </a:endParaRPr>
-          </a:p>
-          <a:p>
-            <a:pPr indent="0" lvl="0" marL="0" rtl="0" algn="l">
-              <a:lnSpc>
-                <a:spcPct val="100000"/>
-              </a:lnSpc>
-              <a:spcBef>
-                <a:spcPts val="1200"/>
-              </a:spcBef>
-              <a:spcAft>
-                <a:spcPts val="1200"/>
-              </a:spcAft>
-              <a:buNone/>
-            </a:pPr>
             <a:r>
-              <a:t/>
+              <a:rPr lang="en" dirty="0" err="1">
+                <a:solidFill>
+                  <a:srgbClr val="999999"/>
+                </a:solidFill>
+              </a:rPr>
+              <a:t>group_four</a:t>
             </a:r>
-            <a:endParaRPr>
+            <a:r>
+              <a:rPr lang="en" dirty="0">
+                <a:solidFill>
+                  <a:srgbClr val="999999"/>
+                </a:solidFill>
+              </a:rPr>
+              <a:t>/.  </a:t>
+            </a:r>
+            <a:endParaRPr dirty="0">
               <a:solidFill>
                 <a:srgbClr val="999999"/>
               </a:solidFill>
@@ -8155,7 +8318,288 @@
 </file>
 
 <file path=ppt/theme/theme1.xml><?xml version="1.0" encoding="utf-8"?>
-<a:theme xmlns:a="http://schemas.openxmlformats.org/drawingml/2006/main" xmlns:r="http://schemas.openxmlformats.org/officeDocument/2006/relationships">
+<a:theme xmlns:a="http://schemas.openxmlformats.org/drawingml/2006/main" name="Simple Dark">
+  <a:themeElements>
+    <a:clrScheme name="Simple Dark">
+      <a:dk1>
+        <a:srgbClr val="FFFFFF"/>
+      </a:dk1>
+      <a:lt1>
+        <a:srgbClr val="212121"/>
+      </a:lt1>
+      <a:dk2>
+        <a:srgbClr val="303030"/>
+      </a:dk2>
+      <a:lt2>
+        <a:srgbClr val="ADADAD"/>
+      </a:lt2>
+      <a:accent1>
+        <a:srgbClr val="009688"/>
+      </a:accent1>
+      <a:accent2>
+        <a:srgbClr val="EEEEEE"/>
+      </a:accent2>
+      <a:accent3>
+        <a:srgbClr val="78909C"/>
+      </a:accent3>
+      <a:accent4>
+        <a:srgbClr val="FFAB40"/>
+      </a:accent4>
+      <a:accent5>
+        <a:srgbClr val="4DD0E1"/>
+      </a:accent5>
+      <a:accent6>
+        <a:srgbClr val="EEFF41"/>
+      </a:accent6>
+      <a:hlink>
+        <a:srgbClr val="4DD0E1"/>
+      </a:hlink>
+      <a:folHlink>
+        <a:srgbClr val="4DD0E1"/>
+      </a:folHlink>
+    </a:clrScheme>
+    <a:fontScheme name="Office">
+      <a:majorFont>
+        <a:latin typeface="Arial"/>
+        <a:ea typeface=""/>
+        <a:cs typeface=""/>
+        <a:font script="Jpan" typeface="ＭＳ Ｐゴシック"/>
+        <a:font script="Hang" typeface="맑은 고딕"/>
+        <a:font script="Hans" typeface="宋体"/>
+        <a:font script="Hant" typeface="新細明體"/>
+        <a:font script="Arab" typeface="Times New Roman"/>
+        <a:font script="Hebr" typeface="Times New Roman"/>
+        <a:font script="Thai" typeface="Angsana New"/>
+        <a:font script="Ethi" typeface="Nyala"/>
+        <a:font script="Beng" typeface="Vrinda"/>
+        <a:font script="Gujr" typeface="Shruti"/>
+        <a:font script="Khmr" typeface="MoolBoran"/>
+        <a:font script="Knda" typeface="Tunga"/>
+        <a:font script="Guru" typeface="Raavi"/>
+        <a:font script="Cans" typeface="Euphemia"/>
+        <a:font script="Cher" typeface="Plantagenet Cherokee"/>
+        <a:font script="Yiii" typeface="Microsoft Yi Baiti"/>
+        <a:font script="Tibt" typeface="Microsoft Himalaya"/>
+        <a:font script="Thaa" typeface="MV Boli"/>
+        <a:font script="Deva" typeface="Mangal"/>
+        <a:font script="Telu" typeface="Gautami"/>
+        <a:font script="Taml" typeface="Latha"/>
+        <a:font script="Syrc" typeface="Estrangelo Edessa"/>
+        <a:font script="Orya" typeface="Kalinga"/>
+        <a:font script="Mlym" typeface="Kartika"/>
+        <a:font script="Laoo" typeface="DokChampa"/>
+        <a:font script="Sinh" typeface="Iskoola Pota"/>
+        <a:font script="Mong" typeface="Mongolian Baiti"/>
+        <a:font script="Viet" typeface="Times New Roman"/>
+        <a:font script="Uigh" typeface="Microsoft Uighur"/>
+        <a:font script="Geor" typeface="Sylfaen"/>
+      </a:majorFont>
+      <a:minorFont>
+        <a:latin typeface="Arial"/>
+        <a:ea typeface=""/>
+        <a:cs typeface=""/>
+        <a:font script="Jpan" typeface="ＭＳ Ｐゴシック"/>
+        <a:font script="Hang" typeface="맑은 고딕"/>
+        <a:font script="Hans" typeface="宋体"/>
+        <a:font script="Hant" typeface="新細明體"/>
+        <a:font script="Arab" typeface="Arial"/>
+        <a:font script="Hebr" typeface="Arial"/>
+        <a:font script="Thai" typeface="Cordia New"/>
+        <a:font script="Ethi" typeface="Nyala"/>
+        <a:font script="Beng" typeface="Vrinda"/>
+        <a:font script="Gujr" typeface="Shruti"/>
+        <a:font script="Khmr" typeface="DaunPenh"/>
+        <a:font script="Knda" typeface="Tunga"/>
+        <a:font script="Guru" typeface="Raavi"/>
+        <a:font script="Cans" typeface="Euphemia"/>
+        <a:font script="Cher" typeface="Plantagenet Cherokee"/>
+        <a:font script="Yiii" typeface="Microsoft Yi Baiti"/>
+        <a:font script="Tibt" typeface="Microsoft Himalaya"/>
+        <a:font script="Thaa" typeface="MV Boli"/>
+        <a:font script="Deva" typeface="Mangal"/>
+        <a:font script="Telu" typeface="Gautami"/>
+        <a:font script="Taml" typeface="Latha"/>
+        <a:font script="Syrc" typeface="Estrangelo Edessa"/>
+        <a:font script="Orya" typeface="Kalinga"/>
+        <a:font script="Mlym" typeface="Kartika"/>
+        <a:font script="Laoo" typeface="DokChampa"/>
+        <a:font script="Sinh" typeface="Iskoola Pota"/>
+        <a:font script="Mong" typeface="Mongolian Baiti"/>
+        <a:font script="Viet" typeface="Arial"/>
+        <a:font script="Uigh" typeface="Microsoft Uighur"/>
+        <a:font script="Geor" typeface="Sylfaen"/>
+      </a:minorFont>
+    </a:fontScheme>
+    <a:fmtScheme name="Office">
+      <a:fillStyleLst>
+        <a:solidFill>
+          <a:schemeClr val="phClr"/>
+        </a:solidFill>
+        <a:gradFill rotWithShape="1">
+          <a:gsLst>
+            <a:gs pos="0">
+              <a:schemeClr val="phClr">
+                <a:tint val="50000"/>
+                <a:satMod val="300000"/>
+              </a:schemeClr>
+            </a:gs>
+            <a:gs pos="35000">
+              <a:schemeClr val="phClr">
+                <a:tint val="37000"/>
+                <a:satMod val="300000"/>
+              </a:schemeClr>
+            </a:gs>
+            <a:gs pos="100000">
+              <a:schemeClr val="phClr">
+                <a:tint val="15000"/>
+                <a:satMod val="350000"/>
+              </a:schemeClr>
+            </a:gs>
+          </a:gsLst>
+          <a:lin ang="16200000" scaled="1"/>
+        </a:gradFill>
+        <a:gradFill rotWithShape="1">
+          <a:gsLst>
+            <a:gs pos="0">
+              <a:schemeClr val="phClr">
+                <a:tint val="100000"/>
+                <a:shade val="100000"/>
+                <a:satMod val="130000"/>
+              </a:schemeClr>
+            </a:gs>
+            <a:gs pos="100000">
+              <a:schemeClr val="phClr">
+                <a:tint val="50000"/>
+                <a:shade val="100000"/>
+                <a:satMod val="350000"/>
+              </a:schemeClr>
+            </a:gs>
+          </a:gsLst>
+          <a:lin ang="16200000" scaled="0"/>
+        </a:gradFill>
+      </a:fillStyleLst>
+      <a:lnStyleLst>
+        <a:ln w="9525" cap="flat" cmpd="sng" algn="ctr">
+          <a:solidFill>
+            <a:schemeClr val="phClr">
+              <a:shade val="95000"/>
+              <a:satMod val="105000"/>
+            </a:schemeClr>
+          </a:solidFill>
+          <a:prstDash val="solid"/>
+        </a:ln>
+        <a:ln w="25400" cap="flat" cmpd="sng" algn="ctr">
+          <a:solidFill>
+            <a:schemeClr val="phClr"/>
+          </a:solidFill>
+          <a:prstDash val="solid"/>
+        </a:ln>
+        <a:ln w="38100" cap="flat" cmpd="sng" algn="ctr">
+          <a:solidFill>
+            <a:schemeClr val="phClr"/>
+          </a:solidFill>
+          <a:prstDash val="solid"/>
+        </a:ln>
+      </a:lnStyleLst>
+      <a:effectStyleLst>
+        <a:effectStyle>
+          <a:effectLst>
+            <a:outerShdw blurRad="40000" dist="20000" dir="5400000" rotWithShape="0">
+              <a:srgbClr val="000000">
+                <a:alpha val="38000"/>
+              </a:srgbClr>
+            </a:outerShdw>
+          </a:effectLst>
+        </a:effectStyle>
+        <a:effectStyle>
+          <a:effectLst>
+            <a:outerShdw blurRad="40000" dist="23000" dir="5400000" rotWithShape="0">
+              <a:srgbClr val="000000">
+                <a:alpha val="35000"/>
+              </a:srgbClr>
+            </a:outerShdw>
+          </a:effectLst>
+        </a:effectStyle>
+        <a:effectStyle>
+          <a:effectLst>
+            <a:outerShdw blurRad="40000" dist="23000" dir="5400000" rotWithShape="0">
+              <a:srgbClr val="000000">
+                <a:alpha val="35000"/>
+              </a:srgbClr>
+            </a:outerShdw>
+          </a:effectLst>
+          <a:scene3d>
+            <a:camera prst="orthographicFront">
+              <a:rot lat="0" lon="0" rev="0"/>
+            </a:camera>
+            <a:lightRig rig="threePt" dir="t">
+              <a:rot lat="0" lon="0" rev="1200000"/>
+            </a:lightRig>
+          </a:scene3d>
+          <a:sp3d>
+            <a:bevelT w="63500" h="25400"/>
+          </a:sp3d>
+        </a:effectStyle>
+      </a:effectStyleLst>
+      <a:bgFillStyleLst>
+        <a:solidFill>
+          <a:schemeClr val="phClr"/>
+        </a:solidFill>
+        <a:gradFill rotWithShape="1">
+          <a:gsLst>
+            <a:gs pos="0">
+              <a:schemeClr val="phClr">
+                <a:tint val="40000"/>
+                <a:satMod val="350000"/>
+              </a:schemeClr>
+            </a:gs>
+            <a:gs pos="40000">
+              <a:schemeClr val="phClr">
+                <a:tint val="45000"/>
+                <a:shade val="99000"/>
+                <a:satMod val="350000"/>
+              </a:schemeClr>
+            </a:gs>
+            <a:gs pos="100000">
+              <a:schemeClr val="phClr">
+                <a:shade val="20000"/>
+                <a:satMod val="255000"/>
+              </a:schemeClr>
+            </a:gs>
+          </a:gsLst>
+          <a:path path="circle">
+            <a:fillToRect l="50000" t="-80000" r="50000" b="180000"/>
+          </a:path>
+        </a:gradFill>
+        <a:gradFill rotWithShape="1">
+          <a:gsLst>
+            <a:gs pos="0">
+              <a:schemeClr val="phClr">
+                <a:tint val="80000"/>
+                <a:satMod val="300000"/>
+              </a:schemeClr>
+            </a:gs>
+            <a:gs pos="100000">
+              <a:schemeClr val="phClr">
+                <a:shade val="30000"/>
+                <a:satMod val="200000"/>
+              </a:schemeClr>
+            </a:gs>
+          </a:gsLst>
+          <a:path path="circle">
+            <a:fillToRect l="50000" t="50000" r="50000" b="50000"/>
+          </a:path>
+        </a:gradFill>
+      </a:bgFillStyleLst>
+    </a:fmtScheme>
+  </a:themeElements>
+  <a:objectDefaults/>
+  <a:extraClrSchemeLst/>
+</a:theme>
+</file>
+
+<file path=ppt/theme/theme2.xml><?xml version="1.0" encoding="utf-8"?>
+<a:theme xmlns:a="http://schemas.openxmlformats.org/drawingml/2006/main">
   <a:themeElements>
     <a:clrScheme name="Default">
       <a:dk1>
@@ -8430,284 +8874,7 @@
       </a:bgFillStyleLst>
     </a:fmtScheme>
   </a:themeElements>
-</a:theme>
-</file>
-
-<file path=ppt/theme/theme2.xml><?xml version="1.0" encoding="utf-8"?>
-<a:theme xmlns:a="http://schemas.openxmlformats.org/drawingml/2006/main" xmlns:r="http://schemas.openxmlformats.org/officeDocument/2006/relationships" name="Simple Dark">
-  <a:themeElements>
-    <a:clrScheme name="Simple Dark">
-      <a:dk1>
-        <a:srgbClr val="FFFFFF"/>
-      </a:dk1>
-      <a:lt1>
-        <a:srgbClr val="212121"/>
-      </a:lt1>
-      <a:dk2>
-        <a:srgbClr val="303030"/>
-      </a:dk2>
-      <a:lt2>
-        <a:srgbClr val="ADADAD"/>
-      </a:lt2>
-      <a:accent1>
-        <a:srgbClr val="009688"/>
-      </a:accent1>
-      <a:accent2>
-        <a:srgbClr val="EEEEEE"/>
-      </a:accent2>
-      <a:accent3>
-        <a:srgbClr val="78909C"/>
-      </a:accent3>
-      <a:accent4>
-        <a:srgbClr val="FFAB40"/>
-      </a:accent4>
-      <a:accent5>
-        <a:srgbClr val="4DD0E1"/>
-      </a:accent5>
-      <a:accent6>
-        <a:srgbClr val="EEFF41"/>
-      </a:accent6>
-      <a:hlink>
-        <a:srgbClr val="4DD0E1"/>
-      </a:hlink>
-      <a:folHlink>
-        <a:srgbClr val="4DD0E1"/>
-      </a:folHlink>
-    </a:clrScheme>
-    <a:fontScheme name="Office">
-      <a:majorFont>
-        <a:latin typeface="Arial"/>
-        <a:ea typeface=""/>
-        <a:cs typeface=""/>
-        <a:font script="Jpan" typeface="ＭＳ Ｐゴシック"/>
-        <a:font script="Hang" typeface="맑은 고딕"/>
-        <a:font script="Hans" typeface="宋体"/>
-        <a:font script="Hant" typeface="新細明體"/>
-        <a:font script="Arab" typeface="Times New Roman"/>
-        <a:font script="Hebr" typeface="Times New Roman"/>
-        <a:font script="Thai" typeface="Angsana New"/>
-        <a:font script="Ethi" typeface="Nyala"/>
-        <a:font script="Beng" typeface="Vrinda"/>
-        <a:font script="Gujr" typeface="Shruti"/>
-        <a:font script="Khmr" typeface="MoolBoran"/>
-        <a:font script="Knda" typeface="Tunga"/>
-        <a:font script="Guru" typeface="Raavi"/>
-        <a:font script="Cans" typeface="Euphemia"/>
-        <a:font script="Cher" typeface="Plantagenet Cherokee"/>
-        <a:font script="Yiii" typeface="Microsoft Yi Baiti"/>
-        <a:font script="Tibt" typeface="Microsoft Himalaya"/>
-        <a:font script="Thaa" typeface="MV Boli"/>
-        <a:font script="Deva" typeface="Mangal"/>
-        <a:font script="Telu" typeface="Gautami"/>
-        <a:font script="Taml" typeface="Latha"/>
-        <a:font script="Syrc" typeface="Estrangelo Edessa"/>
-        <a:font script="Orya" typeface="Kalinga"/>
-        <a:font script="Mlym" typeface="Kartika"/>
-        <a:font script="Laoo" typeface="DokChampa"/>
-        <a:font script="Sinh" typeface="Iskoola Pota"/>
-        <a:font script="Mong" typeface="Mongolian Baiti"/>
-        <a:font script="Viet" typeface="Times New Roman"/>
-        <a:font script="Uigh" typeface="Microsoft Uighur"/>
-        <a:font script="Geor" typeface="Sylfaen"/>
-      </a:majorFont>
-      <a:minorFont>
-        <a:latin typeface="Arial"/>
-        <a:ea typeface=""/>
-        <a:cs typeface=""/>
-        <a:font script="Jpan" typeface="ＭＳ Ｐゴシック"/>
-        <a:font script="Hang" typeface="맑은 고딕"/>
-        <a:font script="Hans" typeface="宋体"/>
-        <a:font script="Hant" typeface="新細明體"/>
-        <a:font script="Arab" typeface="Arial"/>
-        <a:font script="Hebr" typeface="Arial"/>
-        <a:font script="Thai" typeface="Cordia New"/>
-        <a:font script="Ethi" typeface="Nyala"/>
-        <a:font script="Beng" typeface="Vrinda"/>
-        <a:font script="Gujr" typeface="Shruti"/>
-        <a:font script="Khmr" typeface="DaunPenh"/>
-        <a:font script="Knda" typeface="Tunga"/>
-        <a:font script="Guru" typeface="Raavi"/>
-        <a:font script="Cans" typeface="Euphemia"/>
-        <a:font script="Cher" typeface="Plantagenet Cherokee"/>
-        <a:font script="Yiii" typeface="Microsoft Yi Baiti"/>
-        <a:font script="Tibt" typeface="Microsoft Himalaya"/>
-        <a:font script="Thaa" typeface="MV Boli"/>
-        <a:font script="Deva" typeface="Mangal"/>
-        <a:font script="Telu" typeface="Gautami"/>
-        <a:font script="Taml" typeface="Latha"/>
-        <a:font script="Syrc" typeface="Estrangelo Edessa"/>
-        <a:font script="Orya" typeface="Kalinga"/>
-        <a:font script="Mlym" typeface="Kartika"/>
-        <a:font script="Laoo" typeface="DokChampa"/>
-        <a:font script="Sinh" typeface="Iskoola Pota"/>
-        <a:font script="Mong" typeface="Mongolian Baiti"/>
-        <a:font script="Viet" typeface="Arial"/>
-        <a:font script="Uigh" typeface="Microsoft Uighur"/>
-        <a:font script="Geor" typeface="Sylfaen"/>
-      </a:minorFont>
-    </a:fontScheme>
-    <a:fmtScheme name="Office">
-      <a:fillStyleLst>
-        <a:solidFill>
-          <a:schemeClr val="phClr"/>
-        </a:solidFill>
-        <a:gradFill rotWithShape="1">
-          <a:gsLst>
-            <a:gs pos="0">
-              <a:schemeClr val="phClr">
-                <a:tint val="50000"/>
-                <a:satMod val="300000"/>
-              </a:schemeClr>
-            </a:gs>
-            <a:gs pos="35000">
-              <a:schemeClr val="phClr">
-                <a:tint val="37000"/>
-                <a:satMod val="300000"/>
-              </a:schemeClr>
-            </a:gs>
-            <a:gs pos="100000">
-              <a:schemeClr val="phClr">
-                <a:tint val="15000"/>
-                <a:satMod val="350000"/>
-              </a:schemeClr>
-            </a:gs>
-          </a:gsLst>
-          <a:lin ang="16200000" scaled="1"/>
-        </a:gradFill>
-        <a:gradFill rotWithShape="1">
-          <a:gsLst>
-            <a:gs pos="0">
-              <a:schemeClr val="phClr">
-                <a:tint val="100000"/>
-                <a:shade val="100000"/>
-                <a:satMod val="130000"/>
-              </a:schemeClr>
-            </a:gs>
-            <a:gs pos="100000">
-              <a:schemeClr val="phClr">
-                <a:tint val="50000"/>
-                <a:shade val="100000"/>
-                <a:satMod val="350000"/>
-              </a:schemeClr>
-            </a:gs>
-          </a:gsLst>
-          <a:lin ang="16200000" scaled="0"/>
-        </a:gradFill>
-      </a:fillStyleLst>
-      <a:lnStyleLst>
-        <a:ln w="9525" cap="flat" cmpd="sng" algn="ctr">
-          <a:solidFill>
-            <a:schemeClr val="phClr">
-              <a:shade val="95000"/>
-              <a:satMod val="105000"/>
-            </a:schemeClr>
-          </a:solidFill>
-          <a:prstDash val="solid"/>
-        </a:ln>
-        <a:ln w="25400" cap="flat" cmpd="sng" algn="ctr">
-          <a:solidFill>
-            <a:schemeClr val="phClr"/>
-          </a:solidFill>
-          <a:prstDash val="solid"/>
-        </a:ln>
-        <a:ln w="38100" cap="flat" cmpd="sng" algn="ctr">
-          <a:solidFill>
-            <a:schemeClr val="phClr"/>
-          </a:solidFill>
-          <a:prstDash val="solid"/>
-        </a:ln>
-      </a:lnStyleLst>
-      <a:effectStyleLst>
-        <a:effectStyle>
-          <a:effectLst>
-            <a:outerShdw blurRad="40000" dist="20000" dir="5400000" rotWithShape="0">
-              <a:srgbClr val="000000">
-                <a:alpha val="38000"/>
-              </a:srgbClr>
-            </a:outerShdw>
-          </a:effectLst>
-        </a:effectStyle>
-        <a:effectStyle>
-          <a:effectLst>
-            <a:outerShdw blurRad="40000" dist="23000" dir="5400000" rotWithShape="0">
-              <a:srgbClr val="000000">
-                <a:alpha val="35000"/>
-              </a:srgbClr>
-            </a:outerShdw>
-          </a:effectLst>
-        </a:effectStyle>
-        <a:effectStyle>
-          <a:effectLst>
-            <a:outerShdw blurRad="40000" dist="23000" dir="5400000" rotWithShape="0">
-              <a:srgbClr val="000000">
-                <a:alpha val="35000"/>
-              </a:srgbClr>
-            </a:outerShdw>
-          </a:effectLst>
-          <a:scene3d>
-            <a:camera prst="orthographicFront">
-              <a:rot lat="0" lon="0" rev="0"/>
-            </a:camera>
-            <a:lightRig rig="threePt" dir="t">
-              <a:rot lat="0" lon="0" rev="1200000"/>
-            </a:lightRig>
-          </a:scene3d>
-          <a:sp3d>
-            <a:bevelT w="63500" h="25400"/>
-          </a:sp3d>
-        </a:effectStyle>
-      </a:effectStyleLst>
-      <a:bgFillStyleLst>
-        <a:solidFill>
-          <a:schemeClr val="phClr"/>
-        </a:solidFill>
-        <a:gradFill rotWithShape="1">
-          <a:gsLst>
-            <a:gs pos="0">
-              <a:schemeClr val="phClr">
-                <a:tint val="40000"/>
-                <a:satMod val="350000"/>
-              </a:schemeClr>
-            </a:gs>
-            <a:gs pos="40000">
-              <a:schemeClr val="phClr">
-                <a:tint val="45000"/>
-                <a:shade val="99000"/>
-                <a:satMod val="350000"/>
-              </a:schemeClr>
-            </a:gs>
-            <a:gs pos="100000">
-              <a:schemeClr val="phClr">
-                <a:shade val="20000"/>
-                <a:satMod val="255000"/>
-              </a:schemeClr>
-            </a:gs>
-          </a:gsLst>
-          <a:path path="circle">
-            <a:fillToRect l="50000" t="-80000" r="50000" b="180000"/>
-          </a:path>
-        </a:gradFill>
-        <a:gradFill rotWithShape="1">
-          <a:gsLst>
-            <a:gs pos="0">
-              <a:schemeClr val="phClr">
-                <a:tint val="80000"/>
-                <a:satMod val="300000"/>
-              </a:schemeClr>
-            </a:gs>
-            <a:gs pos="100000">
-              <a:schemeClr val="phClr">
-                <a:shade val="30000"/>
-                <a:satMod val="200000"/>
-              </a:schemeClr>
-            </a:gs>
-          </a:gsLst>
-          <a:path path="circle">
-            <a:fillToRect l="50000" t="50000" r="50000" b="50000"/>
-          </a:path>
-        </a:gradFill>
-      </a:bgFillStyleLst>
-    </a:fmtScheme>
-  </a:themeElements>
+  <a:objectDefaults/>
+  <a:extraClrSchemeLst/>
 </a:theme>
 </file>